--- a/native/HDDS_UX전략보고서_V1.0.pptx
+++ b/native/HDDS_UX전략보고서_V1.0.pptx
@@ -3359,42 +3359,112 @@
         </p:nvSpPr>
         <p:spPr>
           <a:xfrm>
-            <a:off x="365750" y="274320"/>
-            <a:ext cx="10972525" cy="480060"/>
-          </a:xfrm>
-          <a:prstGeom prst="rect">
-            <a:avLst/>
-          </a:prstGeom>
-          <a:noFill/>
-        </p:spPr>
-        <p:txBody>
-          <a:bodyPr wrap="square" lIns="36000" rIns="36000" tIns="18000" bIns="18000">
-            <a:spAutoFit/>
-          </a:bodyPr>
-          <a:lstStyle/>
-          <a:p>
-            <a:pPr algn="l"/>
-            <a:r>
-              <a:rPr sz="1700" b="1">
+            <a:off x="487667" y="137160"/>
+            <a:ext cx="7315017" cy="274320"/>
+          </a:xfrm>
+          <a:prstGeom prst="rect">
+            <a:avLst/>
+          </a:prstGeom>
+          <a:noFill/>
+        </p:spPr>
+        <p:txBody>
+          <a:bodyPr wrap="square" lIns="36000" rIns="36000" tIns="18000" bIns="18000">
+            <a:spAutoFit/>
+          </a:bodyPr>
+          <a:lstStyle/>
+          <a:p>
+            <a:pPr algn="l"/>
+            <a:r>
+              <a:rPr sz="900" b="0">
+                <a:solidFill>
+                  <a:srgbClr val="767676"/>
+                </a:solidFill>
+                <a:latin typeface="Pretendard"/>
+              </a:rPr>
+              <a:t>UX전략보고서</a:t>
+            </a:r>
+          </a:p>
+        </p:txBody>
+      </p:sp>
+      <p:sp>
+        <p:nvSpPr>
+          <p:cNvPr id="3" name="TextBox 2"/>
+          <p:cNvSpPr txBox="1"/>
+          <p:nvPr/>
+        </p:nvSpPr>
+        <p:spPr>
+          <a:xfrm>
+            <a:off x="487667" y="548640"/>
+            <a:ext cx="11216359" cy="548640"/>
+          </a:xfrm>
+          <a:prstGeom prst="rect">
+            <a:avLst/>
+          </a:prstGeom>
+          <a:noFill/>
+        </p:spPr>
+        <p:txBody>
+          <a:bodyPr wrap="square" lIns="36000" rIns="36000" tIns="18000" bIns="18000">
+            <a:spAutoFit/>
+          </a:bodyPr>
+          <a:lstStyle/>
+          <a:p>
+            <a:pPr algn="l"/>
+            <a:r>
+              <a:rPr sz="2400" b="1">
                 <a:solidFill>
                   <a:srgbClr val="1A1A1A"/>
                 </a:solidFill>
                 <a:latin typeface="Pretendard"/>
               </a:rPr>
-              <a:t>8. 선결 조건 — ✅ 2건 모두 해소 (2026-08-06)</a:t>
-            </a:r>
-          </a:p>
-        </p:txBody>
-      </p:sp>
-      <p:sp>
-        <p:nvSpPr>
-          <p:cNvPr id="3" name="Rectangle 2"/>
+              <a:t>선결 조건</a:t>
+            </a:r>
+          </a:p>
+        </p:txBody>
+      </p:sp>
+      <p:sp>
+        <p:nvSpPr>
+          <p:cNvPr id="4" name="TextBox 3"/>
+          <p:cNvSpPr txBox="1"/>
+          <p:nvPr/>
+        </p:nvSpPr>
+        <p:spPr>
+          <a:xfrm>
+            <a:off x="487667" y="1097280"/>
+            <a:ext cx="11216359" cy="377190"/>
+          </a:xfrm>
+          <a:prstGeom prst="rect">
+            <a:avLst/>
+          </a:prstGeom>
+          <a:noFill/>
+        </p:spPr>
+        <p:txBody>
+          <a:bodyPr wrap="square" lIns="36000" rIns="36000" tIns="18000" bIns="18000">
+            <a:spAutoFit/>
+          </a:bodyPr>
+          <a:lstStyle/>
+          <a:p>
+            <a:pPr algn="l"/>
+            <a:r>
+              <a:rPr sz="1200" b="0">
+                <a:solidFill>
+                  <a:srgbClr val="767676"/>
+                </a:solidFill>
+                <a:latin typeface="Pretendard"/>
+              </a:rPr>
+              <a:t>✅ 2건 모두 해소 (2026-08-06)</a:t>
+            </a:r>
+          </a:p>
+        </p:txBody>
+      </p:sp>
+      <p:sp>
+        <p:nvSpPr>
+          <p:cNvPr id="5" name="Rectangle 4"/>
           <p:cNvSpPr/>
           <p:nvPr/>
         </p:nvSpPr>
         <p:spPr>
           <a:xfrm>
-            <a:off x="365750" y="891540"/>
+            <a:off x="487667" y="1577340"/>
             <a:ext cx="3169840" cy="377190"/>
           </a:xfrm>
           <a:prstGeom prst="rect">
@@ -3434,13 +3504,13 @@
       </p:sp>
       <p:sp>
         <p:nvSpPr>
-          <p:cNvPr id="4" name="TextBox 3"/>
-          <p:cNvSpPr txBox="1"/>
-          <p:nvPr/>
-        </p:nvSpPr>
-        <p:spPr>
-          <a:xfrm>
-            <a:off x="365750" y="946404"/>
+          <p:cNvPr id="6" name="TextBox 5"/>
+          <p:cNvSpPr txBox="1"/>
+          <p:nvPr/>
+        </p:nvSpPr>
+        <p:spPr>
+          <a:xfrm>
+            <a:off x="487667" y="1632204"/>
             <a:ext cx="3169840" cy="301752"/>
           </a:xfrm>
           <a:prstGeom prst="rect">
@@ -3469,13 +3539,13 @@
       </p:sp>
       <p:sp>
         <p:nvSpPr>
-          <p:cNvPr id="5" name="Rectangle 4"/>
+          <p:cNvPr id="7" name="Rectangle 6"/>
           <p:cNvSpPr/>
           <p:nvPr/>
         </p:nvSpPr>
         <p:spPr>
           <a:xfrm>
-            <a:off x="3535591" y="891540"/>
+            <a:off x="3657508" y="1577340"/>
             <a:ext cx="4145176" cy="377190"/>
           </a:xfrm>
           <a:prstGeom prst="rect">
@@ -3515,13 +3585,13 @@
       </p:sp>
       <p:sp>
         <p:nvSpPr>
-          <p:cNvPr id="6" name="TextBox 5"/>
-          <p:cNvSpPr txBox="1"/>
-          <p:nvPr/>
-        </p:nvSpPr>
-        <p:spPr>
-          <a:xfrm>
-            <a:off x="3535591" y="946404"/>
+          <p:cNvPr id="8" name="TextBox 7"/>
+          <p:cNvSpPr txBox="1"/>
+          <p:nvPr/>
+        </p:nvSpPr>
+        <p:spPr>
+          <a:xfrm>
+            <a:off x="3657508" y="1632204"/>
             <a:ext cx="4145176" cy="301752"/>
           </a:xfrm>
           <a:prstGeom prst="rect">
@@ -3550,13 +3620,13 @@
       </p:sp>
       <p:sp>
         <p:nvSpPr>
-          <p:cNvPr id="7" name="Rectangle 6"/>
+          <p:cNvPr id="9" name="Rectangle 8"/>
           <p:cNvSpPr/>
           <p:nvPr/>
         </p:nvSpPr>
         <p:spPr>
           <a:xfrm>
-            <a:off x="7680767" y="891540"/>
+            <a:off x="7802684" y="1577340"/>
             <a:ext cx="4145176" cy="377190"/>
           </a:xfrm>
           <a:prstGeom prst="rect">
@@ -3596,13 +3666,13 @@
       </p:sp>
       <p:sp>
         <p:nvSpPr>
-          <p:cNvPr id="8" name="TextBox 7"/>
-          <p:cNvSpPr txBox="1"/>
-          <p:nvPr/>
-        </p:nvSpPr>
-        <p:spPr>
-          <a:xfrm>
-            <a:off x="7680767" y="946404"/>
+          <p:cNvPr id="10" name="TextBox 9"/>
+          <p:cNvSpPr txBox="1"/>
+          <p:nvPr/>
+        </p:nvSpPr>
+        <p:spPr>
+          <a:xfrm>
+            <a:off x="7802684" y="1632204"/>
             <a:ext cx="4145176" cy="301752"/>
           </a:xfrm>
           <a:prstGeom prst="rect">
@@ -3631,13 +3701,13 @@
       </p:sp>
       <p:sp>
         <p:nvSpPr>
-          <p:cNvPr id="9" name="Rectangle 8"/>
+          <p:cNvPr id="11" name="Rectangle 10"/>
           <p:cNvSpPr/>
           <p:nvPr/>
         </p:nvSpPr>
         <p:spPr>
           <a:xfrm>
-            <a:off x="365750" y="1268730"/>
+            <a:off x="487667" y="1954530"/>
             <a:ext cx="3169840" cy="411480"/>
           </a:xfrm>
           <a:prstGeom prst="rect">
@@ -3677,13 +3747,13 @@
       </p:sp>
       <p:sp>
         <p:nvSpPr>
-          <p:cNvPr id="10" name="TextBox 9"/>
-          <p:cNvSpPr txBox="1"/>
-          <p:nvPr/>
-        </p:nvSpPr>
-        <p:spPr>
-          <a:xfrm>
-            <a:off x="365750" y="1296161"/>
+          <p:cNvPr id="12" name="TextBox 11"/>
+          <p:cNvSpPr txBox="1"/>
+          <p:nvPr/>
+        </p:nvSpPr>
+        <p:spPr>
+          <a:xfrm>
+            <a:off x="487667" y="1981962"/>
             <a:ext cx="3169840" cy="356616"/>
           </a:xfrm>
           <a:prstGeom prst="rect">
@@ -3699,7 +3769,7 @@
           <a:p>
             <a:pPr algn="l"/>
             <a:r>
-              <a:rPr sz="750" b="0">
+              <a:rPr sz="800" b="0">
                 <a:solidFill>
                   <a:srgbClr val="1A1A1A"/>
                 </a:solidFill>
@@ -3712,13 +3782,13 @@
       </p:sp>
       <p:sp>
         <p:nvSpPr>
-          <p:cNvPr id="11" name="Rectangle 10"/>
+          <p:cNvPr id="13" name="Rectangle 12"/>
           <p:cNvSpPr/>
           <p:nvPr/>
         </p:nvSpPr>
         <p:spPr>
           <a:xfrm>
-            <a:off x="3535591" y="1268730"/>
+            <a:off x="3657508" y="1954530"/>
             <a:ext cx="4145176" cy="411480"/>
           </a:xfrm>
           <a:prstGeom prst="rect">
@@ -3758,13 +3828,13 @@
       </p:sp>
       <p:sp>
         <p:nvSpPr>
-          <p:cNvPr id="12" name="TextBox 11"/>
-          <p:cNvSpPr txBox="1"/>
-          <p:nvPr/>
-        </p:nvSpPr>
-        <p:spPr>
-          <a:xfrm>
-            <a:off x="3535591" y="1296161"/>
+          <p:cNvPr id="14" name="TextBox 13"/>
+          <p:cNvSpPr txBox="1"/>
+          <p:nvPr/>
+        </p:nvSpPr>
+        <p:spPr>
+          <a:xfrm>
+            <a:off x="3657508" y="1981962"/>
             <a:ext cx="4145176" cy="356616"/>
           </a:xfrm>
           <a:prstGeom prst="rect">
@@ -3780,7 +3850,7 @@
           <a:p>
             <a:pPr algn="l"/>
             <a:r>
-              <a:rPr sz="750" b="0">
+              <a:rPr sz="800" b="0">
                 <a:solidFill>
                   <a:srgbClr val="1A1A1A"/>
                 </a:solidFill>
@@ -3793,13 +3863,13 @@
       </p:sp>
       <p:sp>
         <p:nvSpPr>
-          <p:cNvPr id="13" name="Rectangle 12"/>
+          <p:cNvPr id="15" name="Rectangle 14"/>
           <p:cNvSpPr/>
           <p:nvPr/>
         </p:nvSpPr>
         <p:spPr>
           <a:xfrm>
-            <a:off x="7680767" y="1268730"/>
+            <a:off x="7802684" y="1954530"/>
             <a:ext cx="4145176" cy="411480"/>
           </a:xfrm>
           <a:prstGeom prst="rect">
@@ -3839,13 +3909,13 @@
       </p:sp>
       <p:sp>
         <p:nvSpPr>
-          <p:cNvPr id="14" name="TextBox 13"/>
-          <p:cNvSpPr txBox="1"/>
-          <p:nvPr/>
-        </p:nvSpPr>
-        <p:spPr>
-          <a:xfrm>
-            <a:off x="7680767" y="1296161"/>
+          <p:cNvPr id="16" name="TextBox 15"/>
+          <p:cNvSpPr txBox="1"/>
+          <p:nvPr/>
+        </p:nvSpPr>
+        <p:spPr>
+          <a:xfrm>
+            <a:off x="7802684" y="1981962"/>
             <a:ext cx="4145176" cy="356616"/>
           </a:xfrm>
           <a:prstGeom prst="rect">
@@ -3861,7 +3931,7 @@
           <a:p>
             <a:pPr algn="l"/>
             <a:r>
-              <a:rPr sz="750" b="0">
+              <a:rPr sz="800" b="0">
                 <a:solidFill>
                   <a:srgbClr val="1A1A1A"/>
                 </a:solidFill>
@@ -3874,13 +3944,13 @@
       </p:sp>
       <p:sp>
         <p:nvSpPr>
-          <p:cNvPr id="15" name="Rectangle 14"/>
+          <p:cNvPr id="17" name="Rectangle 16"/>
           <p:cNvSpPr/>
           <p:nvPr/>
         </p:nvSpPr>
         <p:spPr>
           <a:xfrm>
-            <a:off x="365750" y="1680210"/>
+            <a:off x="487667" y="2366010"/>
             <a:ext cx="3169840" cy="411480"/>
           </a:xfrm>
           <a:prstGeom prst="rect">
@@ -3920,13 +3990,13 @@
       </p:sp>
       <p:sp>
         <p:nvSpPr>
-          <p:cNvPr id="16" name="TextBox 15"/>
-          <p:cNvSpPr txBox="1"/>
-          <p:nvPr/>
-        </p:nvSpPr>
-        <p:spPr>
-          <a:xfrm>
-            <a:off x="365750" y="1707642"/>
+          <p:cNvPr id="18" name="TextBox 17"/>
+          <p:cNvSpPr txBox="1"/>
+          <p:nvPr/>
+        </p:nvSpPr>
+        <p:spPr>
+          <a:xfrm>
+            <a:off x="487667" y="2393442"/>
             <a:ext cx="3169840" cy="356616"/>
           </a:xfrm>
           <a:prstGeom prst="rect">
@@ -3942,7 +4012,7 @@
           <a:p>
             <a:pPr algn="l"/>
             <a:r>
-              <a:rPr sz="750" b="0">
+              <a:rPr sz="800" b="0">
                 <a:solidFill>
                   <a:srgbClr val="1A1A1A"/>
                 </a:solidFill>
@@ -3955,13 +4025,13 @@
       </p:sp>
       <p:sp>
         <p:nvSpPr>
-          <p:cNvPr id="17" name="Rectangle 16"/>
+          <p:cNvPr id="19" name="Rectangle 18"/>
           <p:cNvSpPr/>
           <p:nvPr/>
         </p:nvSpPr>
         <p:spPr>
           <a:xfrm>
-            <a:off x="3535591" y="1680210"/>
+            <a:off x="3657508" y="2366010"/>
             <a:ext cx="4145176" cy="411480"/>
           </a:xfrm>
           <a:prstGeom prst="rect">
@@ -4001,13 +4071,13 @@
       </p:sp>
       <p:sp>
         <p:nvSpPr>
-          <p:cNvPr id="18" name="TextBox 17"/>
-          <p:cNvSpPr txBox="1"/>
-          <p:nvPr/>
-        </p:nvSpPr>
-        <p:spPr>
-          <a:xfrm>
-            <a:off x="3535591" y="1707642"/>
+          <p:cNvPr id="20" name="TextBox 19"/>
+          <p:cNvSpPr txBox="1"/>
+          <p:nvPr/>
+        </p:nvSpPr>
+        <p:spPr>
+          <a:xfrm>
+            <a:off x="3657508" y="2393442"/>
             <a:ext cx="4145176" cy="356616"/>
           </a:xfrm>
           <a:prstGeom prst="rect">
@@ -4023,7 +4093,7 @@
           <a:p>
             <a:pPr algn="l"/>
             <a:r>
-              <a:rPr sz="750" b="0">
+              <a:rPr sz="800" b="0">
                 <a:solidFill>
                   <a:srgbClr val="1A1A1A"/>
                 </a:solidFill>
@@ -4036,13 +4106,13 @@
       </p:sp>
       <p:sp>
         <p:nvSpPr>
-          <p:cNvPr id="19" name="Rectangle 18"/>
+          <p:cNvPr id="21" name="Rectangle 20"/>
           <p:cNvSpPr/>
           <p:nvPr/>
         </p:nvSpPr>
         <p:spPr>
           <a:xfrm>
-            <a:off x="7680767" y="1680210"/>
+            <a:off x="7802684" y="2366010"/>
             <a:ext cx="4145176" cy="411480"/>
           </a:xfrm>
           <a:prstGeom prst="rect">
@@ -4082,13 +4152,13 @@
       </p:sp>
       <p:sp>
         <p:nvSpPr>
-          <p:cNvPr id="20" name="TextBox 19"/>
-          <p:cNvSpPr txBox="1"/>
-          <p:nvPr/>
-        </p:nvSpPr>
-        <p:spPr>
-          <a:xfrm>
-            <a:off x="7680767" y="1707642"/>
+          <p:cNvPr id="22" name="TextBox 21"/>
+          <p:cNvSpPr txBox="1"/>
+          <p:nvPr/>
+        </p:nvSpPr>
+        <p:spPr>
+          <a:xfrm>
+            <a:off x="7802684" y="2393442"/>
             <a:ext cx="4145176" cy="356616"/>
           </a:xfrm>
           <a:prstGeom prst="rect">
@@ -4104,7 +4174,7 @@
           <a:p>
             <a:pPr algn="l"/>
             <a:r>
-              <a:rPr sz="750" b="0">
+              <a:rPr sz="800" b="0">
                 <a:solidFill>
                   <a:srgbClr val="1A1A1A"/>
                 </a:solidFill>
@@ -4117,13 +4187,13 @@
       </p:sp>
       <p:sp>
         <p:nvSpPr>
-          <p:cNvPr id="21" name="Rectangle 20"/>
+          <p:cNvPr id="23" name="Rectangle 22"/>
           <p:cNvSpPr/>
           <p:nvPr/>
         </p:nvSpPr>
         <p:spPr>
           <a:xfrm>
-            <a:off x="365750" y="2091690"/>
+            <a:off x="487667" y="2777490"/>
             <a:ext cx="3169840" cy="411480"/>
           </a:xfrm>
           <a:prstGeom prst="rect">
@@ -4163,13 +4233,13 @@
       </p:sp>
       <p:sp>
         <p:nvSpPr>
-          <p:cNvPr id="22" name="TextBox 21"/>
-          <p:cNvSpPr txBox="1"/>
-          <p:nvPr/>
-        </p:nvSpPr>
-        <p:spPr>
-          <a:xfrm>
-            <a:off x="365750" y="2119122"/>
+          <p:cNvPr id="24" name="TextBox 23"/>
+          <p:cNvSpPr txBox="1"/>
+          <p:nvPr/>
+        </p:nvSpPr>
+        <p:spPr>
+          <a:xfrm>
+            <a:off x="487667" y="2804922"/>
             <a:ext cx="3169840" cy="356616"/>
           </a:xfrm>
           <a:prstGeom prst="rect">
@@ -4185,7 +4255,7 @@
           <a:p>
             <a:pPr algn="l"/>
             <a:r>
-              <a:rPr sz="750" b="0">
+              <a:rPr sz="800" b="0">
                 <a:solidFill>
                   <a:srgbClr val="1A1A1A"/>
                 </a:solidFill>
@@ -4198,13 +4268,13 @@
       </p:sp>
       <p:sp>
         <p:nvSpPr>
-          <p:cNvPr id="23" name="Rectangle 22"/>
+          <p:cNvPr id="25" name="Rectangle 24"/>
           <p:cNvSpPr/>
           <p:nvPr/>
         </p:nvSpPr>
         <p:spPr>
           <a:xfrm>
-            <a:off x="3535591" y="2091690"/>
+            <a:off x="3657508" y="2777490"/>
             <a:ext cx="4145176" cy="411480"/>
           </a:xfrm>
           <a:prstGeom prst="rect">
@@ -4244,13 +4314,13 @@
       </p:sp>
       <p:sp>
         <p:nvSpPr>
-          <p:cNvPr id="24" name="TextBox 23"/>
-          <p:cNvSpPr txBox="1"/>
-          <p:nvPr/>
-        </p:nvSpPr>
-        <p:spPr>
-          <a:xfrm>
-            <a:off x="3535591" y="2119122"/>
+          <p:cNvPr id="26" name="TextBox 25"/>
+          <p:cNvSpPr txBox="1"/>
+          <p:nvPr/>
+        </p:nvSpPr>
+        <p:spPr>
+          <a:xfrm>
+            <a:off x="3657508" y="2804922"/>
             <a:ext cx="4145176" cy="356616"/>
           </a:xfrm>
           <a:prstGeom prst="rect">
@@ -4266,7 +4336,7 @@
           <a:p>
             <a:pPr algn="l"/>
             <a:r>
-              <a:rPr sz="750" b="0">
+              <a:rPr sz="800" b="0">
                 <a:solidFill>
                   <a:srgbClr val="1A1A1A"/>
                 </a:solidFill>
@@ -4279,13 +4349,13 @@
       </p:sp>
       <p:sp>
         <p:nvSpPr>
-          <p:cNvPr id="25" name="Rectangle 24"/>
+          <p:cNvPr id="27" name="Rectangle 26"/>
           <p:cNvSpPr/>
           <p:nvPr/>
         </p:nvSpPr>
         <p:spPr>
           <a:xfrm>
-            <a:off x="7680767" y="2091690"/>
+            <a:off x="7802684" y="2777490"/>
             <a:ext cx="4145176" cy="411480"/>
           </a:xfrm>
           <a:prstGeom prst="rect">
@@ -4325,13 +4395,13 @@
       </p:sp>
       <p:sp>
         <p:nvSpPr>
-          <p:cNvPr id="26" name="TextBox 25"/>
-          <p:cNvSpPr txBox="1"/>
-          <p:nvPr/>
-        </p:nvSpPr>
-        <p:spPr>
-          <a:xfrm>
-            <a:off x="7680767" y="2119122"/>
+          <p:cNvPr id="28" name="TextBox 27"/>
+          <p:cNvSpPr txBox="1"/>
+          <p:nvPr/>
+        </p:nvSpPr>
+        <p:spPr>
+          <a:xfrm>
+            <a:off x="7802684" y="2804922"/>
             <a:ext cx="4145176" cy="356616"/>
           </a:xfrm>
           <a:prstGeom prst="rect">
@@ -4347,7 +4417,7 @@
           <a:p>
             <a:pPr algn="l"/>
             <a:r>
-              <a:rPr sz="750" b="0">
+              <a:rPr sz="800" b="0">
                 <a:solidFill>
                   <a:srgbClr val="1A1A1A"/>
                 </a:solidFill>
@@ -4360,13 +4430,13 @@
       </p:sp>
       <p:sp>
         <p:nvSpPr>
-          <p:cNvPr id="27" name="Rectangle 26"/>
+          <p:cNvPr id="29" name="Rectangle 28"/>
           <p:cNvSpPr/>
           <p:nvPr/>
         </p:nvSpPr>
         <p:spPr>
           <a:xfrm>
-            <a:off x="365750" y="2503170"/>
+            <a:off x="487667" y="3188970"/>
             <a:ext cx="3169840" cy="411480"/>
           </a:xfrm>
           <a:prstGeom prst="rect">
@@ -4406,13 +4476,13 @@
       </p:sp>
       <p:sp>
         <p:nvSpPr>
-          <p:cNvPr id="28" name="TextBox 27"/>
-          <p:cNvSpPr txBox="1"/>
-          <p:nvPr/>
-        </p:nvSpPr>
-        <p:spPr>
-          <a:xfrm>
-            <a:off x="365750" y="2530602"/>
+          <p:cNvPr id="30" name="TextBox 29"/>
+          <p:cNvSpPr txBox="1"/>
+          <p:nvPr/>
+        </p:nvSpPr>
+        <p:spPr>
+          <a:xfrm>
+            <a:off x="487667" y="3216402"/>
             <a:ext cx="3169840" cy="356616"/>
           </a:xfrm>
           <a:prstGeom prst="rect">
@@ -4428,7 +4498,7 @@
           <a:p>
             <a:pPr algn="l"/>
             <a:r>
-              <a:rPr sz="750" b="0">
+              <a:rPr sz="800" b="0">
                 <a:solidFill>
                   <a:srgbClr val="1A1A1A"/>
                 </a:solidFill>
@@ -4441,13 +4511,13 @@
       </p:sp>
       <p:sp>
         <p:nvSpPr>
-          <p:cNvPr id="29" name="Rectangle 28"/>
+          <p:cNvPr id="31" name="Rectangle 30"/>
           <p:cNvSpPr/>
           <p:nvPr/>
         </p:nvSpPr>
         <p:spPr>
           <a:xfrm>
-            <a:off x="3535591" y="2503170"/>
+            <a:off x="3657508" y="3188970"/>
             <a:ext cx="4145176" cy="411480"/>
           </a:xfrm>
           <a:prstGeom prst="rect">
@@ -4487,13 +4557,13 @@
       </p:sp>
       <p:sp>
         <p:nvSpPr>
-          <p:cNvPr id="30" name="TextBox 29"/>
-          <p:cNvSpPr txBox="1"/>
-          <p:nvPr/>
-        </p:nvSpPr>
-        <p:spPr>
-          <a:xfrm>
-            <a:off x="3535591" y="2530602"/>
+          <p:cNvPr id="32" name="TextBox 31"/>
+          <p:cNvSpPr txBox="1"/>
+          <p:nvPr/>
+        </p:nvSpPr>
+        <p:spPr>
+          <a:xfrm>
+            <a:off x="3657508" y="3216402"/>
             <a:ext cx="4145176" cy="356616"/>
           </a:xfrm>
           <a:prstGeom prst="rect">
@@ -4509,7 +4579,7 @@
           <a:p>
             <a:pPr algn="l"/>
             <a:r>
-              <a:rPr sz="750" b="0">
+              <a:rPr sz="800" b="0">
                 <a:solidFill>
                   <a:srgbClr val="1A1A1A"/>
                 </a:solidFill>
@@ -4522,13 +4592,13 @@
       </p:sp>
       <p:sp>
         <p:nvSpPr>
-          <p:cNvPr id="31" name="Rectangle 30"/>
+          <p:cNvPr id="33" name="Rectangle 32"/>
           <p:cNvSpPr/>
           <p:nvPr/>
         </p:nvSpPr>
         <p:spPr>
           <a:xfrm>
-            <a:off x="7680767" y="2503170"/>
+            <a:off x="7802684" y="3188970"/>
             <a:ext cx="4145176" cy="411480"/>
           </a:xfrm>
           <a:prstGeom prst="rect">
@@ -4568,13 +4638,13 @@
       </p:sp>
       <p:sp>
         <p:nvSpPr>
-          <p:cNvPr id="32" name="TextBox 31"/>
-          <p:cNvSpPr txBox="1"/>
-          <p:nvPr/>
-        </p:nvSpPr>
-        <p:spPr>
-          <a:xfrm>
-            <a:off x="7680767" y="2530602"/>
+          <p:cNvPr id="34" name="TextBox 33"/>
+          <p:cNvSpPr txBox="1"/>
+          <p:nvPr/>
+        </p:nvSpPr>
+        <p:spPr>
+          <a:xfrm>
+            <a:off x="7802684" y="3216402"/>
             <a:ext cx="4145176" cy="356616"/>
           </a:xfrm>
           <a:prstGeom prst="rect">
@@ -4590,7 +4660,7 @@
           <a:p>
             <a:pPr algn="l"/>
             <a:r>
-              <a:rPr sz="750" b="0">
+              <a:rPr sz="800" b="0">
                 <a:solidFill>
                   <a:srgbClr val="1A1A1A"/>
                 </a:solidFill>
@@ -4603,13 +4673,13 @@
       </p:sp>
       <p:sp>
         <p:nvSpPr>
-          <p:cNvPr id="33" name="Rectangle 32"/>
+          <p:cNvPr id="35" name="Rectangle 34"/>
           <p:cNvSpPr/>
           <p:nvPr/>
         </p:nvSpPr>
         <p:spPr>
           <a:xfrm>
-            <a:off x="365750" y="2914650"/>
+            <a:off x="487667" y="3600450"/>
             <a:ext cx="3169840" cy="699516"/>
           </a:xfrm>
           <a:prstGeom prst="rect">
@@ -4649,13 +4719,13 @@
       </p:sp>
       <p:sp>
         <p:nvSpPr>
-          <p:cNvPr id="34" name="TextBox 33"/>
-          <p:cNvSpPr txBox="1"/>
-          <p:nvPr/>
-        </p:nvSpPr>
-        <p:spPr>
-          <a:xfrm>
-            <a:off x="365750" y="2942082"/>
+          <p:cNvPr id="36" name="TextBox 35"/>
+          <p:cNvSpPr txBox="1"/>
+          <p:nvPr/>
+        </p:nvSpPr>
+        <p:spPr>
+          <a:xfrm>
+            <a:off x="487667" y="3627882"/>
             <a:ext cx="3169840" cy="644651"/>
           </a:xfrm>
           <a:prstGeom prst="rect">
@@ -4671,7 +4741,7 @@
           <a:p>
             <a:pPr algn="l"/>
             <a:r>
-              <a:rPr sz="750" b="0">
+              <a:rPr sz="800" b="0">
                 <a:solidFill>
                   <a:srgbClr val="1A1A1A"/>
                 </a:solidFill>
@@ -4684,13 +4754,13 @@
       </p:sp>
       <p:sp>
         <p:nvSpPr>
-          <p:cNvPr id="35" name="Rectangle 34"/>
+          <p:cNvPr id="37" name="Rectangle 36"/>
           <p:cNvSpPr/>
           <p:nvPr/>
         </p:nvSpPr>
         <p:spPr>
           <a:xfrm>
-            <a:off x="3535591" y="2914650"/>
+            <a:off x="3657508" y="3600450"/>
             <a:ext cx="4145176" cy="699516"/>
           </a:xfrm>
           <a:prstGeom prst="rect">
@@ -4730,13 +4800,13 @@
       </p:sp>
       <p:sp>
         <p:nvSpPr>
-          <p:cNvPr id="36" name="TextBox 35"/>
-          <p:cNvSpPr txBox="1"/>
-          <p:nvPr/>
-        </p:nvSpPr>
-        <p:spPr>
-          <a:xfrm>
-            <a:off x="3535591" y="2942082"/>
+          <p:cNvPr id="38" name="TextBox 37"/>
+          <p:cNvSpPr txBox="1"/>
+          <p:nvPr/>
+        </p:nvSpPr>
+        <p:spPr>
+          <a:xfrm>
+            <a:off x="3657508" y="3627882"/>
             <a:ext cx="4145176" cy="644651"/>
           </a:xfrm>
           <a:prstGeom prst="rect">
@@ -4752,7 +4822,7 @@
           <a:p>
             <a:pPr algn="l"/>
             <a:r>
-              <a:rPr sz="750" b="0">
+              <a:rPr sz="800" b="0">
                 <a:solidFill>
                   <a:srgbClr val="1A1A1A"/>
                 </a:solidFill>
@@ -4765,13 +4835,13 @@
       </p:sp>
       <p:sp>
         <p:nvSpPr>
-          <p:cNvPr id="37" name="Rectangle 36"/>
+          <p:cNvPr id="39" name="Rectangle 38"/>
           <p:cNvSpPr/>
           <p:nvPr/>
         </p:nvSpPr>
         <p:spPr>
           <a:xfrm>
-            <a:off x="7680767" y="2914650"/>
+            <a:off x="7802684" y="3600450"/>
             <a:ext cx="4145176" cy="699516"/>
           </a:xfrm>
           <a:prstGeom prst="rect">
@@ -4811,13 +4881,13 @@
       </p:sp>
       <p:sp>
         <p:nvSpPr>
-          <p:cNvPr id="38" name="TextBox 37"/>
-          <p:cNvSpPr txBox="1"/>
-          <p:nvPr/>
-        </p:nvSpPr>
-        <p:spPr>
-          <a:xfrm>
-            <a:off x="7680767" y="2942082"/>
+          <p:cNvPr id="40" name="TextBox 39"/>
+          <p:cNvSpPr txBox="1"/>
+          <p:nvPr/>
+        </p:nvSpPr>
+        <p:spPr>
+          <a:xfrm>
+            <a:off x="7802684" y="3627882"/>
             <a:ext cx="4145176" cy="644651"/>
           </a:xfrm>
           <a:prstGeom prst="rect">
@@ -4833,7 +4903,7 @@
           <a:p>
             <a:pPr algn="l"/>
             <a:r>
-              <a:rPr sz="750" b="0">
+              <a:rPr sz="800" b="0">
                 <a:solidFill>
                   <a:srgbClr val="1A1A1A"/>
                 </a:solidFill>
@@ -4846,13 +4916,13 @@
       </p:sp>
       <p:sp>
         <p:nvSpPr>
-          <p:cNvPr id="39" name="Rectangle 38"/>
+          <p:cNvPr id="41" name="Rectangle 40"/>
           <p:cNvSpPr/>
           <p:nvPr/>
         </p:nvSpPr>
         <p:spPr>
           <a:xfrm>
-            <a:off x="365750" y="3614166"/>
+            <a:off x="487667" y="4299966"/>
             <a:ext cx="3169840" cy="534924"/>
           </a:xfrm>
           <a:prstGeom prst="rect">
@@ -4892,13 +4962,13 @@
       </p:sp>
       <p:sp>
         <p:nvSpPr>
-          <p:cNvPr id="40" name="TextBox 39"/>
-          <p:cNvSpPr txBox="1"/>
-          <p:nvPr/>
-        </p:nvSpPr>
-        <p:spPr>
-          <a:xfrm>
-            <a:off x="365750" y="3641598"/>
+          <p:cNvPr id="42" name="TextBox 41"/>
+          <p:cNvSpPr txBox="1"/>
+          <p:nvPr/>
+        </p:nvSpPr>
+        <p:spPr>
+          <a:xfrm>
+            <a:off x="487667" y="4327398"/>
             <a:ext cx="3169840" cy="480060"/>
           </a:xfrm>
           <a:prstGeom prst="rect">
@@ -4914,7 +4984,7 @@
           <a:p>
             <a:pPr algn="l"/>
             <a:r>
-              <a:rPr sz="750" b="0">
+              <a:rPr sz="800" b="0">
                 <a:solidFill>
                   <a:srgbClr val="1A1A1A"/>
                 </a:solidFill>
@@ -4927,13 +4997,13 @@
       </p:sp>
       <p:sp>
         <p:nvSpPr>
-          <p:cNvPr id="41" name="Rectangle 40"/>
+          <p:cNvPr id="43" name="Rectangle 42"/>
           <p:cNvSpPr/>
           <p:nvPr/>
         </p:nvSpPr>
         <p:spPr>
           <a:xfrm>
-            <a:off x="3535591" y="3614166"/>
+            <a:off x="3657508" y="4299966"/>
             <a:ext cx="4145176" cy="534924"/>
           </a:xfrm>
           <a:prstGeom prst="rect">
@@ -4973,13 +5043,13 @@
       </p:sp>
       <p:sp>
         <p:nvSpPr>
-          <p:cNvPr id="42" name="TextBox 41"/>
-          <p:cNvSpPr txBox="1"/>
-          <p:nvPr/>
-        </p:nvSpPr>
-        <p:spPr>
-          <a:xfrm>
-            <a:off x="3535591" y="3641598"/>
+          <p:cNvPr id="44" name="TextBox 43"/>
+          <p:cNvSpPr txBox="1"/>
+          <p:nvPr/>
+        </p:nvSpPr>
+        <p:spPr>
+          <a:xfrm>
+            <a:off x="3657508" y="4327398"/>
             <a:ext cx="4145176" cy="480060"/>
           </a:xfrm>
           <a:prstGeom prst="rect">
@@ -4995,7 +5065,7 @@
           <a:p>
             <a:pPr algn="l"/>
             <a:r>
-              <a:rPr sz="750" b="0">
+              <a:rPr sz="800" b="0">
                 <a:solidFill>
                   <a:srgbClr val="1A1A1A"/>
                 </a:solidFill>
@@ -5008,13 +5078,13 @@
       </p:sp>
       <p:sp>
         <p:nvSpPr>
-          <p:cNvPr id="43" name="Rectangle 42"/>
+          <p:cNvPr id="45" name="Rectangle 44"/>
           <p:cNvSpPr/>
           <p:nvPr/>
         </p:nvSpPr>
         <p:spPr>
           <a:xfrm>
-            <a:off x="7680767" y="3614166"/>
+            <a:off x="7802684" y="4299966"/>
             <a:ext cx="4145176" cy="534924"/>
           </a:xfrm>
           <a:prstGeom prst="rect">
@@ -5054,13 +5124,13 @@
       </p:sp>
       <p:sp>
         <p:nvSpPr>
-          <p:cNvPr id="44" name="TextBox 43"/>
-          <p:cNvSpPr txBox="1"/>
-          <p:nvPr/>
-        </p:nvSpPr>
-        <p:spPr>
-          <a:xfrm>
-            <a:off x="7680767" y="3641598"/>
+          <p:cNvPr id="46" name="TextBox 45"/>
+          <p:cNvSpPr txBox="1"/>
+          <p:nvPr/>
+        </p:nvSpPr>
+        <p:spPr>
+          <a:xfrm>
+            <a:off x="7802684" y="4327398"/>
             <a:ext cx="4145176" cy="480060"/>
           </a:xfrm>
           <a:prstGeom prst="rect">
@@ -5076,7 +5146,7 @@
           <a:p>
             <a:pPr algn="l"/>
             <a:r>
-              <a:rPr sz="750" b="0">
+              <a:rPr sz="800" b="0">
                 <a:solidFill>
                   <a:srgbClr val="1A1A1A"/>
                 </a:solidFill>
@@ -5089,13 +5159,13 @@
       </p:sp>
       <p:sp>
         <p:nvSpPr>
-          <p:cNvPr id="45" name="Rectangle 44"/>
+          <p:cNvPr id="47" name="Rectangle 46"/>
           <p:cNvSpPr/>
           <p:nvPr/>
         </p:nvSpPr>
         <p:spPr>
           <a:xfrm>
-            <a:off x="365750" y="4149090"/>
+            <a:off x="487667" y="4834890"/>
             <a:ext cx="3169840" cy="411480"/>
           </a:xfrm>
           <a:prstGeom prst="rect">
@@ -5135,13 +5205,13 @@
       </p:sp>
       <p:sp>
         <p:nvSpPr>
-          <p:cNvPr id="46" name="TextBox 45"/>
-          <p:cNvSpPr txBox="1"/>
-          <p:nvPr/>
-        </p:nvSpPr>
-        <p:spPr>
-          <a:xfrm>
-            <a:off x="365750" y="4176522"/>
+          <p:cNvPr id="48" name="TextBox 47"/>
+          <p:cNvSpPr txBox="1"/>
+          <p:nvPr/>
+        </p:nvSpPr>
+        <p:spPr>
+          <a:xfrm>
+            <a:off x="487667" y="4862322"/>
             <a:ext cx="3169840" cy="356616"/>
           </a:xfrm>
           <a:prstGeom prst="rect">
@@ -5157,7 +5227,7 @@
           <a:p>
             <a:pPr algn="l"/>
             <a:r>
-              <a:rPr sz="750" b="0">
+              <a:rPr sz="800" b="0">
                 <a:solidFill>
                   <a:srgbClr val="1A1A1A"/>
                 </a:solidFill>
@@ -5170,13 +5240,13 @@
       </p:sp>
       <p:sp>
         <p:nvSpPr>
-          <p:cNvPr id="47" name="Rectangle 46"/>
+          <p:cNvPr id="49" name="Rectangle 48"/>
           <p:cNvSpPr/>
           <p:nvPr/>
         </p:nvSpPr>
         <p:spPr>
           <a:xfrm>
-            <a:off x="3535591" y="4149090"/>
+            <a:off x="3657508" y="4834890"/>
             <a:ext cx="4145176" cy="411480"/>
           </a:xfrm>
           <a:prstGeom prst="rect">
@@ -5216,13 +5286,13 @@
       </p:sp>
       <p:sp>
         <p:nvSpPr>
-          <p:cNvPr id="48" name="TextBox 47"/>
-          <p:cNvSpPr txBox="1"/>
-          <p:nvPr/>
-        </p:nvSpPr>
-        <p:spPr>
-          <a:xfrm>
-            <a:off x="3535591" y="4176522"/>
+          <p:cNvPr id="50" name="TextBox 49"/>
+          <p:cNvSpPr txBox="1"/>
+          <p:nvPr/>
+        </p:nvSpPr>
+        <p:spPr>
+          <a:xfrm>
+            <a:off x="3657508" y="4862322"/>
             <a:ext cx="4145176" cy="356616"/>
           </a:xfrm>
           <a:prstGeom prst="rect">
@@ -5238,7 +5308,7 @@
           <a:p>
             <a:pPr algn="l"/>
             <a:r>
-              <a:rPr sz="750" b="0">
+              <a:rPr sz="800" b="0">
                 <a:solidFill>
                   <a:srgbClr val="1A1A1A"/>
                 </a:solidFill>
@@ -5251,13 +5321,13 @@
       </p:sp>
       <p:sp>
         <p:nvSpPr>
-          <p:cNvPr id="49" name="Rectangle 48"/>
+          <p:cNvPr id="51" name="Rectangle 50"/>
           <p:cNvSpPr/>
           <p:nvPr/>
         </p:nvSpPr>
         <p:spPr>
           <a:xfrm>
-            <a:off x="7680767" y="4149090"/>
+            <a:off x="7802684" y="4834890"/>
             <a:ext cx="4145176" cy="411480"/>
           </a:xfrm>
           <a:prstGeom prst="rect">
@@ -5297,13 +5367,13 @@
       </p:sp>
       <p:sp>
         <p:nvSpPr>
-          <p:cNvPr id="50" name="TextBox 49"/>
-          <p:cNvSpPr txBox="1"/>
-          <p:nvPr/>
-        </p:nvSpPr>
-        <p:spPr>
-          <a:xfrm>
-            <a:off x="7680767" y="4176522"/>
+          <p:cNvPr id="52" name="TextBox 51"/>
+          <p:cNvSpPr txBox="1"/>
+          <p:nvPr/>
+        </p:nvSpPr>
+        <p:spPr>
+          <a:xfrm>
+            <a:off x="7802684" y="4862322"/>
             <a:ext cx="4145176" cy="356616"/>
           </a:xfrm>
           <a:prstGeom prst="rect">
@@ -5319,7 +5389,7 @@
           <a:p>
             <a:pPr algn="l"/>
             <a:r>
-              <a:rPr sz="750" b="0">
+              <a:rPr sz="800" b="0">
                 <a:solidFill>
                   <a:srgbClr val="1A1A1A"/>
                 </a:solidFill>
@@ -5332,13 +5402,13 @@
       </p:sp>
       <p:sp>
         <p:nvSpPr>
-          <p:cNvPr id="51" name="Rectangle 50"/>
+          <p:cNvPr id="53" name="Rectangle 52"/>
           <p:cNvSpPr/>
           <p:nvPr/>
         </p:nvSpPr>
         <p:spPr>
           <a:xfrm>
-            <a:off x="365750" y="4560570"/>
+            <a:off x="487667" y="5246370"/>
             <a:ext cx="3169840" cy="411480"/>
           </a:xfrm>
           <a:prstGeom prst="rect">
@@ -5378,13 +5448,13 @@
       </p:sp>
       <p:sp>
         <p:nvSpPr>
-          <p:cNvPr id="52" name="TextBox 51"/>
-          <p:cNvSpPr txBox="1"/>
-          <p:nvPr/>
-        </p:nvSpPr>
-        <p:spPr>
-          <a:xfrm>
-            <a:off x="365750" y="4588002"/>
+          <p:cNvPr id="54" name="TextBox 53"/>
+          <p:cNvSpPr txBox="1"/>
+          <p:nvPr/>
+        </p:nvSpPr>
+        <p:spPr>
+          <a:xfrm>
+            <a:off x="487667" y="5273802"/>
             <a:ext cx="3169840" cy="356616"/>
           </a:xfrm>
           <a:prstGeom prst="rect">
@@ -5400,7 +5470,7 @@
           <a:p>
             <a:pPr algn="l"/>
             <a:r>
-              <a:rPr sz="750" b="0">
+              <a:rPr sz="800" b="0">
                 <a:solidFill>
                   <a:srgbClr val="1A1A1A"/>
                 </a:solidFill>
@@ -5413,13 +5483,13 @@
       </p:sp>
       <p:sp>
         <p:nvSpPr>
-          <p:cNvPr id="53" name="Rectangle 52"/>
+          <p:cNvPr id="55" name="Rectangle 54"/>
           <p:cNvSpPr/>
           <p:nvPr/>
         </p:nvSpPr>
         <p:spPr>
           <a:xfrm>
-            <a:off x="3535591" y="4560570"/>
+            <a:off x="3657508" y="5246370"/>
             <a:ext cx="4145176" cy="411480"/>
           </a:xfrm>
           <a:prstGeom prst="rect">
@@ -5459,13 +5529,13 @@
       </p:sp>
       <p:sp>
         <p:nvSpPr>
-          <p:cNvPr id="54" name="TextBox 53"/>
-          <p:cNvSpPr txBox="1"/>
-          <p:nvPr/>
-        </p:nvSpPr>
-        <p:spPr>
-          <a:xfrm>
-            <a:off x="3535591" y="4588002"/>
+          <p:cNvPr id="56" name="TextBox 55"/>
+          <p:cNvSpPr txBox="1"/>
+          <p:nvPr/>
+        </p:nvSpPr>
+        <p:spPr>
+          <a:xfrm>
+            <a:off x="3657508" y="5273802"/>
             <a:ext cx="4145176" cy="356616"/>
           </a:xfrm>
           <a:prstGeom prst="rect">
@@ -5481,7 +5551,7 @@
           <a:p>
             <a:pPr algn="l"/>
             <a:r>
-              <a:rPr sz="750" b="0">
+              <a:rPr sz="800" b="0">
                 <a:solidFill>
                   <a:srgbClr val="1A1A1A"/>
                 </a:solidFill>
@@ -5494,13 +5564,13 @@
       </p:sp>
       <p:sp>
         <p:nvSpPr>
-          <p:cNvPr id="55" name="Rectangle 54"/>
+          <p:cNvPr id="57" name="Rectangle 56"/>
           <p:cNvSpPr/>
           <p:nvPr/>
         </p:nvSpPr>
         <p:spPr>
           <a:xfrm>
-            <a:off x="7680767" y="4560570"/>
+            <a:off x="7802684" y="5246370"/>
             <a:ext cx="4145176" cy="411480"/>
           </a:xfrm>
           <a:prstGeom prst="rect">
@@ -5540,13 +5610,13 @@
       </p:sp>
       <p:sp>
         <p:nvSpPr>
-          <p:cNvPr id="56" name="TextBox 55"/>
-          <p:cNvSpPr txBox="1"/>
-          <p:nvPr/>
-        </p:nvSpPr>
-        <p:spPr>
-          <a:xfrm>
-            <a:off x="7680767" y="4588002"/>
+          <p:cNvPr id="58" name="TextBox 57"/>
+          <p:cNvSpPr txBox="1"/>
+          <p:nvPr/>
+        </p:nvSpPr>
+        <p:spPr>
+          <a:xfrm>
+            <a:off x="7802684" y="5273802"/>
             <a:ext cx="4145176" cy="356616"/>
           </a:xfrm>
           <a:prstGeom prst="rect">
@@ -5562,7 +5632,7 @@
           <a:p>
             <a:pPr algn="l"/>
             <a:r>
-              <a:rPr sz="750" b="0">
+              <a:rPr sz="800" b="0">
                 <a:solidFill>
                   <a:srgbClr val="1A1A1A"/>
                 </a:solidFill>
@@ -5575,13 +5645,13 @@
       </p:sp>
       <p:sp>
         <p:nvSpPr>
-          <p:cNvPr id="57" name="Rectangle 56"/>
+          <p:cNvPr id="59" name="Rectangle 58"/>
           <p:cNvSpPr/>
           <p:nvPr/>
         </p:nvSpPr>
         <p:spPr>
           <a:xfrm>
-            <a:off x="365750" y="4972050"/>
+            <a:off x="487667" y="5657850"/>
             <a:ext cx="3169840" cy="411480"/>
           </a:xfrm>
           <a:prstGeom prst="rect">
@@ -5621,13 +5691,13 @@
       </p:sp>
       <p:sp>
         <p:nvSpPr>
-          <p:cNvPr id="58" name="TextBox 57"/>
-          <p:cNvSpPr txBox="1"/>
-          <p:nvPr/>
-        </p:nvSpPr>
-        <p:spPr>
-          <a:xfrm>
-            <a:off x="365750" y="4999482"/>
+          <p:cNvPr id="60" name="TextBox 59"/>
+          <p:cNvSpPr txBox="1"/>
+          <p:nvPr/>
+        </p:nvSpPr>
+        <p:spPr>
+          <a:xfrm>
+            <a:off x="487667" y="5685282"/>
             <a:ext cx="3169840" cy="356616"/>
           </a:xfrm>
           <a:prstGeom prst="rect">
@@ -5643,7 +5713,7 @@
           <a:p>
             <a:pPr algn="l"/>
             <a:r>
-              <a:rPr sz="750" b="0">
+              <a:rPr sz="800" b="0">
                 <a:solidFill>
                   <a:srgbClr val="1A1A1A"/>
                 </a:solidFill>
@@ -5656,13 +5726,13 @@
       </p:sp>
       <p:sp>
         <p:nvSpPr>
-          <p:cNvPr id="59" name="Rectangle 58"/>
+          <p:cNvPr id="61" name="Rectangle 60"/>
           <p:cNvSpPr/>
           <p:nvPr/>
         </p:nvSpPr>
         <p:spPr>
           <a:xfrm>
-            <a:off x="3535591" y="4972050"/>
+            <a:off x="3657508" y="5657850"/>
             <a:ext cx="4145176" cy="411480"/>
           </a:xfrm>
           <a:prstGeom prst="rect">
@@ -5702,13 +5772,13 @@
       </p:sp>
       <p:sp>
         <p:nvSpPr>
-          <p:cNvPr id="60" name="TextBox 59"/>
-          <p:cNvSpPr txBox="1"/>
-          <p:nvPr/>
-        </p:nvSpPr>
-        <p:spPr>
-          <a:xfrm>
-            <a:off x="3535591" y="4999482"/>
+          <p:cNvPr id="62" name="TextBox 61"/>
+          <p:cNvSpPr txBox="1"/>
+          <p:nvPr/>
+        </p:nvSpPr>
+        <p:spPr>
+          <a:xfrm>
+            <a:off x="3657508" y="5685282"/>
             <a:ext cx="4145176" cy="356616"/>
           </a:xfrm>
           <a:prstGeom prst="rect">
@@ -5724,7 +5794,7 @@
           <a:p>
             <a:pPr algn="l"/>
             <a:r>
-              <a:rPr sz="750" b="0">
+              <a:rPr sz="800" b="0">
                 <a:solidFill>
                   <a:srgbClr val="1A1A1A"/>
                 </a:solidFill>
@@ -5737,13 +5807,13 @@
       </p:sp>
       <p:sp>
         <p:nvSpPr>
-          <p:cNvPr id="61" name="Rectangle 60"/>
+          <p:cNvPr id="63" name="Rectangle 62"/>
           <p:cNvSpPr/>
           <p:nvPr/>
         </p:nvSpPr>
         <p:spPr>
           <a:xfrm>
-            <a:off x="7680767" y="4972050"/>
+            <a:off x="7802684" y="5657850"/>
             <a:ext cx="4145176" cy="411480"/>
           </a:xfrm>
           <a:prstGeom prst="rect">
@@ -5783,13 +5853,13 @@
       </p:sp>
       <p:sp>
         <p:nvSpPr>
-          <p:cNvPr id="62" name="TextBox 61"/>
-          <p:cNvSpPr txBox="1"/>
-          <p:nvPr/>
-        </p:nvSpPr>
-        <p:spPr>
-          <a:xfrm>
-            <a:off x="7680767" y="4999482"/>
+          <p:cNvPr id="64" name="TextBox 63"/>
+          <p:cNvSpPr txBox="1"/>
+          <p:nvPr/>
+        </p:nvSpPr>
+        <p:spPr>
+          <a:xfrm>
+            <a:off x="7802684" y="5685282"/>
             <a:ext cx="4145176" cy="356616"/>
           </a:xfrm>
           <a:prstGeom prst="rect">
@@ -5805,7 +5875,7 @@
           <a:p>
             <a:pPr algn="l"/>
             <a:r>
-              <a:rPr sz="750" b="0">
+              <a:rPr sz="800" b="0">
                 <a:solidFill>
                   <a:srgbClr val="1A1A1A"/>
                 </a:solidFill>
@@ -5818,528 +5888,42 @@
       </p:sp>
       <p:sp>
         <p:nvSpPr>
-          <p:cNvPr id="63" name="Rectangle 62"/>
-          <p:cNvSpPr/>
-          <p:nvPr/>
-        </p:nvSpPr>
-        <p:spPr>
-          <a:xfrm>
-            <a:off x="365750" y="5383530"/>
-            <a:ext cx="3169840" cy="411480"/>
-          </a:xfrm>
-          <a:prstGeom prst="rect">
-            <a:avLst/>
-          </a:prstGeom>
-          <a:solidFill>
-            <a:srgbClr val="FFFFFF"/>
-          </a:solidFill>
-          <a:ln w="9525">
-            <a:solidFill>
-              <a:srgbClr val="D8D8D8"/>
-            </a:solidFill>
-          </a:ln>
-          <a:effectLst/>
-        </p:spPr>
-        <p:style>
-          <a:lnRef idx="1">
-            <a:schemeClr val="accent1"/>
-          </a:lnRef>
-          <a:fillRef idx="3">
-            <a:schemeClr val="accent1"/>
-          </a:fillRef>
-          <a:effectRef idx="2">
-            <a:schemeClr val="accent1"/>
-          </a:effectRef>
-          <a:fontRef idx="minor">
-            <a:schemeClr val="lt1"/>
-          </a:fontRef>
-        </p:style>
-        <p:txBody>
-          <a:bodyPr rtlCol="0" anchor="ctr"/>
-          <a:lstStyle/>
-          <a:p>
-            <a:pPr algn="ctr"/>
-          </a:p>
-        </p:txBody>
-      </p:sp>
-      <p:sp>
-        <p:nvSpPr>
-          <p:cNvPr id="64" name="TextBox 63"/>
-          <p:cNvSpPr txBox="1"/>
-          <p:nvPr/>
-        </p:nvSpPr>
-        <p:spPr>
-          <a:xfrm>
-            <a:off x="365750" y="5410962"/>
-            <a:ext cx="3169840" cy="356616"/>
-          </a:xfrm>
-          <a:prstGeom prst="rect">
-            <a:avLst/>
-          </a:prstGeom>
-          <a:noFill/>
-        </p:spPr>
-        <p:txBody>
-          <a:bodyPr wrap="square" lIns="36000" rIns="36000" tIns="18000" bIns="18000">
-            <a:spAutoFit/>
-          </a:bodyPr>
-          <a:lstStyle/>
-          <a:p>
-            <a:pPr algn="l"/>
-            <a:r>
-              <a:rPr sz="750" b="0">
-                <a:solidFill>
-                  <a:srgbClr val="1A1A1A"/>
-                </a:solidFill>
-                <a:latin typeface="Pretendard"/>
-              </a:rPr>
-              <a:t>R3</a:t>
-            </a:r>
-          </a:p>
-        </p:txBody>
-      </p:sp>
-      <p:sp>
-        <p:nvSpPr>
-          <p:cNvPr id="65" name="Rectangle 64"/>
-          <p:cNvSpPr/>
-          <p:nvPr/>
-        </p:nvSpPr>
-        <p:spPr>
-          <a:xfrm>
-            <a:off x="3535591" y="5383530"/>
-            <a:ext cx="4145176" cy="411480"/>
-          </a:xfrm>
-          <a:prstGeom prst="rect">
-            <a:avLst/>
-          </a:prstGeom>
-          <a:solidFill>
-            <a:srgbClr val="FFFFFF"/>
-          </a:solidFill>
-          <a:ln w="9525">
-            <a:solidFill>
-              <a:srgbClr val="D8D8D8"/>
-            </a:solidFill>
-          </a:ln>
-          <a:effectLst/>
-        </p:spPr>
-        <p:style>
-          <a:lnRef idx="1">
-            <a:schemeClr val="accent1"/>
-          </a:lnRef>
-          <a:fillRef idx="3">
-            <a:schemeClr val="accent1"/>
-          </a:fillRef>
-          <a:effectRef idx="2">
-            <a:schemeClr val="accent1"/>
-          </a:effectRef>
-          <a:fontRef idx="minor">
-            <a:schemeClr val="lt1"/>
-          </a:fontRef>
-        </p:style>
-        <p:txBody>
-          <a:bodyPr rtlCol="0" anchor="ctr"/>
-          <a:lstStyle/>
-          <a:p>
-            <a:pPr algn="ctr"/>
+          <p:cNvPr id="65" name="TextBox 64"/>
+          <p:cNvSpPr txBox="1"/>
+          <p:nvPr/>
+        </p:nvSpPr>
+        <p:spPr>
+          <a:xfrm>
+            <a:off x="487667" y="6137910"/>
+            <a:ext cx="11216359" cy="274320"/>
+          </a:xfrm>
+          <a:prstGeom prst="rect">
+            <a:avLst/>
+          </a:prstGeom>
+          <a:noFill/>
+        </p:spPr>
+        <p:txBody>
+          <a:bodyPr wrap="square" lIns="36000" rIns="36000" tIns="18000" bIns="18000">
+            <a:spAutoFit/>
+          </a:bodyPr>
+          <a:lstStyle/>
+          <a:p>
+            <a:pPr algn="l"/>
+            <a:r>
+              <a:rPr sz="800" b="0">
+                <a:solidFill>
+                  <a:srgbClr val="767676"/>
+                </a:solidFill>
+                <a:latin typeface="Pretendard"/>
+              </a:rPr>
+              <a:t>※ 이하 5행은 원장·문서 참조</a:t>
+            </a:r>
           </a:p>
         </p:txBody>
       </p:sp>
       <p:sp>
         <p:nvSpPr>
           <p:cNvPr id="66" name="TextBox 65"/>
-          <p:cNvSpPr txBox="1"/>
-          <p:nvPr/>
-        </p:nvSpPr>
-        <p:spPr>
-          <a:xfrm>
-            <a:off x="3535591" y="5410962"/>
-            <a:ext cx="4145176" cy="356616"/>
-          </a:xfrm>
-          <a:prstGeom prst="rect">
-            <a:avLst/>
-          </a:prstGeom>
-          <a:noFill/>
-        </p:spPr>
-        <p:txBody>
-          <a:bodyPr wrap="square" lIns="36000" rIns="36000" tIns="18000" bIns="18000">
-            <a:spAutoFit/>
-          </a:bodyPr>
-          <a:lstStyle/>
-          <a:p>
-            <a:pPr algn="l"/>
-            <a:r>
-              <a:rPr sz="750" b="0">
-                <a:solidFill>
-                  <a:srgbClr val="1A1A1A"/>
-                </a:solidFill>
-                <a:latin typeface="Pretendard"/>
-              </a:rPr>
-              <a:t>컨셉키워드 K4 예외 화면군 신규</a:t>
-            </a:r>
-          </a:p>
-        </p:txBody>
-      </p:sp>
-      <p:sp>
-        <p:nvSpPr>
-          <p:cNvPr id="67" name="Rectangle 66"/>
-          <p:cNvSpPr/>
-          <p:nvPr/>
-        </p:nvSpPr>
-        <p:spPr>
-          <a:xfrm>
-            <a:off x="7680767" y="5383530"/>
-            <a:ext cx="4145176" cy="411480"/>
-          </a:xfrm>
-          <a:prstGeom prst="rect">
-            <a:avLst/>
-          </a:prstGeom>
-          <a:solidFill>
-            <a:srgbClr val="FFFFFF"/>
-          </a:solidFill>
-          <a:ln w="9525">
-            <a:solidFill>
-              <a:srgbClr val="D8D8D8"/>
-            </a:solidFill>
-          </a:ln>
-          <a:effectLst/>
-        </p:spPr>
-        <p:style>
-          <a:lnRef idx="1">
-            <a:schemeClr val="accent1"/>
-          </a:lnRef>
-          <a:fillRef idx="3">
-            <a:schemeClr val="accent1"/>
-          </a:fillRef>
-          <a:effectRef idx="2">
-            <a:schemeClr val="accent1"/>
-          </a:effectRef>
-          <a:fontRef idx="minor">
-            <a:schemeClr val="lt1"/>
-          </a:fontRef>
-        </p:style>
-        <p:txBody>
-          <a:bodyPr rtlCol="0" anchor="ctr"/>
-          <a:lstStyle/>
-          <a:p>
-            <a:pPr algn="ctr"/>
-          </a:p>
-        </p:txBody>
-      </p:sp>
-      <p:sp>
-        <p:nvSpPr>
-          <p:cNvPr id="68" name="TextBox 67"/>
-          <p:cNvSpPr txBox="1"/>
-          <p:nvPr/>
-        </p:nvSpPr>
-        <p:spPr>
-          <a:xfrm>
-            <a:off x="7680767" y="5410962"/>
-            <a:ext cx="4145176" cy="356616"/>
-          </a:xfrm>
-          <a:prstGeom prst="rect">
-            <a:avLst/>
-          </a:prstGeom>
-          <a:noFill/>
-        </p:spPr>
-        <p:txBody>
-          <a:bodyPr wrap="square" lIns="36000" rIns="36000" tIns="18000" bIns="18000">
-            <a:spAutoFit/>
-          </a:bodyPr>
-          <a:lstStyle/>
-          <a:p>
-            <a:pPr algn="l"/>
-            <a:r>
-              <a:rPr sz="750" b="0">
-                <a:solidFill>
-                  <a:srgbClr val="1A1A1A"/>
-                </a:solidFill>
-                <a:latin typeface="Pretendard"/>
-              </a:rPr>
-              <a:t>[규모미상]</a:t>
-            </a:r>
-          </a:p>
-        </p:txBody>
-      </p:sp>
-      <p:sp>
-        <p:nvSpPr>
-          <p:cNvPr id="69" name="Rectangle 68"/>
-          <p:cNvSpPr/>
-          <p:nvPr/>
-        </p:nvSpPr>
-        <p:spPr>
-          <a:xfrm>
-            <a:off x="365750" y="5795010"/>
-            <a:ext cx="3169840" cy="411480"/>
-          </a:xfrm>
-          <a:prstGeom prst="rect">
-            <a:avLst/>
-          </a:prstGeom>
-          <a:solidFill>
-            <a:srgbClr val="FFFFFF"/>
-          </a:solidFill>
-          <a:ln w="9525">
-            <a:solidFill>
-              <a:srgbClr val="D8D8D8"/>
-            </a:solidFill>
-          </a:ln>
-          <a:effectLst/>
-        </p:spPr>
-        <p:style>
-          <a:lnRef idx="1">
-            <a:schemeClr val="accent1"/>
-          </a:lnRef>
-          <a:fillRef idx="3">
-            <a:schemeClr val="accent1"/>
-          </a:fillRef>
-          <a:effectRef idx="2">
-            <a:schemeClr val="accent1"/>
-          </a:effectRef>
-          <a:fontRef idx="minor">
-            <a:schemeClr val="lt1"/>
-          </a:fontRef>
-        </p:style>
-        <p:txBody>
-          <a:bodyPr rtlCol="0" anchor="ctr"/>
-          <a:lstStyle/>
-          <a:p>
-            <a:pPr algn="ctr"/>
-          </a:p>
-        </p:txBody>
-      </p:sp>
-      <p:sp>
-        <p:nvSpPr>
-          <p:cNvPr id="70" name="TextBox 69"/>
-          <p:cNvSpPr txBox="1"/>
-          <p:nvPr/>
-        </p:nvSpPr>
-        <p:spPr>
-          <a:xfrm>
-            <a:off x="365750" y="5822442"/>
-            <a:ext cx="3169840" cy="356616"/>
-          </a:xfrm>
-          <a:prstGeom prst="rect">
-            <a:avLst/>
-          </a:prstGeom>
-          <a:noFill/>
-        </p:spPr>
-        <p:txBody>
-          <a:bodyPr wrap="square" lIns="36000" rIns="36000" tIns="18000" bIns="18000">
-            <a:spAutoFit/>
-          </a:bodyPr>
-          <a:lstStyle/>
-          <a:p>
-            <a:pPr algn="l"/>
-            <a:r>
-              <a:rPr sz="750" b="0">
-                <a:solidFill>
-                  <a:srgbClr val="1A1A1A"/>
-                </a:solidFill>
-                <a:latin typeface="Pretendard"/>
-              </a:rPr>
-              <a:t/>
-            </a:r>
-          </a:p>
-        </p:txBody>
-      </p:sp>
-      <p:sp>
-        <p:nvSpPr>
-          <p:cNvPr id="71" name="Rectangle 70"/>
-          <p:cNvSpPr/>
-          <p:nvPr/>
-        </p:nvSpPr>
-        <p:spPr>
-          <a:xfrm>
-            <a:off x="3535591" y="5795010"/>
-            <a:ext cx="4145176" cy="411480"/>
-          </a:xfrm>
-          <a:prstGeom prst="rect">
-            <a:avLst/>
-          </a:prstGeom>
-          <a:solidFill>
-            <a:srgbClr val="FFFFFF"/>
-          </a:solidFill>
-          <a:ln w="9525">
-            <a:solidFill>
-              <a:srgbClr val="D8D8D8"/>
-            </a:solidFill>
-          </a:ln>
-          <a:effectLst/>
-        </p:spPr>
-        <p:style>
-          <a:lnRef idx="1">
-            <a:schemeClr val="accent1"/>
-          </a:lnRef>
-          <a:fillRef idx="3">
-            <a:schemeClr val="accent1"/>
-          </a:fillRef>
-          <a:effectRef idx="2">
-            <a:schemeClr val="accent1"/>
-          </a:effectRef>
-          <a:fontRef idx="minor">
-            <a:schemeClr val="lt1"/>
-          </a:fontRef>
-        </p:style>
-        <p:txBody>
-          <a:bodyPr rtlCol="0" anchor="ctr"/>
-          <a:lstStyle/>
-          <a:p>
-            <a:pPr algn="ctr"/>
-          </a:p>
-        </p:txBody>
-      </p:sp>
-      <p:sp>
-        <p:nvSpPr>
-          <p:cNvPr id="72" name="TextBox 71"/>
-          <p:cNvSpPr txBox="1"/>
-          <p:nvPr/>
-        </p:nvSpPr>
-        <p:spPr>
-          <a:xfrm>
-            <a:off x="3535591" y="5822442"/>
-            <a:ext cx="4145176" cy="356616"/>
-          </a:xfrm>
-          <a:prstGeom prst="rect">
-            <a:avLst/>
-          </a:prstGeom>
-          <a:noFill/>
-        </p:spPr>
-        <p:txBody>
-          <a:bodyPr wrap="square" lIns="36000" rIns="36000" tIns="18000" bIns="18000">
-            <a:spAutoFit/>
-          </a:bodyPr>
-          <a:lstStyle/>
-          <a:p>
-            <a:pPr algn="l"/>
-            <a:r>
-              <a:rPr sz="750" b="0">
-                <a:solidFill>
-                  <a:srgbClr val="1A1A1A"/>
-                </a:solidFill>
-                <a:latin typeface="Pretendard"/>
-              </a:rPr>
-              <a:t>AS-IS 현행</a:t>
-            </a:r>
-          </a:p>
-        </p:txBody>
-      </p:sp>
-      <p:sp>
-        <p:nvSpPr>
-          <p:cNvPr id="73" name="Rectangle 72"/>
-          <p:cNvSpPr/>
-          <p:nvPr/>
-        </p:nvSpPr>
-        <p:spPr>
-          <a:xfrm>
-            <a:off x="7680767" y="5795010"/>
-            <a:ext cx="4145176" cy="411480"/>
-          </a:xfrm>
-          <a:prstGeom prst="rect">
-            <a:avLst/>
-          </a:prstGeom>
-          <a:solidFill>
-            <a:srgbClr val="FFFFFF"/>
-          </a:solidFill>
-          <a:ln w="9525">
-            <a:solidFill>
-              <a:srgbClr val="D8D8D8"/>
-            </a:solidFill>
-          </a:ln>
-          <a:effectLst/>
-        </p:spPr>
-        <p:style>
-          <a:lnRef idx="1">
-            <a:schemeClr val="accent1"/>
-          </a:lnRef>
-          <a:fillRef idx="3">
-            <a:schemeClr val="accent1"/>
-          </a:fillRef>
-          <a:effectRef idx="2">
-            <a:schemeClr val="accent1"/>
-          </a:effectRef>
-          <a:fontRef idx="minor">
-            <a:schemeClr val="lt1"/>
-          </a:fontRef>
-        </p:style>
-        <p:txBody>
-          <a:bodyPr rtlCol="0" anchor="ctr"/>
-          <a:lstStyle/>
-          <a:p>
-            <a:pPr algn="ctr"/>
-          </a:p>
-        </p:txBody>
-      </p:sp>
-      <p:sp>
-        <p:nvSpPr>
-          <p:cNvPr id="74" name="TextBox 73"/>
-          <p:cNvSpPr txBox="1"/>
-          <p:nvPr/>
-        </p:nvSpPr>
-        <p:spPr>
-          <a:xfrm>
-            <a:off x="7680767" y="5822442"/>
-            <a:ext cx="4145176" cy="356616"/>
-          </a:xfrm>
-          <a:prstGeom prst="rect">
-            <a:avLst/>
-          </a:prstGeom>
-          <a:noFill/>
-        </p:spPr>
-        <p:txBody>
-          <a:bodyPr wrap="square" lIns="36000" rIns="36000" tIns="18000" bIns="18000">
-            <a:spAutoFit/>
-          </a:bodyPr>
-          <a:lstStyle/>
-          <a:p>
-            <a:pPr algn="l"/>
-            <a:r>
-              <a:rPr sz="750" b="0">
-                <a:solidFill>
-                  <a:srgbClr val="1A1A1A"/>
-                </a:solidFill>
-                <a:latin typeface="Pretendard"/>
-              </a:rPr>
-              <a:t>In-Scope 확정</a:t>
-            </a:r>
-          </a:p>
-        </p:txBody>
-      </p:sp>
-      <p:sp>
-        <p:nvSpPr>
-          <p:cNvPr id="75" name="TextBox 74"/>
-          <p:cNvSpPr txBox="1"/>
-          <p:nvPr/>
-        </p:nvSpPr>
-        <p:spPr>
-          <a:xfrm>
-            <a:off x="365750" y="6275070"/>
-            <a:ext cx="10972525" cy="274320"/>
-          </a:xfrm>
-          <a:prstGeom prst="rect">
-            <a:avLst/>
-          </a:prstGeom>
-          <a:noFill/>
-        </p:spPr>
-        <p:txBody>
-          <a:bodyPr wrap="square" lIns="36000" rIns="36000" tIns="18000" bIns="18000">
-            <a:spAutoFit/>
-          </a:bodyPr>
-          <a:lstStyle/>
-          <a:p>
-            <a:pPr algn="l"/>
-            <a:r>
-              <a:rPr sz="800" b="0">
-                <a:solidFill>
-                  <a:srgbClr val="767676"/>
-                </a:solidFill>
-                <a:latin typeface="Pretendard"/>
-              </a:rPr>
-              <a:t>※ 이하 3행은 원장·문서 참조</a:t>
-            </a:r>
-          </a:p>
-        </p:txBody>
-      </p:sp>
-      <p:sp>
-        <p:nvSpPr>
-          <p:cNvPr id="76" name="TextBox 75"/>
           <p:cNvSpPr txBox="1"/>
           <p:nvPr/>
         </p:nvSpPr>
@@ -6374,7 +5958,7 @@
       </p:sp>
       <p:sp>
         <p:nvSpPr>
-          <p:cNvPr id="77" name="TextBox 76"/>
+          <p:cNvPr id="67" name="TextBox 66"/>
           <p:cNvSpPr txBox="1"/>
           <p:nvPr/>
         </p:nvSpPr>
@@ -6433,58 +6017,93 @@
         </p:nvSpPr>
         <p:spPr>
           <a:xfrm>
-            <a:off x="365750" y="274320"/>
-            <a:ext cx="10972525" cy="480060"/>
-          </a:xfrm>
-          <a:prstGeom prst="rect">
-            <a:avLst/>
-          </a:prstGeom>
-          <a:noFill/>
-        </p:spPr>
-        <p:txBody>
-          <a:bodyPr wrap="square" lIns="36000" rIns="36000" tIns="18000" bIns="18000">
-            <a:spAutoFit/>
-          </a:bodyPr>
-          <a:lstStyle/>
-          <a:p>
-            <a:pPr algn="l"/>
-            <a:r>
-              <a:rPr sz="1700" b="1">
+            <a:off x="487667" y="137160"/>
+            <a:ext cx="7315017" cy="274320"/>
+          </a:xfrm>
+          <a:prstGeom prst="rect">
+            <a:avLst/>
+          </a:prstGeom>
+          <a:noFill/>
+        </p:spPr>
+        <p:txBody>
+          <a:bodyPr wrap="square" lIns="36000" rIns="36000" tIns="18000" bIns="18000">
+            <a:spAutoFit/>
+          </a:bodyPr>
+          <a:lstStyle/>
+          <a:p>
+            <a:pPr algn="l"/>
+            <a:r>
+              <a:rPr sz="900" b="0">
+                <a:solidFill>
+                  <a:srgbClr val="767676"/>
+                </a:solidFill>
+                <a:latin typeface="Pretendard"/>
+              </a:rPr>
+              <a:t>UX전략보고서</a:t>
+            </a:r>
+          </a:p>
+        </p:txBody>
+      </p:sp>
+      <p:sp>
+        <p:nvSpPr>
+          <p:cNvPr id="3" name="TextBox 2"/>
+          <p:cNvSpPr txBox="1"/>
+          <p:nvPr/>
+        </p:nvSpPr>
+        <p:spPr>
+          <a:xfrm>
+            <a:off x="487667" y="548640"/>
+            <a:ext cx="11216359" cy="548640"/>
+          </a:xfrm>
+          <a:prstGeom prst="rect">
+            <a:avLst/>
+          </a:prstGeom>
+          <a:noFill/>
+        </p:spPr>
+        <p:txBody>
+          <a:bodyPr wrap="square" lIns="36000" rIns="36000" tIns="18000" bIns="18000">
+            <a:spAutoFit/>
+          </a:bodyPr>
+          <a:lstStyle/>
+          <a:p>
+            <a:pPr algn="l"/>
+            <a:r>
+              <a:rPr sz="2400" b="1">
                 <a:solidFill>
                   <a:srgbClr val="1A1A1A"/>
                 </a:solidFill>
                 <a:latin typeface="Pretendard"/>
               </a:rPr>
-              <a:t>9. 다음 단계 (높은 수준)</a:t>
-            </a:r>
-          </a:p>
-        </p:txBody>
-      </p:sp>
-      <p:sp>
-        <p:nvSpPr>
-          <p:cNvPr id="3" name="TextBox 2"/>
-          <p:cNvSpPr txBox="1"/>
-          <p:nvPr/>
-        </p:nvSpPr>
-        <p:spPr>
-          <a:xfrm>
-            <a:off x="365750" y="891540"/>
-            <a:ext cx="10972525" cy="5349240"/>
-          </a:xfrm>
-          <a:prstGeom prst="rect">
-            <a:avLst/>
-          </a:prstGeom>
-          <a:noFill/>
-        </p:spPr>
-        <p:txBody>
-          <a:bodyPr wrap="square" lIns="36000" rIns="36000" tIns="18000" bIns="18000">
-            <a:spAutoFit/>
-          </a:bodyPr>
-          <a:lstStyle/>
-          <a:p>
-            <a:pPr algn="l"/>
-            <a:r>
-              <a:rPr sz="1100" b="0">
+              <a:t>다음 단계 (높은 수준)</a:t>
+            </a:r>
+          </a:p>
+        </p:txBody>
+      </p:sp>
+      <p:sp>
+        <p:nvSpPr>
+          <p:cNvPr id="4" name="TextBox 3"/>
+          <p:cNvSpPr txBox="1"/>
+          <p:nvPr/>
+        </p:nvSpPr>
+        <p:spPr>
+          <a:xfrm>
+            <a:off x="487667" y="1234440"/>
+            <a:ext cx="11216359" cy="5074920"/>
+          </a:xfrm>
+          <a:prstGeom prst="rect">
+            <a:avLst/>
+          </a:prstGeom>
+          <a:noFill/>
+        </p:spPr>
+        <p:txBody>
+          <a:bodyPr wrap="square" lIns="36000" rIns="36000" tIns="18000" bIns="18000">
+            <a:spAutoFit/>
+          </a:bodyPr>
+          <a:lstStyle/>
+          <a:p>
+            <a:pPr algn="l"/>
+            <a:r>
+              <a:rPr sz="1150" b="0">
                 <a:solidFill>
                   <a:srgbClr val="1A1A1A"/>
                 </a:solidFill>
@@ -6496,7 +6115,7 @@
           <a:p>
             <a:pPr algn="l"/>
             <a:r>
-              <a:rPr sz="1100" b="0">
+              <a:rPr sz="1150" b="0">
                 <a:solidFill>
                   <a:srgbClr val="1A1A1A"/>
                 </a:solidFill>
@@ -6508,7 +6127,7 @@
           <a:p>
             <a:pPr algn="l"/>
             <a:r>
-              <a:rPr sz="1100" b="0">
+              <a:rPr sz="1150" b="0">
                 <a:solidFill>
                   <a:srgbClr val="1A1A1A"/>
                 </a:solidFill>
@@ -6520,7 +6139,7 @@
           <a:p>
             <a:pPr algn="l"/>
             <a:r>
-              <a:rPr sz="1100" b="0">
+              <a:rPr sz="1150" b="0">
                 <a:solidFill>
                   <a:srgbClr val="1A1A1A"/>
                 </a:solidFill>
@@ -6532,7 +6151,7 @@
           <a:p>
             <a:pPr algn="l"/>
             <a:r>
-              <a:rPr sz="1100" b="0">
+              <a:rPr sz="1150" b="0">
                 <a:solidFill>
                   <a:srgbClr val="1A1A1A"/>
                 </a:solidFill>
@@ -6544,7 +6163,7 @@
           <a:p>
             <a:pPr algn="l"/>
             <a:r>
-              <a:rPr sz="1100" b="0">
+              <a:rPr sz="1150" b="0">
                 <a:solidFill>
                   <a:srgbClr val="1A1A1A"/>
                 </a:solidFill>
@@ -6556,7 +6175,7 @@
           <a:p>
             <a:pPr algn="l"/>
             <a:r>
-              <a:rPr sz="1100" b="0">
+              <a:rPr sz="1150" b="0">
                 <a:solidFill>
                   <a:srgbClr val="1A1A1A"/>
                 </a:solidFill>
@@ -6568,7 +6187,7 @@
           <a:p>
             <a:pPr algn="l"/>
             <a:r>
-              <a:rPr sz="1100" b="0">
+              <a:rPr sz="1150" b="0">
                 <a:solidFill>
                   <a:srgbClr val="1A1A1A"/>
                 </a:solidFill>
@@ -6580,7 +6199,7 @@
           <a:p>
             <a:pPr algn="l"/>
             <a:r>
-              <a:rPr sz="1100" b="0">
+              <a:rPr sz="1150" b="0">
                 <a:solidFill>
                   <a:srgbClr val="1A1A1A"/>
                 </a:solidFill>
@@ -6592,7 +6211,7 @@
           <a:p>
             <a:pPr algn="l"/>
             <a:r>
-              <a:rPr sz="1100" b="0">
+              <a:rPr sz="1150" b="0">
                 <a:solidFill>
                   <a:srgbClr val="1A1A1A"/>
                 </a:solidFill>
@@ -6604,7 +6223,7 @@
           <a:p>
             <a:pPr algn="l"/>
             <a:r>
-              <a:rPr sz="1100" b="0">
+              <a:rPr sz="1150" b="0">
                 <a:solidFill>
                   <a:srgbClr val="1A1A1A"/>
                 </a:solidFill>
@@ -6616,7 +6235,7 @@
           <a:p>
             <a:pPr algn="l"/>
             <a:r>
-              <a:rPr sz="1100" b="0">
+              <a:rPr sz="1150" b="0">
                 <a:solidFill>
                   <a:srgbClr val="1A1A1A"/>
                 </a:solidFill>
@@ -6629,7 +6248,7 @@
       </p:sp>
       <p:sp>
         <p:nvSpPr>
-          <p:cNvPr id="4" name="TextBox 3"/>
+          <p:cNvPr id="5" name="TextBox 4"/>
           <p:cNvSpPr txBox="1"/>
           <p:nvPr/>
         </p:nvSpPr>
@@ -6664,7 +6283,7 @@
       </p:sp>
       <p:sp>
         <p:nvSpPr>
-          <p:cNvPr id="5" name="TextBox 4"/>
+          <p:cNvPr id="6" name="TextBox 5"/>
           <p:cNvSpPr txBox="1"/>
           <p:nvPr/>
         </p:nvSpPr>
@@ -6723,58 +6342,128 @@
         </p:nvSpPr>
         <p:spPr>
           <a:xfrm>
-            <a:off x="365750" y="274320"/>
-            <a:ext cx="10972525" cy="480060"/>
-          </a:xfrm>
-          <a:prstGeom prst="rect">
-            <a:avLst/>
-          </a:prstGeom>
-          <a:noFill/>
-        </p:spPr>
-        <p:txBody>
-          <a:bodyPr wrap="square" lIns="36000" rIns="36000" tIns="18000" bIns="18000">
-            <a:spAutoFit/>
-          </a:bodyPr>
-          <a:lstStyle/>
-          <a:p>
-            <a:pPr algn="l"/>
-            <a:r>
-              <a:rPr sz="1700" b="1">
+            <a:off x="487667" y="137160"/>
+            <a:ext cx="7315017" cy="274320"/>
+          </a:xfrm>
+          <a:prstGeom prst="rect">
+            <a:avLst/>
+          </a:prstGeom>
+          <a:noFill/>
+        </p:spPr>
+        <p:txBody>
+          <a:bodyPr wrap="square" lIns="36000" rIns="36000" tIns="18000" bIns="18000">
+            <a:spAutoFit/>
+          </a:bodyPr>
+          <a:lstStyle/>
+          <a:p>
+            <a:pPr algn="l"/>
+            <a:r>
+              <a:rPr sz="900" b="0">
+                <a:solidFill>
+                  <a:srgbClr val="767676"/>
+                </a:solidFill>
+                <a:latin typeface="Pretendard"/>
+              </a:rPr>
+              <a:t>UX전략보고서</a:t>
+            </a:r>
+          </a:p>
+        </p:txBody>
+      </p:sp>
+      <p:sp>
+        <p:nvSpPr>
+          <p:cNvPr id="3" name="TextBox 2"/>
+          <p:cNvSpPr txBox="1"/>
+          <p:nvPr/>
+        </p:nvSpPr>
+        <p:spPr>
+          <a:xfrm>
+            <a:off x="487667" y="548640"/>
+            <a:ext cx="11216359" cy="548640"/>
+          </a:xfrm>
+          <a:prstGeom prst="rect">
+            <a:avLst/>
+          </a:prstGeom>
+          <a:noFill/>
+        </p:spPr>
+        <p:txBody>
+          <a:bodyPr wrap="square" lIns="36000" rIns="36000" tIns="18000" bIns="18000">
+            <a:spAutoFit/>
+          </a:bodyPr>
+          <a:lstStyle/>
+          <a:p>
+            <a:pPr algn="l"/>
+            <a:r>
+              <a:rPr sz="2400" b="1">
                 <a:solidFill>
                   <a:srgbClr val="1A1A1A"/>
                 </a:solidFill>
                 <a:latin typeface="Pretendard"/>
               </a:rPr>
-              <a:t>9-B. ⚠️ 분석 공백 — 메인 화면</a:t>
-            </a:r>
-          </a:p>
-        </p:txBody>
-      </p:sp>
-      <p:sp>
-        <p:nvSpPr>
-          <p:cNvPr id="3" name="TextBox 2"/>
-          <p:cNvSpPr txBox="1"/>
-          <p:nvPr/>
-        </p:nvSpPr>
-        <p:spPr>
-          <a:xfrm>
-            <a:off x="365750" y="891540"/>
-            <a:ext cx="10972525" cy="5349240"/>
-          </a:xfrm>
-          <a:prstGeom prst="rect">
-            <a:avLst/>
-          </a:prstGeom>
-          <a:noFill/>
-        </p:spPr>
-        <p:txBody>
-          <a:bodyPr wrap="square" lIns="36000" rIns="36000" tIns="18000" bIns="18000">
-            <a:spAutoFit/>
-          </a:bodyPr>
-          <a:lstStyle/>
-          <a:p>
-            <a:pPr algn="l"/>
-            <a:r>
-              <a:rPr sz="1100" b="0">
+              <a:t>B. ⚠️ 분석 공백</a:t>
+            </a:r>
+          </a:p>
+        </p:txBody>
+      </p:sp>
+      <p:sp>
+        <p:nvSpPr>
+          <p:cNvPr id="4" name="TextBox 3"/>
+          <p:cNvSpPr txBox="1"/>
+          <p:nvPr/>
+        </p:nvSpPr>
+        <p:spPr>
+          <a:xfrm>
+            <a:off x="487667" y="1097280"/>
+            <a:ext cx="11216359" cy="377190"/>
+          </a:xfrm>
+          <a:prstGeom prst="rect">
+            <a:avLst/>
+          </a:prstGeom>
+          <a:noFill/>
+        </p:spPr>
+        <p:txBody>
+          <a:bodyPr wrap="square" lIns="36000" rIns="36000" tIns="18000" bIns="18000">
+            <a:spAutoFit/>
+          </a:bodyPr>
+          <a:lstStyle/>
+          <a:p>
+            <a:pPr algn="l"/>
+            <a:r>
+              <a:rPr sz="1200" b="0">
+                <a:solidFill>
+                  <a:srgbClr val="767676"/>
+                </a:solidFill>
+                <a:latin typeface="Pretendard"/>
+              </a:rPr>
+              <a:t>메인 화면</a:t>
+            </a:r>
+          </a:p>
+        </p:txBody>
+      </p:sp>
+      <p:sp>
+        <p:nvSpPr>
+          <p:cNvPr id="5" name="TextBox 4"/>
+          <p:cNvSpPr txBox="1"/>
+          <p:nvPr/>
+        </p:nvSpPr>
+        <p:spPr>
+          <a:xfrm>
+            <a:off x="487667" y="1577340"/>
+            <a:ext cx="11216359" cy="4732020"/>
+          </a:xfrm>
+          <a:prstGeom prst="rect">
+            <a:avLst/>
+          </a:prstGeom>
+          <a:noFill/>
+        </p:spPr>
+        <p:txBody>
+          <a:bodyPr wrap="square" lIns="36000" rIns="36000" tIns="18000" bIns="18000">
+            <a:spAutoFit/>
+          </a:bodyPr>
+          <a:lstStyle/>
+          <a:p>
+            <a:pPr algn="l"/>
+            <a:r>
+              <a:rPr sz="1150" b="0">
                 <a:solidFill>
                   <a:srgbClr val="1A1A1A"/>
                 </a:solidFill>
@@ -6786,7 +6475,7 @@
           <a:p>
             <a:pPr algn="l"/>
             <a:r>
-              <a:rPr sz="1100" b="0">
+              <a:rPr sz="1150" b="0">
                 <a:solidFill>
                   <a:srgbClr val="1A1A1A"/>
                 </a:solidFill>
@@ -6799,7 +6488,7 @@
       </p:sp>
       <p:sp>
         <p:nvSpPr>
-          <p:cNvPr id="4" name="TextBox 3"/>
+          <p:cNvPr id="6" name="TextBox 5"/>
           <p:cNvSpPr txBox="1"/>
           <p:nvPr/>
         </p:nvSpPr>
@@ -6834,7 +6523,7 @@
       </p:sp>
       <p:sp>
         <p:nvSpPr>
-          <p:cNvPr id="5" name="TextBox 4"/>
+          <p:cNvPr id="7" name="TextBox 6"/>
           <p:cNvSpPr txBox="1"/>
           <p:nvPr/>
         </p:nvSpPr>
@@ -6893,42 +6582,77 @@
         </p:nvSpPr>
         <p:spPr>
           <a:xfrm>
-            <a:off x="365750" y="274320"/>
-            <a:ext cx="10972525" cy="480060"/>
-          </a:xfrm>
-          <a:prstGeom prst="rect">
-            <a:avLst/>
-          </a:prstGeom>
-          <a:noFill/>
-        </p:spPr>
-        <p:txBody>
-          <a:bodyPr wrap="square" lIns="36000" rIns="36000" tIns="18000" bIns="18000">
-            <a:spAutoFit/>
-          </a:bodyPr>
-          <a:lstStyle/>
-          <a:p>
-            <a:pPr algn="l"/>
-            <a:r>
-              <a:rPr sz="1700" b="1">
+            <a:off x="487667" y="137160"/>
+            <a:ext cx="7315017" cy="274320"/>
+          </a:xfrm>
+          <a:prstGeom prst="rect">
+            <a:avLst/>
+          </a:prstGeom>
+          <a:noFill/>
+        </p:spPr>
+        <p:txBody>
+          <a:bodyPr wrap="square" lIns="36000" rIns="36000" tIns="18000" bIns="18000">
+            <a:spAutoFit/>
+          </a:bodyPr>
+          <a:lstStyle/>
+          <a:p>
+            <a:pPr algn="l"/>
+            <a:r>
+              <a:rPr sz="900" b="0">
+                <a:solidFill>
+                  <a:srgbClr val="767676"/>
+                </a:solidFill>
+                <a:latin typeface="Pretendard"/>
+              </a:rPr>
+              <a:t>UX전략보고서</a:t>
+            </a:r>
+          </a:p>
+        </p:txBody>
+      </p:sp>
+      <p:sp>
+        <p:nvSpPr>
+          <p:cNvPr id="3" name="TextBox 2"/>
+          <p:cNvSpPr txBox="1"/>
+          <p:nvPr/>
+        </p:nvSpPr>
+        <p:spPr>
+          <a:xfrm>
+            <a:off x="487667" y="548640"/>
+            <a:ext cx="11216359" cy="548640"/>
+          </a:xfrm>
+          <a:prstGeom prst="rect">
+            <a:avLst/>
+          </a:prstGeom>
+          <a:noFill/>
+        </p:spPr>
+        <p:txBody>
+          <a:bodyPr wrap="square" lIns="36000" rIns="36000" tIns="18000" bIns="18000">
+            <a:spAutoFit/>
+          </a:bodyPr>
+          <a:lstStyle/>
+          <a:p>
+            <a:pPr algn="l"/>
+            <a:r>
+              <a:rPr sz="2400" b="1">
                 <a:solidFill>
                   <a:srgbClr val="1A1A1A"/>
                 </a:solidFill>
                 <a:latin typeface="Pretendard"/>
               </a:rPr>
-              <a:t>10. ⚠️ 이 전략의 근거 한계</a:t>
-            </a:r>
-          </a:p>
-        </p:txBody>
-      </p:sp>
-      <p:sp>
-        <p:nvSpPr>
-          <p:cNvPr id="3" name="Rectangle 2"/>
+              <a:t>⚠️ 이 전략의 근거 한계</a:t>
+            </a:r>
+          </a:p>
+        </p:txBody>
+      </p:sp>
+      <p:sp>
+        <p:nvSpPr>
+          <p:cNvPr id="4" name="Rectangle 3"/>
           <p:cNvSpPr/>
           <p:nvPr/>
         </p:nvSpPr>
         <p:spPr>
           <a:xfrm>
-            <a:off x="365750" y="891540"/>
+            <a:off x="487667" y="1234440"/>
             <a:ext cx="3169840" cy="377190"/>
           </a:xfrm>
           <a:prstGeom prst="rect">
@@ -6968,13 +6692,13 @@
       </p:sp>
       <p:sp>
         <p:nvSpPr>
-          <p:cNvPr id="4" name="TextBox 3"/>
-          <p:cNvSpPr txBox="1"/>
-          <p:nvPr/>
-        </p:nvSpPr>
-        <p:spPr>
-          <a:xfrm>
-            <a:off x="365750" y="946404"/>
+          <p:cNvPr id="5" name="TextBox 4"/>
+          <p:cNvSpPr txBox="1"/>
+          <p:nvPr/>
+        </p:nvSpPr>
+        <p:spPr>
+          <a:xfrm>
+            <a:off x="487667" y="1289304"/>
             <a:ext cx="3169840" cy="301752"/>
           </a:xfrm>
           <a:prstGeom prst="rect">
@@ -7003,13 +6727,13 @@
       </p:sp>
       <p:sp>
         <p:nvSpPr>
-          <p:cNvPr id="5" name="Rectangle 4"/>
+          <p:cNvPr id="6" name="Rectangle 5"/>
           <p:cNvSpPr/>
           <p:nvPr/>
         </p:nvSpPr>
         <p:spPr>
           <a:xfrm>
-            <a:off x="3535591" y="891540"/>
+            <a:off x="3657508" y="1234440"/>
             <a:ext cx="4145176" cy="377190"/>
           </a:xfrm>
           <a:prstGeom prst="rect">
@@ -7049,13 +6773,13 @@
       </p:sp>
       <p:sp>
         <p:nvSpPr>
-          <p:cNvPr id="6" name="TextBox 5"/>
-          <p:cNvSpPr txBox="1"/>
-          <p:nvPr/>
-        </p:nvSpPr>
-        <p:spPr>
-          <a:xfrm>
-            <a:off x="3535591" y="946404"/>
+          <p:cNvPr id="7" name="TextBox 6"/>
+          <p:cNvSpPr txBox="1"/>
+          <p:nvPr/>
+        </p:nvSpPr>
+        <p:spPr>
+          <a:xfrm>
+            <a:off x="3657508" y="1289304"/>
             <a:ext cx="4145176" cy="301752"/>
           </a:xfrm>
           <a:prstGeom prst="rect">
@@ -7084,13 +6808,13 @@
       </p:sp>
       <p:sp>
         <p:nvSpPr>
-          <p:cNvPr id="7" name="Rectangle 6"/>
+          <p:cNvPr id="8" name="Rectangle 7"/>
           <p:cNvSpPr/>
           <p:nvPr/>
         </p:nvSpPr>
         <p:spPr>
           <a:xfrm>
-            <a:off x="7680767" y="891540"/>
+            <a:off x="7802684" y="1234440"/>
             <a:ext cx="4145176" cy="377190"/>
           </a:xfrm>
           <a:prstGeom prst="rect">
@@ -7130,13 +6854,13 @@
       </p:sp>
       <p:sp>
         <p:nvSpPr>
-          <p:cNvPr id="8" name="TextBox 7"/>
-          <p:cNvSpPr txBox="1"/>
-          <p:nvPr/>
-        </p:nvSpPr>
-        <p:spPr>
-          <a:xfrm>
-            <a:off x="7680767" y="946404"/>
+          <p:cNvPr id="9" name="TextBox 8"/>
+          <p:cNvSpPr txBox="1"/>
+          <p:nvPr/>
+        </p:nvSpPr>
+        <p:spPr>
+          <a:xfrm>
+            <a:off x="7802684" y="1289304"/>
             <a:ext cx="4145176" cy="301752"/>
           </a:xfrm>
           <a:prstGeom prst="rect">
@@ -7165,13 +6889,13 @@
       </p:sp>
       <p:sp>
         <p:nvSpPr>
-          <p:cNvPr id="9" name="Rectangle 8"/>
+          <p:cNvPr id="10" name="Rectangle 9"/>
           <p:cNvSpPr/>
           <p:nvPr/>
         </p:nvSpPr>
         <p:spPr>
           <a:xfrm>
-            <a:off x="365750" y="1268730"/>
+            <a:off x="487667" y="1611630"/>
             <a:ext cx="3169840" cy="411480"/>
           </a:xfrm>
           <a:prstGeom prst="rect">
@@ -7211,13 +6935,13 @@
       </p:sp>
       <p:sp>
         <p:nvSpPr>
-          <p:cNvPr id="10" name="TextBox 9"/>
-          <p:cNvSpPr txBox="1"/>
-          <p:nvPr/>
-        </p:nvSpPr>
-        <p:spPr>
-          <a:xfrm>
-            <a:off x="365750" y="1296161"/>
+          <p:cNvPr id="11" name="TextBox 10"/>
+          <p:cNvSpPr txBox="1"/>
+          <p:nvPr/>
+        </p:nvSpPr>
+        <p:spPr>
+          <a:xfrm>
+            <a:off x="487667" y="1639062"/>
             <a:ext cx="3169840" cy="356616"/>
           </a:xfrm>
           <a:prstGeom prst="rect">
@@ -7233,7 +6957,7 @@
           <a:p>
             <a:pPr algn="l"/>
             <a:r>
-              <a:rPr sz="750" b="0">
+              <a:rPr sz="800" b="0">
                 <a:solidFill>
                   <a:srgbClr val="1A1A1A"/>
                 </a:solidFill>
@@ -7246,13 +6970,13 @@
       </p:sp>
       <p:sp>
         <p:nvSpPr>
-          <p:cNvPr id="11" name="Rectangle 10"/>
+          <p:cNvPr id="12" name="Rectangle 11"/>
           <p:cNvSpPr/>
           <p:nvPr/>
         </p:nvSpPr>
         <p:spPr>
           <a:xfrm>
-            <a:off x="3535591" y="1268730"/>
+            <a:off x="3657508" y="1611630"/>
             <a:ext cx="4145176" cy="411480"/>
           </a:xfrm>
           <a:prstGeom prst="rect">
@@ -7292,13 +7016,13 @@
       </p:sp>
       <p:sp>
         <p:nvSpPr>
-          <p:cNvPr id="12" name="TextBox 11"/>
-          <p:cNvSpPr txBox="1"/>
-          <p:nvPr/>
-        </p:nvSpPr>
-        <p:spPr>
-          <a:xfrm>
-            <a:off x="3535591" y="1296161"/>
+          <p:cNvPr id="13" name="TextBox 12"/>
+          <p:cNvSpPr txBox="1"/>
+          <p:nvPr/>
+        </p:nvSpPr>
+        <p:spPr>
+          <a:xfrm>
+            <a:off x="3657508" y="1639062"/>
             <a:ext cx="4145176" cy="356616"/>
           </a:xfrm>
           <a:prstGeom prst="rect">
@@ -7314,7 +7038,7 @@
           <a:p>
             <a:pPr algn="l"/>
             <a:r>
-              <a:rPr sz="750" b="0">
+              <a:rPr sz="800" b="0">
                 <a:solidFill>
                   <a:srgbClr val="1A1A1A"/>
                 </a:solidFill>
@@ -7327,13 +7051,13 @@
       </p:sp>
       <p:sp>
         <p:nvSpPr>
-          <p:cNvPr id="13" name="Rectangle 12"/>
+          <p:cNvPr id="14" name="Rectangle 13"/>
           <p:cNvSpPr/>
           <p:nvPr/>
         </p:nvSpPr>
         <p:spPr>
           <a:xfrm>
-            <a:off x="7680767" y="1268730"/>
+            <a:off x="7802684" y="1611630"/>
             <a:ext cx="4145176" cy="411480"/>
           </a:xfrm>
           <a:prstGeom prst="rect">
@@ -7373,13 +7097,13 @@
       </p:sp>
       <p:sp>
         <p:nvSpPr>
-          <p:cNvPr id="14" name="TextBox 13"/>
-          <p:cNvSpPr txBox="1"/>
-          <p:nvPr/>
-        </p:nvSpPr>
-        <p:spPr>
-          <a:xfrm>
-            <a:off x="7680767" y="1296161"/>
+          <p:cNvPr id="15" name="TextBox 14"/>
+          <p:cNvSpPr txBox="1"/>
+          <p:nvPr/>
+        </p:nvSpPr>
+        <p:spPr>
+          <a:xfrm>
+            <a:off x="7802684" y="1639062"/>
             <a:ext cx="4145176" cy="356616"/>
           </a:xfrm>
           <a:prstGeom prst="rect">
@@ -7395,7 +7119,7 @@
           <a:p>
             <a:pPr algn="l"/>
             <a:r>
-              <a:rPr sz="750" b="0">
+              <a:rPr sz="800" b="0">
                 <a:solidFill>
                   <a:srgbClr val="1A1A1A"/>
                 </a:solidFill>
@@ -7408,13 +7132,13 @@
       </p:sp>
       <p:sp>
         <p:nvSpPr>
-          <p:cNvPr id="15" name="Rectangle 14"/>
+          <p:cNvPr id="16" name="Rectangle 15"/>
           <p:cNvSpPr/>
           <p:nvPr/>
         </p:nvSpPr>
         <p:spPr>
           <a:xfrm>
-            <a:off x="365750" y="1680210"/>
+            <a:off x="487667" y="2023110"/>
             <a:ext cx="3169840" cy="411480"/>
           </a:xfrm>
           <a:prstGeom prst="rect">
@@ -7454,13 +7178,13 @@
       </p:sp>
       <p:sp>
         <p:nvSpPr>
-          <p:cNvPr id="16" name="TextBox 15"/>
-          <p:cNvSpPr txBox="1"/>
-          <p:nvPr/>
-        </p:nvSpPr>
-        <p:spPr>
-          <a:xfrm>
-            <a:off x="365750" y="1707642"/>
+          <p:cNvPr id="17" name="TextBox 16"/>
+          <p:cNvSpPr txBox="1"/>
+          <p:nvPr/>
+        </p:nvSpPr>
+        <p:spPr>
+          <a:xfrm>
+            <a:off x="487667" y="2050542"/>
             <a:ext cx="3169840" cy="356616"/>
           </a:xfrm>
           <a:prstGeom prst="rect">
@@ -7476,7 +7200,7 @@
           <a:p>
             <a:pPr algn="l"/>
             <a:r>
-              <a:rPr sz="750" b="0">
+              <a:rPr sz="800" b="0">
                 <a:solidFill>
                   <a:srgbClr val="1A1A1A"/>
                 </a:solidFill>
@@ -7489,13 +7213,13 @@
       </p:sp>
       <p:sp>
         <p:nvSpPr>
-          <p:cNvPr id="17" name="Rectangle 16"/>
+          <p:cNvPr id="18" name="Rectangle 17"/>
           <p:cNvSpPr/>
           <p:nvPr/>
         </p:nvSpPr>
         <p:spPr>
           <a:xfrm>
-            <a:off x="3535591" y="1680210"/>
+            <a:off x="3657508" y="2023110"/>
             <a:ext cx="4145176" cy="411480"/>
           </a:xfrm>
           <a:prstGeom prst="rect">
@@ -7535,13 +7259,13 @@
       </p:sp>
       <p:sp>
         <p:nvSpPr>
-          <p:cNvPr id="18" name="TextBox 17"/>
-          <p:cNvSpPr txBox="1"/>
-          <p:nvPr/>
-        </p:nvSpPr>
-        <p:spPr>
-          <a:xfrm>
-            <a:off x="3535591" y="1707642"/>
+          <p:cNvPr id="19" name="TextBox 18"/>
+          <p:cNvSpPr txBox="1"/>
+          <p:nvPr/>
+        </p:nvSpPr>
+        <p:spPr>
+          <a:xfrm>
+            <a:off x="3657508" y="2050542"/>
             <a:ext cx="4145176" cy="356616"/>
           </a:xfrm>
           <a:prstGeom prst="rect">
@@ -7557,7 +7281,7 @@
           <a:p>
             <a:pPr algn="l"/>
             <a:r>
-              <a:rPr sz="750" b="0">
+              <a:rPr sz="800" b="0">
                 <a:solidFill>
                   <a:srgbClr val="1A1A1A"/>
                 </a:solidFill>
@@ -7570,13 +7294,13 @@
       </p:sp>
       <p:sp>
         <p:nvSpPr>
-          <p:cNvPr id="19" name="Rectangle 18"/>
+          <p:cNvPr id="20" name="Rectangle 19"/>
           <p:cNvSpPr/>
           <p:nvPr/>
         </p:nvSpPr>
         <p:spPr>
           <a:xfrm>
-            <a:off x="7680767" y="1680210"/>
+            <a:off x="7802684" y="2023110"/>
             <a:ext cx="4145176" cy="411480"/>
           </a:xfrm>
           <a:prstGeom prst="rect">
@@ -7616,13 +7340,13 @@
       </p:sp>
       <p:sp>
         <p:nvSpPr>
-          <p:cNvPr id="20" name="TextBox 19"/>
-          <p:cNvSpPr txBox="1"/>
-          <p:nvPr/>
-        </p:nvSpPr>
-        <p:spPr>
-          <a:xfrm>
-            <a:off x="7680767" y="1707642"/>
+          <p:cNvPr id="21" name="TextBox 20"/>
+          <p:cNvSpPr txBox="1"/>
+          <p:nvPr/>
+        </p:nvSpPr>
+        <p:spPr>
+          <a:xfrm>
+            <a:off x="7802684" y="2050542"/>
             <a:ext cx="4145176" cy="356616"/>
           </a:xfrm>
           <a:prstGeom prst="rect">
@@ -7638,7 +7362,7 @@
           <a:p>
             <a:pPr algn="l"/>
             <a:r>
-              <a:rPr sz="750" b="0">
+              <a:rPr sz="800" b="0">
                 <a:solidFill>
                   <a:srgbClr val="1A1A1A"/>
                 </a:solidFill>
@@ -7651,13 +7375,13 @@
       </p:sp>
       <p:sp>
         <p:nvSpPr>
-          <p:cNvPr id="21" name="Rectangle 20"/>
+          <p:cNvPr id="22" name="Rectangle 21"/>
           <p:cNvSpPr/>
           <p:nvPr/>
         </p:nvSpPr>
         <p:spPr>
           <a:xfrm>
-            <a:off x="365750" y="2091690"/>
+            <a:off x="487667" y="2434590"/>
             <a:ext cx="3169840" cy="411480"/>
           </a:xfrm>
           <a:prstGeom prst="rect">
@@ -7697,13 +7421,13 @@
       </p:sp>
       <p:sp>
         <p:nvSpPr>
-          <p:cNvPr id="22" name="TextBox 21"/>
-          <p:cNvSpPr txBox="1"/>
-          <p:nvPr/>
-        </p:nvSpPr>
-        <p:spPr>
-          <a:xfrm>
-            <a:off x="365750" y="2119122"/>
+          <p:cNvPr id="23" name="TextBox 22"/>
+          <p:cNvSpPr txBox="1"/>
+          <p:nvPr/>
+        </p:nvSpPr>
+        <p:spPr>
+          <a:xfrm>
+            <a:off x="487667" y="2462022"/>
             <a:ext cx="3169840" cy="356616"/>
           </a:xfrm>
           <a:prstGeom prst="rect">
@@ -7719,7 +7443,7 @@
           <a:p>
             <a:pPr algn="l"/>
             <a:r>
-              <a:rPr sz="750" b="0">
+              <a:rPr sz="800" b="0">
                 <a:solidFill>
                   <a:srgbClr val="1A1A1A"/>
                 </a:solidFill>
@@ -7732,13 +7456,13 @@
       </p:sp>
       <p:sp>
         <p:nvSpPr>
-          <p:cNvPr id="23" name="Rectangle 22"/>
+          <p:cNvPr id="24" name="Rectangle 23"/>
           <p:cNvSpPr/>
           <p:nvPr/>
         </p:nvSpPr>
         <p:spPr>
           <a:xfrm>
-            <a:off x="3535591" y="2091690"/>
+            <a:off x="3657508" y="2434590"/>
             <a:ext cx="4145176" cy="411480"/>
           </a:xfrm>
           <a:prstGeom prst="rect">
@@ -7778,13 +7502,13 @@
       </p:sp>
       <p:sp>
         <p:nvSpPr>
-          <p:cNvPr id="24" name="TextBox 23"/>
-          <p:cNvSpPr txBox="1"/>
-          <p:nvPr/>
-        </p:nvSpPr>
-        <p:spPr>
-          <a:xfrm>
-            <a:off x="3535591" y="2119122"/>
+          <p:cNvPr id="25" name="TextBox 24"/>
+          <p:cNvSpPr txBox="1"/>
+          <p:nvPr/>
+        </p:nvSpPr>
+        <p:spPr>
+          <a:xfrm>
+            <a:off x="3657508" y="2462022"/>
             <a:ext cx="4145176" cy="356616"/>
           </a:xfrm>
           <a:prstGeom prst="rect">
@@ -7800,7 +7524,7 @@
           <a:p>
             <a:pPr algn="l"/>
             <a:r>
-              <a:rPr sz="750" b="0">
+              <a:rPr sz="800" b="0">
                 <a:solidFill>
                   <a:srgbClr val="1A1A1A"/>
                 </a:solidFill>
@@ -7813,13 +7537,13 @@
       </p:sp>
       <p:sp>
         <p:nvSpPr>
-          <p:cNvPr id="25" name="Rectangle 24"/>
+          <p:cNvPr id="26" name="Rectangle 25"/>
           <p:cNvSpPr/>
           <p:nvPr/>
         </p:nvSpPr>
         <p:spPr>
           <a:xfrm>
-            <a:off x="7680767" y="2091690"/>
+            <a:off x="7802684" y="2434590"/>
             <a:ext cx="4145176" cy="411480"/>
           </a:xfrm>
           <a:prstGeom prst="rect">
@@ -7859,13 +7583,13 @@
       </p:sp>
       <p:sp>
         <p:nvSpPr>
-          <p:cNvPr id="26" name="TextBox 25"/>
-          <p:cNvSpPr txBox="1"/>
-          <p:nvPr/>
-        </p:nvSpPr>
-        <p:spPr>
-          <a:xfrm>
-            <a:off x="7680767" y="2119122"/>
+          <p:cNvPr id="27" name="TextBox 26"/>
+          <p:cNvSpPr txBox="1"/>
+          <p:nvPr/>
+        </p:nvSpPr>
+        <p:spPr>
+          <a:xfrm>
+            <a:off x="7802684" y="2462022"/>
             <a:ext cx="4145176" cy="356616"/>
           </a:xfrm>
           <a:prstGeom prst="rect">
@@ -7881,7 +7605,7 @@
           <a:p>
             <a:pPr algn="l"/>
             <a:r>
-              <a:rPr sz="750" b="0">
+              <a:rPr sz="800" b="0">
                 <a:solidFill>
                   <a:srgbClr val="1A1A1A"/>
                 </a:solidFill>
@@ -7894,13 +7618,13 @@
       </p:sp>
       <p:sp>
         <p:nvSpPr>
-          <p:cNvPr id="27" name="Rectangle 26"/>
+          <p:cNvPr id="28" name="Rectangle 27"/>
           <p:cNvSpPr/>
           <p:nvPr/>
         </p:nvSpPr>
         <p:spPr>
           <a:xfrm>
-            <a:off x="365750" y="2503170"/>
+            <a:off x="487667" y="2846070"/>
             <a:ext cx="3169840" cy="411480"/>
           </a:xfrm>
           <a:prstGeom prst="rect">
@@ -7940,13 +7664,13 @@
       </p:sp>
       <p:sp>
         <p:nvSpPr>
-          <p:cNvPr id="28" name="TextBox 27"/>
-          <p:cNvSpPr txBox="1"/>
-          <p:nvPr/>
-        </p:nvSpPr>
-        <p:spPr>
-          <a:xfrm>
-            <a:off x="365750" y="2530602"/>
+          <p:cNvPr id="29" name="TextBox 28"/>
+          <p:cNvSpPr txBox="1"/>
+          <p:nvPr/>
+        </p:nvSpPr>
+        <p:spPr>
+          <a:xfrm>
+            <a:off x="487667" y="2873502"/>
             <a:ext cx="3169840" cy="356616"/>
           </a:xfrm>
           <a:prstGeom prst="rect">
@@ -7962,7 +7686,7 @@
           <a:p>
             <a:pPr algn="l"/>
             <a:r>
-              <a:rPr sz="750" b="0">
+              <a:rPr sz="800" b="0">
                 <a:solidFill>
                   <a:srgbClr val="1A1A1A"/>
                 </a:solidFill>
@@ -7975,13 +7699,13 @@
       </p:sp>
       <p:sp>
         <p:nvSpPr>
-          <p:cNvPr id="29" name="Rectangle 28"/>
+          <p:cNvPr id="30" name="Rectangle 29"/>
           <p:cNvSpPr/>
           <p:nvPr/>
         </p:nvSpPr>
         <p:spPr>
           <a:xfrm>
-            <a:off x="3535591" y="2503170"/>
+            <a:off x="3657508" y="2846070"/>
             <a:ext cx="4145176" cy="411480"/>
           </a:xfrm>
           <a:prstGeom prst="rect">
@@ -8021,13 +7745,13 @@
       </p:sp>
       <p:sp>
         <p:nvSpPr>
-          <p:cNvPr id="30" name="TextBox 29"/>
-          <p:cNvSpPr txBox="1"/>
-          <p:nvPr/>
-        </p:nvSpPr>
-        <p:spPr>
-          <a:xfrm>
-            <a:off x="3535591" y="2530602"/>
+          <p:cNvPr id="31" name="TextBox 30"/>
+          <p:cNvSpPr txBox="1"/>
+          <p:nvPr/>
+        </p:nvSpPr>
+        <p:spPr>
+          <a:xfrm>
+            <a:off x="3657508" y="2873502"/>
             <a:ext cx="4145176" cy="356616"/>
           </a:xfrm>
           <a:prstGeom prst="rect">
@@ -8043,7 +7767,7 @@
           <a:p>
             <a:pPr algn="l"/>
             <a:r>
-              <a:rPr sz="750" b="0">
+              <a:rPr sz="800" b="0">
                 <a:solidFill>
                   <a:srgbClr val="1A1A1A"/>
                 </a:solidFill>
@@ -8056,13 +7780,13 @@
       </p:sp>
       <p:sp>
         <p:nvSpPr>
-          <p:cNvPr id="31" name="Rectangle 30"/>
+          <p:cNvPr id="32" name="Rectangle 31"/>
           <p:cNvSpPr/>
           <p:nvPr/>
         </p:nvSpPr>
         <p:spPr>
           <a:xfrm>
-            <a:off x="7680767" y="2503170"/>
+            <a:off x="7802684" y="2846070"/>
             <a:ext cx="4145176" cy="411480"/>
           </a:xfrm>
           <a:prstGeom prst="rect">
@@ -8102,13 +7826,13 @@
       </p:sp>
       <p:sp>
         <p:nvSpPr>
-          <p:cNvPr id="32" name="TextBox 31"/>
-          <p:cNvSpPr txBox="1"/>
-          <p:nvPr/>
-        </p:nvSpPr>
-        <p:spPr>
-          <a:xfrm>
-            <a:off x="7680767" y="2530602"/>
+          <p:cNvPr id="33" name="TextBox 32"/>
+          <p:cNvSpPr txBox="1"/>
+          <p:nvPr/>
+        </p:nvSpPr>
+        <p:spPr>
+          <a:xfrm>
+            <a:off x="7802684" y="2873502"/>
             <a:ext cx="4145176" cy="356616"/>
           </a:xfrm>
           <a:prstGeom prst="rect">
@@ -8124,7 +7848,7 @@
           <a:p>
             <a:pPr algn="l"/>
             <a:r>
-              <a:rPr sz="750" b="0">
+              <a:rPr sz="800" b="0">
                 <a:solidFill>
                   <a:srgbClr val="1A1A1A"/>
                 </a:solidFill>
@@ -8137,13 +7861,13 @@
       </p:sp>
       <p:sp>
         <p:nvSpPr>
-          <p:cNvPr id="33" name="Rectangle 32"/>
+          <p:cNvPr id="34" name="Rectangle 33"/>
           <p:cNvSpPr/>
           <p:nvPr/>
         </p:nvSpPr>
         <p:spPr>
           <a:xfrm>
-            <a:off x="365750" y="2914650"/>
+            <a:off x="487667" y="3257550"/>
             <a:ext cx="3169840" cy="411480"/>
           </a:xfrm>
           <a:prstGeom prst="rect">
@@ -8183,13 +7907,13 @@
       </p:sp>
       <p:sp>
         <p:nvSpPr>
-          <p:cNvPr id="34" name="TextBox 33"/>
-          <p:cNvSpPr txBox="1"/>
-          <p:nvPr/>
-        </p:nvSpPr>
-        <p:spPr>
-          <a:xfrm>
-            <a:off x="365750" y="2942082"/>
+          <p:cNvPr id="35" name="TextBox 34"/>
+          <p:cNvSpPr txBox="1"/>
+          <p:nvPr/>
+        </p:nvSpPr>
+        <p:spPr>
+          <a:xfrm>
+            <a:off x="487667" y="3284982"/>
             <a:ext cx="3169840" cy="356616"/>
           </a:xfrm>
           <a:prstGeom prst="rect">
@@ -8205,7 +7929,7 @@
           <a:p>
             <a:pPr algn="l"/>
             <a:r>
-              <a:rPr sz="750" b="0">
+              <a:rPr sz="800" b="0">
                 <a:solidFill>
                   <a:srgbClr val="1A1A1A"/>
                 </a:solidFill>
@@ -8218,13 +7942,13 @@
       </p:sp>
       <p:sp>
         <p:nvSpPr>
-          <p:cNvPr id="35" name="Rectangle 34"/>
+          <p:cNvPr id="36" name="Rectangle 35"/>
           <p:cNvSpPr/>
           <p:nvPr/>
         </p:nvSpPr>
         <p:spPr>
           <a:xfrm>
-            <a:off x="3535591" y="2914650"/>
+            <a:off x="3657508" y="3257550"/>
             <a:ext cx="4145176" cy="411480"/>
           </a:xfrm>
           <a:prstGeom prst="rect">
@@ -8264,13 +7988,13 @@
       </p:sp>
       <p:sp>
         <p:nvSpPr>
-          <p:cNvPr id="36" name="TextBox 35"/>
-          <p:cNvSpPr txBox="1"/>
-          <p:nvPr/>
-        </p:nvSpPr>
-        <p:spPr>
-          <a:xfrm>
-            <a:off x="3535591" y="2942082"/>
+          <p:cNvPr id="37" name="TextBox 36"/>
+          <p:cNvSpPr txBox="1"/>
+          <p:nvPr/>
+        </p:nvSpPr>
+        <p:spPr>
+          <a:xfrm>
+            <a:off x="3657508" y="3284982"/>
             <a:ext cx="4145176" cy="356616"/>
           </a:xfrm>
           <a:prstGeom prst="rect">
@@ -8286,7 +8010,7 @@
           <a:p>
             <a:pPr algn="l"/>
             <a:r>
-              <a:rPr sz="750" b="0">
+              <a:rPr sz="800" b="0">
                 <a:solidFill>
                   <a:srgbClr val="1A1A1A"/>
                 </a:solidFill>
@@ -8299,13 +8023,13 @@
       </p:sp>
       <p:sp>
         <p:nvSpPr>
-          <p:cNvPr id="37" name="Rectangle 36"/>
+          <p:cNvPr id="38" name="Rectangle 37"/>
           <p:cNvSpPr/>
           <p:nvPr/>
         </p:nvSpPr>
         <p:spPr>
           <a:xfrm>
-            <a:off x="7680767" y="2914650"/>
+            <a:off x="7802684" y="3257550"/>
             <a:ext cx="4145176" cy="411480"/>
           </a:xfrm>
           <a:prstGeom prst="rect">
@@ -8345,13 +8069,13 @@
       </p:sp>
       <p:sp>
         <p:nvSpPr>
-          <p:cNvPr id="38" name="TextBox 37"/>
-          <p:cNvSpPr txBox="1"/>
-          <p:nvPr/>
-        </p:nvSpPr>
-        <p:spPr>
-          <a:xfrm>
-            <a:off x="7680767" y="2942082"/>
+          <p:cNvPr id="39" name="TextBox 38"/>
+          <p:cNvSpPr txBox="1"/>
+          <p:nvPr/>
+        </p:nvSpPr>
+        <p:spPr>
+          <a:xfrm>
+            <a:off x="7802684" y="3284982"/>
             <a:ext cx="4145176" cy="356616"/>
           </a:xfrm>
           <a:prstGeom prst="rect">
@@ -8367,7 +8091,7 @@
           <a:p>
             <a:pPr algn="l"/>
             <a:r>
-              <a:rPr sz="750" b="0">
+              <a:rPr sz="800" b="0">
                 <a:solidFill>
                   <a:srgbClr val="1A1A1A"/>
                 </a:solidFill>
@@ -8380,7 +8104,7 @@
       </p:sp>
       <p:sp>
         <p:nvSpPr>
-          <p:cNvPr id="39" name="TextBox 38"/>
+          <p:cNvPr id="40" name="TextBox 39"/>
           <p:cNvSpPr txBox="1"/>
           <p:nvPr/>
         </p:nvSpPr>
@@ -8415,7 +8139,7 @@
       </p:sp>
       <p:sp>
         <p:nvSpPr>
-          <p:cNvPr id="40" name="TextBox 39"/>
+          <p:cNvPr id="41" name="TextBox 40"/>
           <p:cNvSpPr txBox="1"/>
           <p:nvPr/>
         </p:nvSpPr>
@@ -8474,42 +8198,77 @@
         </p:nvSpPr>
         <p:spPr>
           <a:xfrm>
-            <a:off x="365750" y="274320"/>
-            <a:ext cx="10972525" cy="480060"/>
-          </a:xfrm>
-          <a:prstGeom prst="rect">
-            <a:avLst/>
-          </a:prstGeom>
-          <a:noFill/>
-        </p:spPr>
-        <p:txBody>
-          <a:bodyPr wrap="square" lIns="36000" rIns="36000" tIns="18000" bIns="18000">
-            <a:spAutoFit/>
-          </a:bodyPr>
-          <a:lstStyle/>
-          <a:p>
-            <a:pPr algn="l"/>
-            <a:r>
-              <a:rPr sz="1700" b="1">
+            <a:off x="487667" y="137160"/>
+            <a:ext cx="7315017" cy="274320"/>
+          </a:xfrm>
+          <a:prstGeom prst="rect">
+            <a:avLst/>
+          </a:prstGeom>
+          <a:noFill/>
+        </p:spPr>
+        <p:txBody>
+          <a:bodyPr wrap="square" lIns="36000" rIns="36000" tIns="18000" bIns="18000">
+            <a:spAutoFit/>
+          </a:bodyPr>
+          <a:lstStyle/>
+          <a:p>
+            <a:pPr algn="l"/>
+            <a:r>
+              <a:rPr sz="900" b="0">
+                <a:solidFill>
+                  <a:srgbClr val="767676"/>
+                </a:solidFill>
+                <a:latin typeface="Pretendard"/>
+              </a:rPr>
+              <a:t>UX전략보고서</a:t>
+            </a:r>
+          </a:p>
+        </p:txBody>
+      </p:sp>
+      <p:sp>
+        <p:nvSpPr>
+          <p:cNvPr id="3" name="TextBox 2"/>
+          <p:cNvSpPr txBox="1"/>
+          <p:nvPr/>
+        </p:nvSpPr>
+        <p:spPr>
+          <a:xfrm>
+            <a:off x="487667" y="548640"/>
+            <a:ext cx="11216359" cy="548640"/>
+          </a:xfrm>
+          <a:prstGeom prst="rect">
+            <a:avLst/>
+          </a:prstGeom>
+          <a:noFill/>
+        </p:spPr>
+        <p:txBody>
+          <a:bodyPr wrap="square" lIns="36000" rIns="36000" tIns="18000" bIns="18000">
+            <a:spAutoFit/>
+          </a:bodyPr>
+          <a:lstStyle/>
+          <a:p>
+            <a:pPr algn="l"/>
+            <a:r>
+              <a:rPr sz="2400" b="1">
                 <a:solidFill>
                   <a:srgbClr val="1A1A1A"/>
                 </a:solidFill>
                 <a:latin typeface="Pretendard"/>
               </a:rPr>
-              <a:t>11. 승인 요청</a:t>
-            </a:r>
-          </a:p>
-        </p:txBody>
-      </p:sp>
-      <p:sp>
-        <p:nvSpPr>
-          <p:cNvPr id="3" name="Rectangle 2"/>
+              <a:t>승인 요청</a:t>
+            </a:r>
+          </a:p>
+        </p:txBody>
+      </p:sp>
+      <p:sp>
+        <p:nvSpPr>
+          <p:cNvPr id="4" name="Rectangle 3"/>
           <p:cNvSpPr/>
           <p:nvPr/>
         </p:nvSpPr>
         <p:spPr>
           <a:xfrm>
-            <a:off x="365750" y="891540"/>
+            <a:off x="487667" y="1234440"/>
             <a:ext cx="3169840" cy="377190"/>
           </a:xfrm>
           <a:prstGeom prst="rect">
@@ -8549,13 +8308,13 @@
       </p:sp>
       <p:sp>
         <p:nvSpPr>
-          <p:cNvPr id="4" name="TextBox 3"/>
-          <p:cNvSpPr txBox="1"/>
-          <p:nvPr/>
-        </p:nvSpPr>
-        <p:spPr>
-          <a:xfrm>
-            <a:off x="365750" y="946404"/>
+          <p:cNvPr id="5" name="TextBox 4"/>
+          <p:cNvSpPr txBox="1"/>
+          <p:nvPr/>
+        </p:nvSpPr>
+        <p:spPr>
+          <a:xfrm>
+            <a:off x="487667" y="1289304"/>
             <a:ext cx="3169840" cy="301752"/>
           </a:xfrm>
           <a:prstGeom prst="rect">
@@ -8584,13 +8343,13 @@
       </p:sp>
       <p:sp>
         <p:nvSpPr>
-          <p:cNvPr id="5" name="Rectangle 4"/>
+          <p:cNvPr id="6" name="Rectangle 5"/>
           <p:cNvSpPr/>
           <p:nvPr/>
         </p:nvSpPr>
         <p:spPr>
           <a:xfrm>
-            <a:off x="3535591" y="891540"/>
+            <a:off x="3657508" y="1234440"/>
             <a:ext cx="8290352" cy="377190"/>
           </a:xfrm>
           <a:prstGeom prst="rect">
@@ -8630,13 +8389,13 @@
       </p:sp>
       <p:sp>
         <p:nvSpPr>
-          <p:cNvPr id="6" name="TextBox 5"/>
-          <p:cNvSpPr txBox="1"/>
-          <p:nvPr/>
-        </p:nvSpPr>
-        <p:spPr>
-          <a:xfrm>
-            <a:off x="3535591" y="946404"/>
+          <p:cNvPr id="7" name="TextBox 6"/>
+          <p:cNvSpPr txBox="1"/>
+          <p:nvPr/>
+        </p:nvSpPr>
+        <p:spPr>
+          <a:xfrm>
+            <a:off x="3657508" y="1289304"/>
             <a:ext cx="8290352" cy="301752"/>
           </a:xfrm>
           <a:prstGeom prst="rect">
@@ -8665,13 +8424,13 @@
       </p:sp>
       <p:sp>
         <p:nvSpPr>
-          <p:cNvPr id="7" name="Rectangle 6"/>
+          <p:cNvPr id="8" name="Rectangle 7"/>
           <p:cNvSpPr/>
           <p:nvPr/>
         </p:nvSpPr>
         <p:spPr>
           <a:xfrm>
-            <a:off x="365750" y="1268730"/>
+            <a:off x="487667" y="1611630"/>
             <a:ext cx="3169840" cy="534924"/>
           </a:xfrm>
           <a:prstGeom prst="rect">
@@ -8711,13 +8470,13 @@
       </p:sp>
       <p:sp>
         <p:nvSpPr>
-          <p:cNvPr id="8" name="TextBox 7"/>
-          <p:cNvSpPr txBox="1"/>
-          <p:nvPr/>
-        </p:nvSpPr>
-        <p:spPr>
-          <a:xfrm>
-            <a:off x="365750" y="1296161"/>
+          <p:cNvPr id="9" name="TextBox 8"/>
+          <p:cNvSpPr txBox="1"/>
+          <p:nvPr/>
+        </p:nvSpPr>
+        <p:spPr>
+          <a:xfrm>
+            <a:off x="487667" y="1639062"/>
             <a:ext cx="3169840" cy="480060"/>
           </a:xfrm>
           <a:prstGeom prst="rect">
@@ -8733,7 +8492,7 @@
           <a:p>
             <a:pPr algn="l"/>
             <a:r>
-              <a:rPr sz="750" b="0">
+              <a:rPr sz="800" b="0">
                 <a:solidFill>
                   <a:srgbClr val="1A1A1A"/>
                 </a:solidFill>
@@ -8746,13 +8505,13 @@
       </p:sp>
       <p:sp>
         <p:nvSpPr>
-          <p:cNvPr id="9" name="Rectangle 8"/>
+          <p:cNvPr id="10" name="Rectangle 9"/>
           <p:cNvSpPr/>
           <p:nvPr/>
         </p:nvSpPr>
         <p:spPr>
           <a:xfrm>
-            <a:off x="3535591" y="1268730"/>
+            <a:off x="3657508" y="1611630"/>
             <a:ext cx="8290352" cy="534924"/>
           </a:xfrm>
           <a:prstGeom prst="rect">
@@ -8792,13 +8551,13 @@
       </p:sp>
       <p:sp>
         <p:nvSpPr>
-          <p:cNvPr id="10" name="TextBox 9"/>
-          <p:cNvSpPr txBox="1"/>
-          <p:nvPr/>
-        </p:nvSpPr>
-        <p:spPr>
-          <a:xfrm>
-            <a:off x="3535591" y="1296161"/>
+          <p:cNvPr id="11" name="TextBox 10"/>
+          <p:cNvSpPr txBox="1"/>
+          <p:nvPr/>
+        </p:nvSpPr>
+        <p:spPr>
+          <a:xfrm>
+            <a:off x="3657508" y="1639062"/>
             <a:ext cx="8290352" cy="480060"/>
           </a:xfrm>
           <a:prstGeom prst="rect">
@@ -8814,7 +8573,7 @@
           <a:p>
             <a:pPr algn="l"/>
             <a:r>
-              <a:rPr sz="750" b="0">
+              <a:rPr sz="800" b="0">
                 <a:solidFill>
                   <a:srgbClr val="1A1A1A"/>
                 </a:solidFill>
@@ -8827,13 +8586,13 @@
       </p:sp>
       <p:sp>
         <p:nvSpPr>
-          <p:cNvPr id="11" name="Rectangle 10"/>
+          <p:cNvPr id="12" name="Rectangle 11"/>
           <p:cNvSpPr/>
           <p:nvPr/>
         </p:nvSpPr>
         <p:spPr>
           <a:xfrm>
-            <a:off x="365750" y="1803654"/>
+            <a:off x="487667" y="2146554"/>
             <a:ext cx="3169840" cy="411480"/>
           </a:xfrm>
           <a:prstGeom prst="rect">
@@ -8873,13 +8632,13 @@
       </p:sp>
       <p:sp>
         <p:nvSpPr>
-          <p:cNvPr id="12" name="TextBox 11"/>
-          <p:cNvSpPr txBox="1"/>
-          <p:nvPr/>
-        </p:nvSpPr>
-        <p:spPr>
-          <a:xfrm>
-            <a:off x="365750" y="1831086"/>
+          <p:cNvPr id="13" name="TextBox 12"/>
+          <p:cNvSpPr txBox="1"/>
+          <p:nvPr/>
+        </p:nvSpPr>
+        <p:spPr>
+          <a:xfrm>
+            <a:off x="487667" y="2173986"/>
             <a:ext cx="3169840" cy="356616"/>
           </a:xfrm>
           <a:prstGeom prst="rect">
@@ -8895,7 +8654,7 @@
           <a:p>
             <a:pPr algn="l"/>
             <a:r>
-              <a:rPr sz="750" b="0">
+              <a:rPr sz="800" b="0">
                 <a:solidFill>
                   <a:srgbClr val="1A1A1A"/>
                 </a:solidFill>
@@ -8908,13 +8667,13 @@
       </p:sp>
       <p:sp>
         <p:nvSpPr>
-          <p:cNvPr id="13" name="Rectangle 12"/>
+          <p:cNvPr id="14" name="Rectangle 13"/>
           <p:cNvSpPr/>
           <p:nvPr/>
         </p:nvSpPr>
         <p:spPr>
           <a:xfrm>
-            <a:off x="3535591" y="1803654"/>
+            <a:off x="3657508" y="2146554"/>
             <a:ext cx="8290352" cy="411480"/>
           </a:xfrm>
           <a:prstGeom prst="rect">
@@ -8954,13 +8713,13 @@
       </p:sp>
       <p:sp>
         <p:nvSpPr>
-          <p:cNvPr id="14" name="TextBox 13"/>
-          <p:cNvSpPr txBox="1"/>
-          <p:nvPr/>
-        </p:nvSpPr>
-        <p:spPr>
-          <a:xfrm>
-            <a:off x="3535591" y="1831086"/>
+          <p:cNvPr id="15" name="TextBox 14"/>
+          <p:cNvSpPr txBox="1"/>
+          <p:nvPr/>
+        </p:nvSpPr>
+        <p:spPr>
+          <a:xfrm>
+            <a:off x="3657508" y="2173986"/>
             <a:ext cx="8290352" cy="356616"/>
           </a:xfrm>
           <a:prstGeom prst="rect">
@@ -8976,7 +8735,7 @@
           <a:p>
             <a:pPr algn="l"/>
             <a:r>
-              <a:rPr sz="750" b="0">
+              <a:rPr sz="800" b="0">
                 <a:solidFill>
                   <a:srgbClr val="1A1A1A"/>
                 </a:solidFill>
@@ -8989,13 +8748,13 @@
       </p:sp>
       <p:sp>
         <p:nvSpPr>
-          <p:cNvPr id="15" name="Rectangle 14"/>
+          <p:cNvPr id="16" name="Rectangle 15"/>
           <p:cNvSpPr/>
           <p:nvPr/>
         </p:nvSpPr>
         <p:spPr>
           <a:xfrm>
-            <a:off x="365750" y="2215133"/>
+            <a:off x="487667" y="2558033"/>
             <a:ext cx="3169840" cy="411480"/>
           </a:xfrm>
           <a:prstGeom prst="rect">
@@ -9035,13 +8794,13 @@
       </p:sp>
       <p:sp>
         <p:nvSpPr>
-          <p:cNvPr id="16" name="TextBox 15"/>
-          <p:cNvSpPr txBox="1"/>
-          <p:nvPr/>
-        </p:nvSpPr>
-        <p:spPr>
-          <a:xfrm>
-            <a:off x="365750" y="2242565"/>
+          <p:cNvPr id="17" name="TextBox 16"/>
+          <p:cNvSpPr txBox="1"/>
+          <p:nvPr/>
+        </p:nvSpPr>
+        <p:spPr>
+          <a:xfrm>
+            <a:off x="487667" y="2585465"/>
             <a:ext cx="3169840" cy="356616"/>
           </a:xfrm>
           <a:prstGeom prst="rect">
@@ -9057,7 +8816,7 @@
           <a:p>
             <a:pPr algn="l"/>
             <a:r>
-              <a:rPr sz="750" b="0">
+              <a:rPr sz="800" b="0">
                 <a:solidFill>
                   <a:srgbClr val="1A1A1A"/>
                 </a:solidFill>
@@ -9070,13 +8829,13 @@
       </p:sp>
       <p:sp>
         <p:nvSpPr>
-          <p:cNvPr id="17" name="Rectangle 16"/>
+          <p:cNvPr id="18" name="Rectangle 17"/>
           <p:cNvSpPr/>
           <p:nvPr/>
         </p:nvSpPr>
         <p:spPr>
           <a:xfrm>
-            <a:off x="3535591" y="2215133"/>
+            <a:off x="3657508" y="2558033"/>
             <a:ext cx="8290352" cy="411480"/>
           </a:xfrm>
           <a:prstGeom prst="rect">
@@ -9116,13 +8875,13 @@
       </p:sp>
       <p:sp>
         <p:nvSpPr>
-          <p:cNvPr id="18" name="TextBox 17"/>
-          <p:cNvSpPr txBox="1"/>
-          <p:nvPr/>
-        </p:nvSpPr>
-        <p:spPr>
-          <a:xfrm>
-            <a:off x="3535591" y="2242565"/>
+          <p:cNvPr id="19" name="TextBox 18"/>
+          <p:cNvSpPr txBox="1"/>
+          <p:nvPr/>
+        </p:nvSpPr>
+        <p:spPr>
+          <a:xfrm>
+            <a:off x="3657508" y="2585465"/>
             <a:ext cx="8290352" cy="356616"/>
           </a:xfrm>
           <a:prstGeom prst="rect">
@@ -9138,7 +8897,7 @@
           <a:p>
             <a:pPr algn="l"/>
             <a:r>
-              <a:rPr sz="750" b="0">
+              <a:rPr sz="800" b="0">
                 <a:solidFill>
                   <a:srgbClr val="1A1A1A"/>
                 </a:solidFill>
@@ -9151,13 +8910,13 @@
       </p:sp>
       <p:sp>
         <p:nvSpPr>
-          <p:cNvPr id="19" name="Rectangle 18"/>
+          <p:cNvPr id="20" name="Rectangle 19"/>
           <p:cNvSpPr/>
           <p:nvPr/>
         </p:nvSpPr>
         <p:spPr>
           <a:xfrm>
-            <a:off x="365750" y="2626613"/>
+            <a:off x="487667" y="2969514"/>
             <a:ext cx="3169840" cy="534924"/>
           </a:xfrm>
           <a:prstGeom prst="rect">
@@ -9197,13 +8956,13 @@
       </p:sp>
       <p:sp>
         <p:nvSpPr>
-          <p:cNvPr id="20" name="TextBox 19"/>
-          <p:cNvSpPr txBox="1"/>
-          <p:nvPr/>
-        </p:nvSpPr>
-        <p:spPr>
-          <a:xfrm>
-            <a:off x="365750" y="2654045"/>
+          <p:cNvPr id="21" name="TextBox 20"/>
+          <p:cNvSpPr txBox="1"/>
+          <p:nvPr/>
+        </p:nvSpPr>
+        <p:spPr>
+          <a:xfrm>
+            <a:off x="487667" y="2996946"/>
             <a:ext cx="3169840" cy="480060"/>
           </a:xfrm>
           <a:prstGeom prst="rect">
@@ -9219,7 +8978,7 @@
           <a:p>
             <a:pPr algn="l"/>
             <a:r>
-              <a:rPr sz="750" b="0">
+              <a:rPr sz="800" b="0">
                 <a:solidFill>
                   <a:srgbClr val="1A1A1A"/>
                 </a:solidFill>
@@ -9232,13 +8991,13 @@
       </p:sp>
       <p:sp>
         <p:nvSpPr>
-          <p:cNvPr id="21" name="Rectangle 20"/>
+          <p:cNvPr id="22" name="Rectangle 21"/>
           <p:cNvSpPr/>
           <p:nvPr/>
         </p:nvSpPr>
         <p:spPr>
           <a:xfrm>
-            <a:off x="3535591" y="2626613"/>
+            <a:off x="3657508" y="2969514"/>
             <a:ext cx="8290352" cy="534924"/>
           </a:xfrm>
           <a:prstGeom prst="rect">
@@ -9278,13 +9037,13 @@
       </p:sp>
       <p:sp>
         <p:nvSpPr>
-          <p:cNvPr id="22" name="TextBox 21"/>
-          <p:cNvSpPr txBox="1"/>
-          <p:nvPr/>
-        </p:nvSpPr>
-        <p:spPr>
-          <a:xfrm>
-            <a:off x="3535591" y="2654045"/>
+          <p:cNvPr id="23" name="TextBox 22"/>
+          <p:cNvSpPr txBox="1"/>
+          <p:nvPr/>
+        </p:nvSpPr>
+        <p:spPr>
+          <a:xfrm>
+            <a:off x="3657508" y="2996946"/>
             <a:ext cx="8290352" cy="480060"/>
           </a:xfrm>
           <a:prstGeom prst="rect">
@@ -9300,7 +9059,7 @@
           <a:p>
             <a:pPr algn="l"/>
             <a:r>
-              <a:rPr sz="750" b="0">
+              <a:rPr sz="800" b="0">
                 <a:solidFill>
                   <a:srgbClr val="1A1A1A"/>
                 </a:solidFill>
@@ -9313,13 +9072,13 @@
       </p:sp>
       <p:sp>
         <p:nvSpPr>
-          <p:cNvPr id="23" name="Rectangle 22"/>
+          <p:cNvPr id="24" name="Rectangle 23"/>
           <p:cNvSpPr/>
           <p:nvPr/>
         </p:nvSpPr>
         <p:spPr>
           <a:xfrm>
-            <a:off x="365750" y="3161537"/>
+            <a:off x="487667" y="3504437"/>
             <a:ext cx="3169840" cy="411480"/>
           </a:xfrm>
           <a:prstGeom prst="rect">
@@ -9359,13 +9118,13 @@
       </p:sp>
       <p:sp>
         <p:nvSpPr>
-          <p:cNvPr id="24" name="TextBox 23"/>
-          <p:cNvSpPr txBox="1"/>
-          <p:nvPr/>
-        </p:nvSpPr>
-        <p:spPr>
-          <a:xfrm>
-            <a:off x="365750" y="3188969"/>
+          <p:cNvPr id="25" name="TextBox 24"/>
+          <p:cNvSpPr txBox="1"/>
+          <p:nvPr/>
+        </p:nvSpPr>
+        <p:spPr>
+          <a:xfrm>
+            <a:off x="487667" y="3531869"/>
             <a:ext cx="3169840" cy="356616"/>
           </a:xfrm>
           <a:prstGeom prst="rect">
@@ -9381,7 +9140,7 @@
           <a:p>
             <a:pPr algn="l"/>
             <a:r>
-              <a:rPr sz="750" b="0">
+              <a:rPr sz="800" b="0">
                 <a:solidFill>
                   <a:srgbClr val="1A1A1A"/>
                 </a:solidFill>
@@ -9394,13 +9153,13 @@
       </p:sp>
       <p:sp>
         <p:nvSpPr>
-          <p:cNvPr id="25" name="Rectangle 24"/>
+          <p:cNvPr id="26" name="Rectangle 25"/>
           <p:cNvSpPr/>
           <p:nvPr/>
         </p:nvSpPr>
         <p:spPr>
           <a:xfrm>
-            <a:off x="3535591" y="3161537"/>
+            <a:off x="3657508" y="3504437"/>
             <a:ext cx="8290352" cy="411480"/>
           </a:xfrm>
           <a:prstGeom prst="rect">
@@ -9440,13 +9199,13 @@
       </p:sp>
       <p:sp>
         <p:nvSpPr>
-          <p:cNvPr id="26" name="TextBox 25"/>
-          <p:cNvSpPr txBox="1"/>
-          <p:nvPr/>
-        </p:nvSpPr>
-        <p:spPr>
-          <a:xfrm>
-            <a:off x="3535591" y="3188969"/>
+          <p:cNvPr id="27" name="TextBox 26"/>
+          <p:cNvSpPr txBox="1"/>
+          <p:nvPr/>
+        </p:nvSpPr>
+        <p:spPr>
+          <a:xfrm>
+            <a:off x="3657508" y="3531869"/>
             <a:ext cx="8290352" cy="356616"/>
           </a:xfrm>
           <a:prstGeom prst="rect">
@@ -9462,7 +9221,7 @@
           <a:p>
             <a:pPr algn="l"/>
             <a:r>
-              <a:rPr sz="750" b="0">
+              <a:rPr sz="800" b="0">
                 <a:solidFill>
                   <a:srgbClr val="1A1A1A"/>
                 </a:solidFill>
@@ -9475,13 +9234,13 @@
       </p:sp>
       <p:sp>
         <p:nvSpPr>
-          <p:cNvPr id="27" name="Rectangle 26"/>
+          <p:cNvPr id="28" name="Rectangle 27"/>
           <p:cNvSpPr/>
           <p:nvPr/>
         </p:nvSpPr>
         <p:spPr>
           <a:xfrm>
-            <a:off x="365750" y="3573017"/>
+            <a:off x="487667" y="3915917"/>
             <a:ext cx="3169840" cy="411480"/>
           </a:xfrm>
           <a:prstGeom prst="rect">
@@ -9521,13 +9280,13 @@
       </p:sp>
       <p:sp>
         <p:nvSpPr>
-          <p:cNvPr id="28" name="TextBox 27"/>
-          <p:cNvSpPr txBox="1"/>
-          <p:nvPr/>
-        </p:nvSpPr>
-        <p:spPr>
-          <a:xfrm>
-            <a:off x="365750" y="3600449"/>
+          <p:cNvPr id="29" name="TextBox 28"/>
+          <p:cNvSpPr txBox="1"/>
+          <p:nvPr/>
+        </p:nvSpPr>
+        <p:spPr>
+          <a:xfrm>
+            <a:off x="487667" y="3943349"/>
             <a:ext cx="3169840" cy="356616"/>
           </a:xfrm>
           <a:prstGeom prst="rect">
@@ -9543,7 +9302,7 @@
           <a:p>
             <a:pPr algn="l"/>
             <a:r>
-              <a:rPr sz="750" b="0">
+              <a:rPr sz="800" b="0">
                 <a:solidFill>
                   <a:srgbClr val="1A1A1A"/>
                 </a:solidFill>
@@ -9556,13 +9315,13 @@
       </p:sp>
       <p:sp>
         <p:nvSpPr>
-          <p:cNvPr id="29" name="Rectangle 28"/>
+          <p:cNvPr id="30" name="Rectangle 29"/>
           <p:cNvSpPr/>
           <p:nvPr/>
         </p:nvSpPr>
         <p:spPr>
           <a:xfrm>
-            <a:off x="3535591" y="3573017"/>
+            <a:off x="3657508" y="3915917"/>
             <a:ext cx="8290352" cy="411480"/>
           </a:xfrm>
           <a:prstGeom prst="rect">
@@ -9602,13 +9361,13 @@
       </p:sp>
       <p:sp>
         <p:nvSpPr>
-          <p:cNvPr id="30" name="TextBox 29"/>
-          <p:cNvSpPr txBox="1"/>
-          <p:nvPr/>
-        </p:nvSpPr>
-        <p:spPr>
-          <a:xfrm>
-            <a:off x="3535591" y="3600449"/>
+          <p:cNvPr id="31" name="TextBox 30"/>
+          <p:cNvSpPr txBox="1"/>
+          <p:nvPr/>
+        </p:nvSpPr>
+        <p:spPr>
+          <a:xfrm>
+            <a:off x="3657508" y="3943349"/>
             <a:ext cx="8290352" cy="356616"/>
           </a:xfrm>
           <a:prstGeom prst="rect">
@@ -9624,7 +9383,7 @@
           <a:p>
             <a:pPr algn="l"/>
             <a:r>
-              <a:rPr sz="750" b="0">
+              <a:rPr sz="800" b="0">
                 <a:solidFill>
                   <a:srgbClr val="1A1A1A"/>
                 </a:solidFill>
@@ -9637,13 +9396,13 @@
       </p:sp>
       <p:sp>
         <p:nvSpPr>
-          <p:cNvPr id="31" name="Rectangle 30"/>
+          <p:cNvPr id="32" name="Rectangle 31"/>
           <p:cNvSpPr/>
           <p:nvPr/>
         </p:nvSpPr>
         <p:spPr>
           <a:xfrm>
-            <a:off x="365750" y="3984497"/>
+            <a:off x="487667" y="4327397"/>
             <a:ext cx="3169840" cy="411480"/>
           </a:xfrm>
           <a:prstGeom prst="rect">
@@ -9683,13 +9442,13 @@
       </p:sp>
       <p:sp>
         <p:nvSpPr>
-          <p:cNvPr id="32" name="TextBox 31"/>
-          <p:cNvSpPr txBox="1"/>
-          <p:nvPr/>
-        </p:nvSpPr>
-        <p:spPr>
-          <a:xfrm>
-            <a:off x="365750" y="4011929"/>
+          <p:cNvPr id="33" name="TextBox 32"/>
+          <p:cNvSpPr txBox="1"/>
+          <p:nvPr/>
+        </p:nvSpPr>
+        <p:spPr>
+          <a:xfrm>
+            <a:off x="487667" y="4354829"/>
             <a:ext cx="3169840" cy="356616"/>
           </a:xfrm>
           <a:prstGeom prst="rect">
@@ -9705,7 +9464,7 @@
           <a:p>
             <a:pPr algn="l"/>
             <a:r>
-              <a:rPr sz="750" b="0">
+              <a:rPr sz="800" b="0">
                 <a:solidFill>
                   <a:srgbClr val="1A1A1A"/>
                 </a:solidFill>
@@ -9718,13 +9477,13 @@
       </p:sp>
       <p:sp>
         <p:nvSpPr>
-          <p:cNvPr id="33" name="Rectangle 32"/>
+          <p:cNvPr id="34" name="Rectangle 33"/>
           <p:cNvSpPr/>
           <p:nvPr/>
         </p:nvSpPr>
         <p:spPr>
           <a:xfrm>
-            <a:off x="3535591" y="3984497"/>
+            <a:off x="3657508" y="4327397"/>
             <a:ext cx="8290352" cy="411480"/>
           </a:xfrm>
           <a:prstGeom prst="rect">
@@ -9764,13 +9523,13 @@
       </p:sp>
       <p:sp>
         <p:nvSpPr>
-          <p:cNvPr id="34" name="TextBox 33"/>
-          <p:cNvSpPr txBox="1"/>
-          <p:nvPr/>
-        </p:nvSpPr>
-        <p:spPr>
-          <a:xfrm>
-            <a:off x="3535591" y="4011929"/>
+          <p:cNvPr id="35" name="TextBox 34"/>
+          <p:cNvSpPr txBox="1"/>
+          <p:nvPr/>
+        </p:nvSpPr>
+        <p:spPr>
+          <a:xfrm>
+            <a:off x="3657508" y="4354829"/>
             <a:ext cx="8290352" cy="356616"/>
           </a:xfrm>
           <a:prstGeom prst="rect">
@@ -9786,7 +9545,7 @@
           <a:p>
             <a:pPr algn="l"/>
             <a:r>
-              <a:rPr sz="750" b="0">
+              <a:rPr sz="800" b="0">
                 <a:solidFill>
                   <a:srgbClr val="1A1A1A"/>
                 </a:solidFill>
@@ -9799,13 +9558,13 @@
       </p:sp>
       <p:sp>
         <p:nvSpPr>
-          <p:cNvPr id="35" name="Rectangle 34"/>
+          <p:cNvPr id="36" name="Rectangle 35"/>
           <p:cNvSpPr/>
           <p:nvPr/>
         </p:nvSpPr>
         <p:spPr>
           <a:xfrm>
-            <a:off x="365750" y="4395977"/>
+            <a:off x="487667" y="4738877"/>
             <a:ext cx="3169840" cy="534924"/>
           </a:xfrm>
           <a:prstGeom prst="rect">
@@ -9845,13 +9604,13 @@
       </p:sp>
       <p:sp>
         <p:nvSpPr>
-          <p:cNvPr id="36" name="TextBox 35"/>
-          <p:cNvSpPr txBox="1"/>
-          <p:nvPr/>
-        </p:nvSpPr>
-        <p:spPr>
-          <a:xfrm>
-            <a:off x="365750" y="4423410"/>
+          <p:cNvPr id="37" name="TextBox 36"/>
+          <p:cNvSpPr txBox="1"/>
+          <p:nvPr/>
+        </p:nvSpPr>
+        <p:spPr>
+          <a:xfrm>
+            <a:off x="487667" y="4766310"/>
             <a:ext cx="3169840" cy="480060"/>
           </a:xfrm>
           <a:prstGeom prst="rect">
@@ -9867,7 +9626,7 @@
           <a:p>
             <a:pPr algn="l"/>
             <a:r>
-              <a:rPr sz="750" b="0">
+              <a:rPr sz="800" b="0">
                 <a:solidFill>
                   <a:srgbClr val="1A1A1A"/>
                 </a:solidFill>
@@ -9880,13 +9639,13 @@
       </p:sp>
       <p:sp>
         <p:nvSpPr>
-          <p:cNvPr id="37" name="Rectangle 36"/>
+          <p:cNvPr id="38" name="Rectangle 37"/>
           <p:cNvSpPr/>
           <p:nvPr/>
         </p:nvSpPr>
         <p:spPr>
           <a:xfrm>
-            <a:off x="3535591" y="4395977"/>
+            <a:off x="3657508" y="4738877"/>
             <a:ext cx="8290352" cy="534924"/>
           </a:xfrm>
           <a:prstGeom prst="rect">
@@ -9926,13 +9685,13 @@
       </p:sp>
       <p:sp>
         <p:nvSpPr>
-          <p:cNvPr id="38" name="TextBox 37"/>
-          <p:cNvSpPr txBox="1"/>
-          <p:nvPr/>
-        </p:nvSpPr>
-        <p:spPr>
-          <a:xfrm>
-            <a:off x="3535591" y="4423410"/>
+          <p:cNvPr id="39" name="TextBox 38"/>
+          <p:cNvSpPr txBox="1"/>
+          <p:nvPr/>
+        </p:nvSpPr>
+        <p:spPr>
+          <a:xfrm>
+            <a:off x="3657508" y="4766310"/>
             <a:ext cx="8290352" cy="480060"/>
           </a:xfrm>
           <a:prstGeom prst="rect">
@@ -9948,7 +9707,7 @@
           <a:p>
             <a:pPr algn="l"/>
             <a:r>
-              <a:rPr sz="750" b="0">
+              <a:rPr sz="800" b="0">
                 <a:solidFill>
                   <a:srgbClr val="1A1A1A"/>
                 </a:solidFill>
@@ -9961,13 +9720,13 @@
       </p:sp>
       <p:sp>
         <p:nvSpPr>
-          <p:cNvPr id="39" name="Rectangle 38"/>
+          <p:cNvPr id="40" name="Rectangle 39"/>
           <p:cNvSpPr/>
           <p:nvPr/>
         </p:nvSpPr>
         <p:spPr>
           <a:xfrm>
-            <a:off x="365750" y="4930901"/>
+            <a:off x="487667" y="5273801"/>
             <a:ext cx="3169840" cy="534924"/>
           </a:xfrm>
           <a:prstGeom prst="rect">
@@ -10007,13 +9766,13 @@
       </p:sp>
       <p:sp>
         <p:nvSpPr>
-          <p:cNvPr id="40" name="TextBox 39"/>
-          <p:cNvSpPr txBox="1"/>
-          <p:nvPr/>
-        </p:nvSpPr>
-        <p:spPr>
-          <a:xfrm>
-            <a:off x="365750" y="4958334"/>
+          <p:cNvPr id="41" name="TextBox 40"/>
+          <p:cNvSpPr txBox="1"/>
+          <p:nvPr/>
+        </p:nvSpPr>
+        <p:spPr>
+          <a:xfrm>
+            <a:off x="487667" y="5301234"/>
             <a:ext cx="3169840" cy="480060"/>
           </a:xfrm>
           <a:prstGeom prst="rect">
@@ -10029,7 +9788,7 @@
           <a:p>
             <a:pPr algn="l"/>
             <a:r>
-              <a:rPr sz="750" b="0">
+              <a:rPr sz="800" b="0">
                 <a:solidFill>
                   <a:srgbClr val="1A1A1A"/>
                 </a:solidFill>
@@ -10042,13 +9801,13 @@
       </p:sp>
       <p:sp>
         <p:nvSpPr>
-          <p:cNvPr id="41" name="Rectangle 40"/>
+          <p:cNvPr id="42" name="Rectangle 41"/>
           <p:cNvSpPr/>
           <p:nvPr/>
         </p:nvSpPr>
         <p:spPr>
           <a:xfrm>
-            <a:off x="3535591" y="4930901"/>
+            <a:off x="3657508" y="5273801"/>
             <a:ext cx="8290352" cy="534924"/>
           </a:xfrm>
           <a:prstGeom prst="rect">
@@ -10088,13 +9847,13 @@
       </p:sp>
       <p:sp>
         <p:nvSpPr>
-          <p:cNvPr id="42" name="TextBox 41"/>
-          <p:cNvSpPr txBox="1"/>
-          <p:nvPr/>
-        </p:nvSpPr>
-        <p:spPr>
-          <a:xfrm>
-            <a:off x="3535591" y="4958334"/>
+          <p:cNvPr id="43" name="TextBox 42"/>
+          <p:cNvSpPr txBox="1"/>
+          <p:nvPr/>
+        </p:nvSpPr>
+        <p:spPr>
+          <a:xfrm>
+            <a:off x="3657508" y="5301234"/>
             <a:ext cx="8290352" cy="480060"/>
           </a:xfrm>
           <a:prstGeom prst="rect">
@@ -10110,7 +9869,7 @@
           <a:p>
             <a:pPr algn="l"/>
             <a:r>
-              <a:rPr sz="750" b="0">
+              <a:rPr sz="800" b="0">
                 <a:solidFill>
                   <a:srgbClr val="1A1A1A"/>
                 </a:solidFill>
@@ -10123,169 +9882,42 @@
       </p:sp>
       <p:sp>
         <p:nvSpPr>
-          <p:cNvPr id="43" name="Rectangle 42"/>
-          <p:cNvSpPr/>
-          <p:nvPr/>
-        </p:nvSpPr>
-        <p:spPr>
-          <a:xfrm>
-            <a:off x="365750" y="5465825"/>
-            <a:ext cx="3169840" cy="699516"/>
-          </a:xfrm>
-          <a:prstGeom prst="rect">
-            <a:avLst/>
-          </a:prstGeom>
-          <a:solidFill>
-            <a:srgbClr val="FFFFFF"/>
-          </a:solidFill>
-          <a:ln w="9525">
-            <a:solidFill>
-              <a:srgbClr val="D8D8D8"/>
-            </a:solidFill>
-          </a:ln>
-          <a:effectLst/>
-        </p:spPr>
-        <p:style>
-          <a:lnRef idx="1">
-            <a:schemeClr val="accent1"/>
-          </a:lnRef>
-          <a:fillRef idx="3">
-            <a:schemeClr val="accent1"/>
-          </a:fillRef>
-          <a:effectRef idx="2">
-            <a:schemeClr val="accent1"/>
-          </a:effectRef>
-          <a:fontRef idx="minor">
-            <a:schemeClr val="lt1"/>
-          </a:fontRef>
-        </p:style>
-        <p:txBody>
-          <a:bodyPr rtlCol="0" anchor="ctr"/>
-          <a:lstStyle/>
-          <a:p>
-            <a:pPr algn="ctr"/>
-          </a:p>
-        </p:txBody>
-      </p:sp>
-      <p:sp>
-        <p:nvSpPr>
           <p:cNvPr id="44" name="TextBox 43"/>
           <p:cNvSpPr txBox="1"/>
           <p:nvPr/>
         </p:nvSpPr>
         <p:spPr>
           <a:xfrm>
-            <a:off x="365750" y="5493258"/>
-            <a:ext cx="3169840" cy="644651"/>
-          </a:xfrm>
-          <a:prstGeom prst="rect">
-            <a:avLst/>
-          </a:prstGeom>
-          <a:noFill/>
-        </p:spPr>
-        <p:txBody>
-          <a:bodyPr wrap="square" lIns="36000" rIns="36000" tIns="18000" bIns="18000">
-            <a:spAutoFit/>
-          </a:bodyPr>
-          <a:lstStyle/>
-          <a:p>
-            <a:pPr algn="l"/>
-            <a:r>
-              <a:rPr sz="750" b="0">
-                <a:solidFill>
-                  <a:srgbClr val="1A1A1A"/>
-                </a:solidFill>
-                <a:latin typeface="Pretendard"/>
-              </a:rPr>
-              <a:t>V0.4</a:t>
-            </a:r>
-          </a:p>
-        </p:txBody>
-      </p:sp>
-      <p:sp>
-        <p:nvSpPr>
-          <p:cNvPr id="45" name="Rectangle 44"/>
-          <p:cNvSpPr/>
-          <p:nvPr/>
-        </p:nvSpPr>
-        <p:spPr>
-          <a:xfrm>
-            <a:off x="3535591" y="5465825"/>
-            <a:ext cx="8290352" cy="699516"/>
-          </a:xfrm>
-          <a:prstGeom prst="rect">
-            <a:avLst/>
-          </a:prstGeom>
-          <a:solidFill>
-            <a:srgbClr val="FFFFFF"/>
-          </a:solidFill>
-          <a:ln w="9525">
-            <a:solidFill>
-              <a:srgbClr val="D8D8D8"/>
-            </a:solidFill>
-          </a:ln>
-          <a:effectLst/>
-        </p:spPr>
-        <p:style>
-          <a:lnRef idx="1">
-            <a:schemeClr val="accent1"/>
-          </a:lnRef>
-          <a:fillRef idx="3">
-            <a:schemeClr val="accent1"/>
-          </a:fillRef>
-          <a:effectRef idx="2">
-            <a:schemeClr val="accent1"/>
-          </a:effectRef>
-          <a:fontRef idx="minor">
-            <a:schemeClr val="lt1"/>
-          </a:fontRef>
-        </p:style>
-        <p:txBody>
-          <a:bodyPr rtlCol="0" anchor="ctr"/>
-          <a:lstStyle/>
-          <a:p>
-            <a:pPr algn="ctr"/>
-          </a:p>
-        </p:txBody>
-      </p:sp>
-      <p:sp>
-        <p:nvSpPr>
-          <p:cNvPr id="46" name="TextBox 45"/>
-          <p:cNvSpPr txBox="1"/>
-          <p:nvPr/>
-        </p:nvSpPr>
-        <p:spPr>
-          <a:xfrm>
-            <a:off x="3535591" y="5493258"/>
-            <a:ext cx="8290352" cy="644651"/>
-          </a:xfrm>
-          <a:prstGeom prst="rect">
-            <a:avLst/>
-          </a:prstGeom>
-          <a:noFill/>
-        </p:spPr>
-        <p:txBody>
-          <a:bodyPr wrap="square" lIns="36000" rIns="36000" tIns="18000" bIns="18000">
-            <a:spAutoFit/>
-          </a:bodyPr>
-          <a:lstStyle/>
-          <a:p>
-            <a:pPr algn="l"/>
-            <a:r>
-              <a:rPr sz="750" b="0">
-                <a:solidFill>
-                  <a:srgbClr val="1A1A1A"/>
-                </a:solidFill>
-                <a:latin typeface="Pretendard"/>
-              </a:rPr>
-              <a:t>2026-08-06</a:t>
-            </a:r>
-          </a:p>
-        </p:txBody>
-      </p:sp>
-      <p:sp>
-        <p:nvSpPr>
-          <p:cNvPr id="47" name="TextBox 46"/>
+            <a:off x="487667" y="5877305"/>
+            <a:ext cx="11216359" cy="274320"/>
+          </a:xfrm>
+          <a:prstGeom prst="rect">
+            <a:avLst/>
+          </a:prstGeom>
+          <a:noFill/>
+        </p:spPr>
+        <p:txBody>
+          <a:bodyPr wrap="square" lIns="36000" rIns="36000" tIns="18000" bIns="18000">
+            <a:spAutoFit/>
+          </a:bodyPr>
+          <a:lstStyle/>
+          <a:p>
+            <a:pPr algn="l"/>
+            <a:r>
+              <a:rPr sz="800" b="0">
+                <a:solidFill>
+                  <a:srgbClr val="767676"/>
+                </a:solidFill>
+                <a:latin typeface="Pretendard"/>
+              </a:rPr>
+              <a:t>※ 이하 1행은 원장·문서 참조</a:t>
+            </a:r>
+          </a:p>
+        </p:txBody>
+      </p:sp>
+      <p:sp>
+        <p:nvSpPr>
+          <p:cNvPr id="45" name="TextBox 44"/>
           <p:cNvSpPr txBox="1"/>
           <p:nvPr/>
         </p:nvSpPr>
@@ -10320,7 +9952,7 @@
       </p:sp>
       <p:sp>
         <p:nvSpPr>
-          <p:cNvPr id="48" name="TextBox 47"/>
+          <p:cNvPr id="46" name="TextBox 45"/>
           <p:cNvSpPr txBox="1"/>
           <p:nvPr/>
         </p:nvSpPr>
@@ -11072,58 +10704,93 @@
         </p:nvSpPr>
         <p:spPr>
           <a:xfrm>
-            <a:off x="365750" y="274320"/>
-            <a:ext cx="10972525" cy="480060"/>
-          </a:xfrm>
-          <a:prstGeom prst="rect">
-            <a:avLst/>
-          </a:prstGeom>
-          <a:noFill/>
-        </p:spPr>
-        <p:txBody>
-          <a:bodyPr wrap="square" lIns="36000" rIns="36000" tIns="18000" bIns="18000">
-            <a:spAutoFit/>
-          </a:bodyPr>
-          <a:lstStyle/>
-          <a:p>
-            <a:pPr algn="l"/>
-            <a:r>
-              <a:rPr sz="1700" b="1">
+            <a:off x="487667" y="137160"/>
+            <a:ext cx="7315017" cy="274320"/>
+          </a:xfrm>
+          <a:prstGeom prst="rect">
+            <a:avLst/>
+          </a:prstGeom>
+          <a:noFill/>
+        </p:spPr>
+        <p:txBody>
+          <a:bodyPr wrap="square" lIns="36000" rIns="36000" tIns="18000" bIns="18000">
+            <a:spAutoFit/>
+          </a:bodyPr>
+          <a:lstStyle/>
+          <a:p>
+            <a:pPr algn="l"/>
+            <a:r>
+              <a:rPr sz="900" b="0">
+                <a:solidFill>
+                  <a:srgbClr val="767676"/>
+                </a:solidFill>
+                <a:latin typeface="Pretendard"/>
+              </a:rPr>
+              <a:t>UX전략보고서</a:t>
+            </a:r>
+          </a:p>
+        </p:txBody>
+      </p:sp>
+      <p:sp>
+        <p:nvSpPr>
+          <p:cNvPr id="3" name="TextBox 2"/>
+          <p:cNvSpPr txBox="1"/>
+          <p:nvPr/>
+        </p:nvSpPr>
+        <p:spPr>
+          <a:xfrm>
+            <a:off x="487667" y="548640"/>
+            <a:ext cx="11216359" cy="548640"/>
+          </a:xfrm>
+          <a:prstGeom prst="rect">
+            <a:avLst/>
+          </a:prstGeom>
+          <a:noFill/>
+        </p:spPr>
+        <p:txBody>
+          <a:bodyPr wrap="square" lIns="36000" rIns="36000" tIns="18000" bIns="18000">
+            <a:spAutoFit/>
+          </a:bodyPr>
+          <a:lstStyle/>
+          <a:p>
+            <a:pPr algn="l"/>
+            <a:r>
+              <a:rPr sz="2400" b="1">
                 <a:solidFill>
                   <a:srgbClr val="1A1A1A"/>
                 </a:solidFill>
                 <a:latin typeface="Pretendard"/>
               </a:rPr>
-              <a:t>1. 배경·목적</a:t>
-            </a:r>
-          </a:p>
-        </p:txBody>
-      </p:sp>
-      <p:sp>
-        <p:nvSpPr>
-          <p:cNvPr id="3" name="TextBox 2"/>
-          <p:cNvSpPr txBox="1"/>
-          <p:nvPr/>
-        </p:nvSpPr>
-        <p:spPr>
-          <a:xfrm>
-            <a:off x="365750" y="891540"/>
-            <a:ext cx="10972525" cy="5349240"/>
-          </a:xfrm>
-          <a:prstGeom prst="rect">
-            <a:avLst/>
-          </a:prstGeom>
-          <a:noFill/>
-        </p:spPr>
-        <p:txBody>
-          <a:bodyPr wrap="square" lIns="36000" rIns="36000" tIns="18000" bIns="18000">
-            <a:spAutoFit/>
-          </a:bodyPr>
-          <a:lstStyle/>
-          <a:p>
-            <a:pPr algn="l"/>
-            <a:r>
-              <a:rPr sz="1100" b="0">
+              <a:t>배경·목적</a:t>
+            </a:r>
+          </a:p>
+        </p:txBody>
+      </p:sp>
+      <p:sp>
+        <p:nvSpPr>
+          <p:cNvPr id="4" name="TextBox 3"/>
+          <p:cNvSpPr txBox="1"/>
+          <p:nvPr/>
+        </p:nvSpPr>
+        <p:spPr>
+          <a:xfrm>
+            <a:off x="487667" y="1234440"/>
+            <a:ext cx="11216359" cy="5074920"/>
+          </a:xfrm>
+          <a:prstGeom prst="rect">
+            <a:avLst/>
+          </a:prstGeom>
+          <a:noFill/>
+        </p:spPr>
+        <p:txBody>
+          <a:bodyPr wrap="square" lIns="36000" rIns="36000" tIns="18000" bIns="18000">
+            <a:spAutoFit/>
+          </a:bodyPr>
+          <a:lstStyle/>
+          <a:p>
+            <a:pPr algn="l"/>
+            <a:r>
+              <a:rPr sz="1150" b="0">
                 <a:solidFill>
                   <a:srgbClr val="1A1A1A"/>
                 </a:solidFill>
@@ -11135,7 +10802,7 @@
           <a:p>
             <a:pPr algn="l"/>
             <a:r>
-              <a:rPr sz="1100" b="0">
+              <a:rPr sz="1150" b="0">
                 <a:solidFill>
                   <a:srgbClr val="1A1A1A"/>
                 </a:solidFill>
@@ -11147,7 +10814,7 @@
           <a:p>
             <a:pPr algn="l"/>
             <a:r>
-              <a:rPr sz="1100" b="0">
+              <a:rPr sz="1150" b="0">
                 <a:solidFill>
                   <a:srgbClr val="1A1A1A"/>
                 </a:solidFill>
@@ -11160,7 +10827,7 @@
       </p:sp>
       <p:sp>
         <p:nvSpPr>
-          <p:cNvPr id="4" name="TextBox 3"/>
+          <p:cNvPr id="5" name="TextBox 4"/>
           <p:cNvSpPr txBox="1"/>
           <p:nvPr/>
         </p:nvSpPr>
@@ -11195,7 +10862,7 @@
       </p:sp>
       <p:sp>
         <p:nvSpPr>
-          <p:cNvPr id="5" name="TextBox 4"/>
+          <p:cNvPr id="6" name="TextBox 5"/>
           <p:cNvSpPr txBox="1"/>
           <p:nvPr/>
         </p:nvSpPr>
@@ -11254,42 +10921,112 @@
         </p:nvSpPr>
         <p:spPr>
           <a:xfrm>
-            <a:off x="365750" y="274320"/>
-            <a:ext cx="10972525" cy="480060"/>
-          </a:xfrm>
-          <a:prstGeom prst="rect">
-            <a:avLst/>
-          </a:prstGeom>
-          <a:noFill/>
-        </p:spPr>
-        <p:txBody>
-          <a:bodyPr wrap="square" lIns="36000" rIns="36000" tIns="18000" bIns="18000">
-            <a:spAutoFit/>
-          </a:bodyPr>
-          <a:lstStyle/>
-          <a:p>
-            <a:pPr algn="l"/>
-            <a:r>
-              <a:rPr sz="1700" b="1">
+            <a:off x="487667" y="137160"/>
+            <a:ext cx="7315017" cy="274320"/>
+          </a:xfrm>
+          <a:prstGeom prst="rect">
+            <a:avLst/>
+          </a:prstGeom>
+          <a:noFill/>
+        </p:spPr>
+        <p:txBody>
+          <a:bodyPr wrap="square" lIns="36000" rIns="36000" tIns="18000" bIns="18000">
+            <a:spAutoFit/>
+          </a:bodyPr>
+          <a:lstStyle/>
+          <a:p>
+            <a:pPr algn="l"/>
+            <a:r>
+              <a:rPr sz="900" b="0">
+                <a:solidFill>
+                  <a:srgbClr val="767676"/>
+                </a:solidFill>
+                <a:latin typeface="Pretendard"/>
+              </a:rPr>
+              <a:t>UX전략보고서</a:t>
+            </a:r>
+          </a:p>
+        </p:txBody>
+      </p:sp>
+      <p:sp>
+        <p:nvSpPr>
+          <p:cNvPr id="3" name="TextBox 2"/>
+          <p:cNvSpPr txBox="1"/>
+          <p:nvPr/>
+        </p:nvSpPr>
+        <p:spPr>
+          <a:xfrm>
+            <a:off x="487667" y="548640"/>
+            <a:ext cx="11216359" cy="548640"/>
+          </a:xfrm>
+          <a:prstGeom prst="rect">
+            <a:avLst/>
+          </a:prstGeom>
+          <a:noFill/>
+        </p:spPr>
+        <p:txBody>
+          <a:bodyPr wrap="square" lIns="36000" rIns="36000" tIns="18000" bIns="18000">
+            <a:spAutoFit/>
+          </a:bodyPr>
+          <a:lstStyle/>
+          <a:p>
+            <a:pPr algn="l"/>
+            <a:r>
+              <a:rPr sz="2400" b="1">
                 <a:solidFill>
                   <a:srgbClr val="1A1A1A"/>
                 </a:solidFill>
                 <a:latin typeface="Pretendard"/>
               </a:rPr>
-              <a:t>2. 문제 요약 — 3분 안에 이해할 핵심</a:t>
-            </a:r>
-          </a:p>
-        </p:txBody>
-      </p:sp>
-      <p:sp>
-        <p:nvSpPr>
-          <p:cNvPr id="3" name="Rectangle 2"/>
+              <a:t>문제 요약</a:t>
+            </a:r>
+          </a:p>
+        </p:txBody>
+      </p:sp>
+      <p:sp>
+        <p:nvSpPr>
+          <p:cNvPr id="4" name="TextBox 3"/>
+          <p:cNvSpPr txBox="1"/>
+          <p:nvPr/>
+        </p:nvSpPr>
+        <p:spPr>
+          <a:xfrm>
+            <a:off x="487667" y="1097280"/>
+            <a:ext cx="11216359" cy="377190"/>
+          </a:xfrm>
+          <a:prstGeom prst="rect">
+            <a:avLst/>
+          </a:prstGeom>
+          <a:noFill/>
+        </p:spPr>
+        <p:txBody>
+          <a:bodyPr wrap="square" lIns="36000" rIns="36000" tIns="18000" bIns="18000">
+            <a:spAutoFit/>
+          </a:bodyPr>
+          <a:lstStyle/>
+          <a:p>
+            <a:pPr algn="l"/>
+            <a:r>
+              <a:rPr sz="1200" b="0">
+                <a:solidFill>
+                  <a:srgbClr val="767676"/>
+                </a:solidFill>
+                <a:latin typeface="Pretendard"/>
+              </a:rPr>
+              <a:t>3분 안에 이해할 핵심</a:t>
+            </a:r>
+          </a:p>
+        </p:txBody>
+      </p:sp>
+      <p:sp>
+        <p:nvSpPr>
+          <p:cNvPr id="5" name="Rectangle 4"/>
           <p:cNvSpPr/>
           <p:nvPr/>
         </p:nvSpPr>
         <p:spPr>
           <a:xfrm>
-            <a:off x="365750" y="891540"/>
+            <a:off x="487667" y="1577340"/>
             <a:ext cx="3169840" cy="377190"/>
           </a:xfrm>
           <a:prstGeom prst="rect">
@@ -11329,13 +11066,13 @@
       </p:sp>
       <p:sp>
         <p:nvSpPr>
-          <p:cNvPr id="4" name="TextBox 3"/>
-          <p:cNvSpPr txBox="1"/>
-          <p:nvPr/>
-        </p:nvSpPr>
-        <p:spPr>
-          <a:xfrm>
-            <a:off x="365750" y="946404"/>
+          <p:cNvPr id="6" name="TextBox 5"/>
+          <p:cNvSpPr txBox="1"/>
+          <p:nvPr/>
+        </p:nvSpPr>
+        <p:spPr>
+          <a:xfrm>
+            <a:off x="487667" y="1632204"/>
             <a:ext cx="3169840" cy="301752"/>
           </a:xfrm>
           <a:prstGeom prst="rect">
@@ -11364,13 +11101,13 @@
       </p:sp>
       <p:sp>
         <p:nvSpPr>
-          <p:cNvPr id="5" name="Rectangle 4"/>
+          <p:cNvPr id="7" name="Rectangle 6"/>
           <p:cNvSpPr/>
           <p:nvPr/>
         </p:nvSpPr>
         <p:spPr>
           <a:xfrm>
-            <a:off x="3535591" y="891540"/>
+            <a:off x="3657508" y="1577340"/>
             <a:ext cx="4145176" cy="377190"/>
           </a:xfrm>
           <a:prstGeom prst="rect">
@@ -11410,13 +11147,13 @@
       </p:sp>
       <p:sp>
         <p:nvSpPr>
-          <p:cNvPr id="6" name="TextBox 5"/>
-          <p:cNvSpPr txBox="1"/>
-          <p:nvPr/>
-        </p:nvSpPr>
-        <p:spPr>
-          <a:xfrm>
-            <a:off x="3535591" y="946404"/>
+          <p:cNvPr id="8" name="TextBox 7"/>
+          <p:cNvSpPr txBox="1"/>
+          <p:nvPr/>
+        </p:nvSpPr>
+        <p:spPr>
+          <a:xfrm>
+            <a:off x="3657508" y="1632204"/>
             <a:ext cx="4145176" cy="301752"/>
           </a:xfrm>
           <a:prstGeom prst="rect">
@@ -11445,13 +11182,13 @@
       </p:sp>
       <p:sp>
         <p:nvSpPr>
-          <p:cNvPr id="7" name="Rectangle 6"/>
+          <p:cNvPr id="9" name="Rectangle 8"/>
           <p:cNvSpPr/>
           <p:nvPr/>
         </p:nvSpPr>
         <p:spPr>
           <a:xfrm>
-            <a:off x="7680767" y="891540"/>
+            <a:off x="7802684" y="1577340"/>
             <a:ext cx="4145176" cy="377190"/>
           </a:xfrm>
           <a:prstGeom prst="rect">
@@ -11491,13 +11228,13 @@
       </p:sp>
       <p:sp>
         <p:nvSpPr>
-          <p:cNvPr id="8" name="TextBox 7"/>
-          <p:cNvSpPr txBox="1"/>
-          <p:nvPr/>
-        </p:nvSpPr>
-        <p:spPr>
-          <a:xfrm>
-            <a:off x="7680767" y="946404"/>
+          <p:cNvPr id="10" name="TextBox 9"/>
+          <p:cNvSpPr txBox="1"/>
+          <p:nvPr/>
+        </p:nvSpPr>
+        <p:spPr>
+          <a:xfrm>
+            <a:off x="7802684" y="1632204"/>
             <a:ext cx="4145176" cy="301752"/>
           </a:xfrm>
           <a:prstGeom prst="rect">
@@ -11526,13 +11263,13 @@
       </p:sp>
       <p:sp>
         <p:nvSpPr>
-          <p:cNvPr id="9" name="Rectangle 8"/>
+          <p:cNvPr id="11" name="Rectangle 10"/>
           <p:cNvSpPr/>
           <p:nvPr/>
         </p:nvSpPr>
         <p:spPr>
           <a:xfrm>
-            <a:off x="365750" y="1268730"/>
+            <a:off x="487667" y="1954530"/>
             <a:ext cx="3169840" cy="864108"/>
           </a:xfrm>
           <a:prstGeom prst="rect">
@@ -11572,13 +11309,13 @@
       </p:sp>
       <p:sp>
         <p:nvSpPr>
-          <p:cNvPr id="10" name="TextBox 9"/>
-          <p:cNvSpPr txBox="1"/>
-          <p:nvPr/>
-        </p:nvSpPr>
-        <p:spPr>
-          <a:xfrm>
-            <a:off x="365750" y="1296161"/>
+          <p:cNvPr id="12" name="TextBox 11"/>
+          <p:cNvSpPr txBox="1"/>
+          <p:nvPr/>
+        </p:nvSpPr>
+        <p:spPr>
+          <a:xfrm>
+            <a:off x="487667" y="1981962"/>
             <a:ext cx="3169840" cy="809244"/>
           </a:xfrm>
           <a:prstGeom prst="rect">
@@ -11594,7 +11331,7 @@
           <a:p>
             <a:pPr algn="l"/>
             <a:r>
-              <a:rPr sz="750" b="0">
+              <a:rPr sz="800" b="0">
                 <a:solidFill>
                   <a:srgbClr val="1A1A1A"/>
                 </a:solidFill>
@@ -11607,13 +11344,13 @@
       </p:sp>
       <p:sp>
         <p:nvSpPr>
-          <p:cNvPr id="11" name="Rectangle 10"/>
+          <p:cNvPr id="13" name="Rectangle 12"/>
           <p:cNvSpPr/>
           <p:nvPr/>
         </p:nvSpPr>
         <p:spPr>
           <a:xfrm>
-            <a:off x="3535591" y="1268730"/>
+            <a:off x="3657508" y="1954530"/>
             <a:ext cx="4145176" cy="864108"/>
           </a:xfrm>
           <a:prstGeom prst="rect">
@@ -11653,13 +11390,13 @@
       </p:sp>
       <p:sp>
         <p:nvSpPr>
-          <p:cNvPr id="12" name="TextBox 11"/>
-          <p:cNvSpPr txBox="1"/>
-          <p:nvPr/>
-        </p:nvSpPr>
-        <p:spPr>
-          <a:xfrm>
-            <a:off x="3535591" y="1296161"/>
+          <p:cNvPr id="14" name="TextBox 13"/>
+          <p:cNvSpPr txBox="1"/>
+          <p:nvPr/>
+        </p:nvSpPr>
+        <p:spPr>
+          <a:xfrm>
+            <a:off x="3657508" y="1981962"/>
             <a:ext cx="4145176" cy="809244"/>
           </a:xfrm>
           <a:prstGeom prst="rect">
@@ -11675,7 +11412,7 @@
           <a:p>
             <a:pPr algn="l"/>
             <a:r>
-              <a:rPr sz="750" b="0">
+              <a:rPr sz="800" b="0">
                 <a:solidFill>
                   <a:srgbClr val="1A1A1A"/>
                 </a:solidFill>
@@ -11688,13 +11425,13 @@
       </p:sp>
       <p:sp>
         <p:nvSpPr>
-          <p:cNvPr id="13" name="Rectangle 12"/>
+          <p:cNvPr id="15" name="Rectangle 14"/>
           <p:cNvSpPr/>
           <p:nvPr/>
         </p:nvSpPr>
         <p:spPr>
           <a:xfrm>
-            <a:off x="7680767" y="1268730"/>
+            <a:off x="7802684" y="1954530"/>
             <a:ext cx="4145176" cy="864108"/>
           </a:xfrm>
           <a:prstGeom prst="rect">
@@ -11734,13 +11471,13 @@
       </p:sp>
       <p:sp>
         <p:nvSpPr>
-          <p:cNvPr id="14" name="TextBox 13"/>
-          <p:cNvSpPr txBox="1"/>
-          <p:nvPr/>
-        </p:nvSpPr>
-        <p:spPr>
-          <a:xfrm>
-            <a:off x="7680767" y="1296161"/>
+          <p:cNvPr id="16" name="TextBox 15"/>
+          <p:cNvSpPr txBox="1"/>
+          <p:nvPr/>
+        </p:nvSpPr>
+        <p:spPr>
+          <a:xfrm>
+            <a:off x="7802684" y="1981962"/>
             <a:ext cx="4145176" cy="809244"/>
           </a:xfrm>
           <a:prstGeom prst="rect">
@@ -11756,7 +11493,7 @@
           <a:p>
             <a:pPr algn="l"/>
             <a:r>
-              <a:rPr sz="750" b="0">
+              <a:rPr sz="800" b="0">
                 <a:solidFill>
                   <a:srgbClr val="1A1A1A"/>
                 </a:solidFill>
@@ -11769,13 +11506,13 @@
       </p:sp>
       <p:sp>
         <p:nvSpPr>
-          <p:cNvPr id="15" name="Rectangle 14"/>
+          <p:cNvPr id="17" name="Rectangle 16"/>
           <p:cNvSpPr/>
           <p:nvPr/>
         </p:nvSpPr>
         <p:spPr>
           <a:xfrm>
-            <a:off x="365750" y="2132838"/>
+            <a:off x="487667" y="2818638"/>
             <a:ext cx="3169840" cy="864108"/>
           </a:xfrm>
           <a:prstGeom prst="rect">
@@ -11815,13 +11552,13 @@
       </p:sp>
       <p:sp>
         <p:nvSpPr>
-          <p:cNvPr id="16" name="TextBox 15"/>
-          <p:cNvSpPr txBox="1"/>
-          <p:nvPr/>
-        </p:nvSpPr>
-        <p:spPr>
-          <a:xfrm>
-            <a:off x="365750" y="2160270"/>
+          <p:cNvPr id="18" name="TextBox 17"/>
+          <p:cNvSpPr txBox="1"/>
+          <p:nvPr/>
+        </p:nvSpPr>
+        <p:spPr>
+          <a:xfrm>
+            <a:off x="487667" y="2846070"/>
             <a:ext cx="3169840" cy="809244"/>
           </a:xfrm>
           <a:prstGeom prst="rect">
@@ -11837,7 +11574,7 @@
           <a:p>
             <a:pPr algn="l"/>
             <a:r>
-              <a:rPr sz="750" b="0">
+              <a:rPr sz="800" b="0">
                 <a:solidFill>
                   <a:srgbClr val="1A1A1A"/>
                 </a:solidFill>
@@ -11850,13 +11587,13 @@
       </p:sp>
       <p:sp>
         <p:nvSpPr>
-          <p:cNvPr id="17" name="Rectangle 16"/>
+          <p:cNvPr id="19" name="Rectangle 18"/>
           <p:cNvSpPr/>
           <p:nvPr/>
         </p:nvSpPr>
         <p:spPr>
           <a:xfrm>
-            <a:off x="3535591" y="2132838"/>
+            <a:off x="3657508" y="2818638"/>
             <a:ext cx="4145176" cy="864108"/>
           </a:xfrm>
           <a:prstGeom prst="rect">
@@ -11896,13 +11633,13 @@
       </p:sp>
       <p:sp>
         <p:nvSpPr>
-          <p:cNvPr id="18" name="TextBox 17"/>
-          <p:cNvSpPr txBox="1"/>
-          <p:nvPr/>
-        </p:nvSpPr>
-        <p:spPr>
-          <a:xfrm>
-            <a:off x="3535591" y="2160270"/>
+          <p:cNvPr id="20" name="TextBox 19"/>
+          <p:cNvSpPr txBox="1"/>
+          <p:nvPr/>
+        </p:nvSpPr>
+        <p:spPr>
+          <a:xfrm>
+            <a:off x="3657508" y="2846070"/>
             <a:ext cx="4145176" cy="809244"/>
           </a:xfrm>
           <a:prstGeom prst="rect">
@@ -11918,7 +11655,7 @@
           <a:p>
             <a:pPr algn="l"/>
             <a:r>
-              <a:rPr sz="750" b="0">
+              <a:rPr sz="800" b="0">
                 <a:solidFill>
                   <a:srgbClr val="1A1A1A"/>
                 </a:solidFill>
@@ -11931,13 +11668,13 @@
       </p:sp>
       <p:sp>
         <p:nvSpPr>
-          <p:cNvPr id="19" name="Rectangle 18"/>
+          <p:cNvPr id="21" name="Rectangle 20"/>
           <p:cNvSpPr/>
           <p:nvPr/>
         </p:nvSpPr>
         <p:spPr>
           <a:xfrm>
-            <a:off x="7680767" y="2132838"/>
+            <a:off x="7802684" y="2818638"/>
             <a:ext cx="4145176" cy="864108"/>
           </a:xfrm>
           <a:prstGeom prst="rect">
@@ -11977,13 +11714,13 @@
       </p:sp>
       <p:sp>
         <p:nvSpPr>
-          <p:cNvPr id="20" name="TextBox 19"/>
-          <p:cNvSpPr txBox="1"/>
-          <p:nvPr/>
-        </p:nvSpPr>
-        <p:spPr>
-          <a:xfrm>
-            <a:off x="7680767" y="2160270"/>
+          <p:cNvPr id="22" name="TextBox 21"/>
+          <p:cNvSpPr txBox="1"/>
+          <p:nvPr/>
+        </p:nvSpPr>
+        <p:spPr>
+          <a:xfrm>
+            <a:off x="7802684" y="2846070"/>
             <a:ext cx="4145176" cy="809244"/>
           </a:xfrm>
           <a:prstGeom prst="rect">
@@ -11999,7 +11736,7 @@
           <a:p>
             <a:pPr algn="l"/>
             <a:r>
-              <a:rPr sz="750" b="0">
+              <a:rPr sz="800" b="0">
                 <a:solidFill>
                   <a:srgbClr val="1A1A1A"/>
                 </a:solidFill>
@@ -12012,13 +11749,13 @@
       </p:sp>
       <p:sp>
         <p:nvSpPr>
-          <p:cNvPr id="21" name="Rectangle 20"/>
+          <p:cNvPr id="23" name="Rectangle 22"/>
           <p:cNvSpPr/>
           <p:nvPr/>
         </p:nvSpPr>
         <p:spPr>
           <a:xfrm>
-            <a:off x="365750" y="2996946"/>
+            <a:off x="487667" y="3682746"/>
             <a:ext cx="3169840" cy="699516"/>
           </a:xfrm>
           <a:prstGeom prst="rect">
@@ -12058,13 +11795,13 @@
       </p:sp>
       <p:sp>
         <p:nvSpPr>
-          <p:cNvPr id="22" name="TextBox 21"/>
-          <p:cNvSpPr txBox="1"/>
-          <p:nvPr/>
-        </p:nvSpPr>
-        <p:spPr>
-          <a:xfrm>
-            <a:off x="365750" y="3024378"/>
+          <p:cNvPr id="24" name="TextBox 23"/>
+          <p:cNvSpPr txBox="1"/>
+          <p:nvPr/>
+        </p:nvSpPr>
+        <p:spPr>
+          <a:xfrm>
+            <a:off x="487667" y="3710178"/>
             <a:ext cx="3169840" cy="644651"/>
           </a:xfrm>
           <a:prstGeom prst="rect">
@@ -12080,7 +11817,7 @@
           <a:p>
             <a:pPr algn="l"/>
             <a:r>
-              <a:rPr sz="750" b="0">
+              <a:rPr sz="800" b="0">
                 <a:solidFill>
                   <a:srgbClr val="1A1A1A"/>
                 </a:solidFill>
@@ -12093,13 +11830,13 @@
       </p:sp>
       <p:sp>
         <p:nvSpPr>
-          <p:cNvPr id="23" name="Rectangle 22"/>
+          <p:cNvPr id="25" name="Rectangle 24"/>
           <p:cNvSpPr/>
           <p:nvPr/>
         </p:nvSpPr>
         <p:spPr>
           <a:xfrm>
-            <a:off x="3535591" y="2996946"/>
+            <a:off x="3657508" y="3682746"/>
             <a:ext cx="4145176" cy="699516"/>
           </a:xfrm>
           <a:prstGeom prst="rect">
@@ -12139,13 +11876,13 @@
       </p:sp>
       <p:sp>
         <p:nvSpPr>
-          <p:cNvPr id="24" name="TextBox 23"/>
-          <p:cNvSpPr txBox="1"/>
-          <p:nvPr/>
-        </p:nvSpPr>
-        <p:spPr>
-          <a:xfrm>
-            <a:off x="3535591" y="3024378"/>
+          <p:cNvPr id="26" name="TextBox 25"/>
+          <p:cNvSpPr txBox="1"/>
+          <p:nvPr/>
+        </p:nvSpPr>
+        <p:spPr>
+          <a:xfrm>
+            <a:off x="3657508" y="3710178"/>
             <a:ext cx="4145176" cy="644651"/>
           </a:xfrm>
           <a:prstGeom prst="rect">
@@ -12161,7 +11898,7 @@
           <a:p>
             <a:pPr algn="l"/>
             <a:r>
-              <a:rPr sz="750" b="0">
+              <a:rPr sz="800" b="0">
                 <a:solidFill>
                   <a:srgbClr val="1A1A1A"/>
                 </a:solidFill>
@@ -12174,13 +11911,13 @@
       </p:sp>
       <p:sp>
         <p:nvSpPr>
-          <p:cNvPr id="25" name="Rectangle 24"/>
+          <p:cNvPr id="27" name="Rectangle 26"/>
           <p:cNvSpPr/>
           <p:nvPr/>
         </p:nvSpPr>
         <p:spPr>
           <a:xfrm>
-            <a:off x="7680767" y="2996946"/>
+            <a:off x="7802684" y="3682746"/>
             <a:ext cx="4145176" cy="699516"/>
           </a:xfrm>
           <a:prstGeom prst="rect">
@@ -12220,13 +11957,13 @@
       </p:sp>
       <p:sp>
         <p:nvSpPr>
-          <p:cNvPr id="26" name="TextBox 25"/>
-          <p:cNvSpPr txBox="1"/>
-          <p:nvPr/>
-        </p:nvSpPr>
-        <p:spPr>
-          <a:xfrm>
-            <a:off x="7680767" y="3024378"/>
+          <p:cNvPr id="28" name="TextBox 27"/>
+          <p:cNvSpPr txBox="1"/>
+          <p:nvPr/>
+        </p:nvSpPr>
+        <p:spPr>
+          <a:xfrm>
+            <a:off x="7802684" y="3710178"/>
             <a:ext cx="4145176" cy="644651"/>
           </a:xfrm>
           <a:prstGeom prst="rect">
@@ -12242,7 +11979,7 @@
           <a:p>
             <a:pPr algn="l"/>
             <a:r>
-              <a:rPr sz="750" b="0">
+              <a:rPr sz="800" b="0">
                 <a:solidFill>
                   <a:srgbClr val="1A1A1A"/>
                 </a:solidFill>
@@ -12255,13 +11992,13 @@
       </p:sp>
       <p:sp>
         <p:nvSpPr>
-          <p:cNvPr id="27" name="Rectangle 26"/>
+          <p:cNvPr id="29" name="Rectangle 28"/>
           <p:cNvSpPr/>
           <p:nvPr/>
         </p:nvSpPr>
         <p:spPr>
           <a:xfrm>
-            <a:off x="365750" y="3696462"/>
+            <a:off x="487667" y="4382262"/>
             <a:ext cx="3169840" cy="534924"/>
           </a:xfrm>
           <a:prstGeom prst="rect">
@@ -12301,13 +12038,13 @@
       </p:sp>
       <p:sp>
         <p:nvSpPr>
-          <p:cNvPr id="28" name="TextBox 27"/>
-          <p:cNvSpPr txBox="1"/>
-          <p:nvPr/>
-        </p:nvSpPr>
-        <p:spPr>
-          <a:xfrm>
-            <a:off x="365750" y="3723894"/>
+          <p:cNvPr id="30" name="TextBox 29"/>
+          <p:cNvSpPr txBox="1"/>
+          <p:nvPr/>
+        </p:nvSpPr>
+        <p:spPr>
+          <a:xfrm>
+            <a:off x="487667" y="4409694"/>
             <a:ext cx="3169840" cy="480060"/>
           </a:xfrm>
           <a:prstGeom prst="rect">
@@ -12323,7 +12060,7 @@
           <a:p>
             <a:pPr algn="l"/>
             <a:r>
-              <a:rPr sz="750" b="0">
+              <a:rPr sz="800" b="0">
                 <a:solidFill>
                   <a:srgbClr val="1A1A1A"/>
                 </a:solidFill>
@@ -12336,13 +12073,13 @@
       </p:sp>
       <p:sp>
         <p:nvSpPr>
-          <p:cNvPr id="29" name="Rectangle 28"/>
+          <p:cNvPr id="31" name="Rectangle 30"/>
           <p:cNvSpPr/>
           <p:nvPr/>
         </p:nvSpPr>
         <p:spPr>
           <a:xfrm>
-            <a:off x="3535591" y="3696462"/>
+            <a:off x="3657508" y="4382262"/>
             <a:ext cx="4145176" cy="534924"/>
           </a:xfrm>
           <a:prstGeom prst="rect">
@@ -12382,13 +12119,13 @@
       </p:sp>
       <p:sp>
         <p:nvSpPr>
-          <p:cNvPr id="30" name="TextBox 29"/>
-          <p:cNvSpPr txBox="1"/>
-          <p:nvPr/>
-        </p:nvSpPr>
-        <p:spPr>
-          <a:xfrm>
-            <a:off x="3535591" y="3723894"/>
+          <p:cNvPr id="32" name="TextBox 31"/>
+          <p:cNvSpPr txBox="1"/>
+          <p:nvPr/>
+        </p:nvSpPr>
+        <p:spPr>
+          <a:xfrm>
+            <a:off x="3657508" y="4409694"/>
             <a:ext cx="4145176" cy="480060"/>
           </a:xfrm>
           <a:prstGeom prst="rect">
@@ -12404,7 +12141,7 @@
           <a:p>
             <a:pPr algn="l"/>
             <a:r>
-              <a:rPr sz="750" b="0">
+              <a:rPr sz="800" b="0">
                 <a:solidFill>
                   <a:srgbClr val="1A1A1A"/>
                 </a:solidFill>
@@ -12417,13 +12154,13 @@
       </p:sp>
       <p:sp>
         <p:nvSpPr>
-          <p:cNvPr id="31" name="Rectangle 30"/>
+          <p:cNvPr id="33" name="Rectangle 32"/>
           <p:cNvSpPr/>
           <p:nvPr/>
         </p:nvSpPr>
         <p:spPr>
           <a:xfrm>
-            <a:off x="7680767" y="3696462"/>
+            <a:off x="7802684" y="4382262"/>
             <a:ext cx="4145176" cy="534924"/>
           </a:xfrm>
           <a:prstGeom prst="rect">
@@ -12463,13 +12200,13 @@
       </p:sp>
       <p:sp>
         <p:nvSpPr>
-          <p:cNvPr id="32" name="TextBox 31"/>
-          <p:cNvSpPr txBox="1"/>
-          <p:nvPr/>
-        </p:nvSpPr>
-        <p:spPr>
-          <a:xfrm>
-            <a:off x="7680767" y="3723894"/>
+          <p:cNvPr id="34" name="TextBox 33"/>
+          <p:cNvSpPr txBox="1"/>
+          <p:nvPr/>
+        </p:nvSpPr>
+        <p:spPr>
+          <a:xfrm>
+            <a:off x="7802684" y="4409694"/>
             <a:ext cx="4145176" cy="480060"/>
           </a:xfrm>
           <a:prstGeom prst="rect">
@@ -12485,7 +12222,7 @@
           <a:p>
             <a:pPr algn="l"/>
             <a:r>
-              <a:rPr sz="750" b="0">
+              <a:rPr sz="800" b="0">
                 <a:solidFill>
                   <a:srgbClr val="1A1A1A"/>
                 </a:solidFill>
@@ -12498,7 +12235,7 @@
       </p:sp>
       <p:sp>
         <p:nvSpPr>
-          <p:cNvPr id="33" name="TextBox 32"/>
+          <p:cNvPr id="35" name="TextBox 34"/>
           <p:cNvSpPr txBox="1"/>
           <p:nvPr/>
         </p:nvSpPr>
@@ -12533,7 +12270,7 @@
       </p:sp>
       <p:sp>
         <p:nvSpPr>
-          <p:cNvPr id="34" name="TextBox 33"/>
+          <p:cNvPr id="36" name="TextBox 35"/>
           <p:cNvSpPr txBox="1"/>
           <p:nvPr/>
         </p:nvSpPr>
@@ -12592,42 +12329,77 @@
         </p:nvSpPr>
         <p:spPr>
           <a:xfrm>
-            <a:off x="365750" y="274320"/>
-            <a:ext cx="10972525" cy="480060"/>
-          </a:xfrm>
-          <a:prstGeom prst="rect">
-            <a:avLst/>
-          </a:prstGeom>
-          <a:noFill/>
-        </p:spPr>
-        <p:txBody>
-          <a:bodyPr wrap="square" lIns="36000" rIns="36000" tIns="18000" bIns="18000">
-            <a:spAutoFit/>
-          </a:bodyPr>
-          <a:lstStyle/>
-          <a:p>
-            <a:pPr algn="l"/>
-            <a:r>
-              <a:rPr sz="1700" b="1">
+            <a:off x="487667" y="137160"/>
+            <a:ext cx="7315017" cy="274320"/>
+          </a:xfrm>
+          <a:prstGeom prst="rect">
+            <a:avLst/>
+          </a:prstGeom>
+          <a:noFill/>
+        </p:spPr>
+        <p:txBody>
+          <a:bodyPr wrap="square" lIns="36000" rIns="36000" tIns="18000" bIns="18000">
+            <a:spAutoFit/>
+          </a:bodyPr>
+          <a:lstStyle/>
+          <a:p>
+            <a:pPr algn="l"/>
+            <a:r>
+              <a:rPr sz="900" b="0">
+                <a:solidFill>
+                  <a:srgbClr val="767676"/>
+                </a:solidFill>
+                <a:latin typeface="Pretendard"/>
+              </a:rPr>
+              <a:t>UX전략보고서</a:t>
+            </a:r>
+          </a:p>
+        </p:txBody>
+      </p:sp>
+      <p:sp>
+        <p:nvSpPr>
+          <p:cNvPr id="3" name="TextBox 2"/>
+          <p:cNvSpPr txBox="1"/>
+          <p:nvPr/>
+        </p:nvSpPr>
+        <p:spPr>
+          <a:xfrm>
+            <a:off x="487667" y="548640"/>
+            <a:ext cx="11216359" cy="548640"/>
+          </a:xfrm>
+          <a:prstGeom prst="rect">
+            <a:avLst/>
+          </a:prstGeom>
+          <a:noFill/>
+        </p:spPr>
+        <p:txBody>
+          <a:bodyPr wrap="square" lIns="36000" rIns="36000" tIns="18000" bIns="18000">
+            <a:spAutoFit/>
+          </a:bodyPr>
+          <a:lstStyle/>
+          <a:p>
+            <a:pPr algn="l"/>
+            <a:r>
+              <a:rPr sz="2400" b="1">
                 <a:solidFill>
                   <a:srgbClr val="1A1A1A"/>
                 </a:solidFill>
                 <a:latin typeface="Pretendard"/>
               </a:rPr>
-              <a:t>3. UX 전략 방향 (비전)</a:t>
-            </a:r>
-          </a:p>
-        </p:txBody>
-      </p:sp>
-      <p:sp>
-        <p:nvSpPr>
-          <p:cNvPr id="3" name="Rectangle 2"/>
+              <a:t>UX 전략 방향 (비전)</a:t>
+            </a:r>
+          </a:p>
+        </p:txBody>
+      </p:sp>
+      <p:sp>
+        <p:nvSpPr>
+          <p:cNvPr id="4" name="Rectangle 3"/>
           <p:cNvSpPr/>
           <p:nvPr/>
         </p:nvSpPr>
         <p:spPr>
           <a:xfrm>
-            <a:off x="365750" y="891540"/>
+            <a:off x="487667" y="1234440"/>
             <a:ext cx="3169840" cy="377190"/>
           </a:xfrm>
           <a:prstGeom prst="rect">
@@ -12667,13 +12439,13 @@
       </p:sp>
       <p:sp>
         <p:nvSpPr>
-          <p:cNvPr id="4" name="TextBox 3"/>
-          <p:cNvSpPr txBox="1"/>
-          <p:nvPr/>
-        </p:nvSpPr>
-        <p:spPr>
-          <a:xfrm>
-            <a:off x="365750" y="946404"/>
+          <p:cNvPr id="5" name="TextBox 4"/>
+          <p:cNvSpPr txBox="1"/>
+          <p:nvPr/>
+        </p:nvSpPr>
+        <p:spPr>
+          <a:xfrm>
+            <a:off x="487667" y="1289304"/>
             <a:ext cx="3169840" cy="301752"/>
           </a:xfrm>
           <a:prstGeom prst="rect">
@@ -12702,13 +12474,13 @@
       </p:sp>
       <p:sp>
         <p:nvSpPr>
-          <p:cNvPr id="5" name="Rectangle 4"/>
+          <p:cNvPr id="6" name="Rectangle 5"/>
           <p:cNvSpPr/>
           <p:nvPr/>
         </p:nvSpPr>
         <p:spPr>
           <a:xfrm>
-            <a:off x="3535591" y="891540"/>
+            <a:off x="3657508" y="1234440"/>
             <a:ext cx="4145176" cy="377190"/>
           </a:xfrm>
           <a:prstGeom prst="rect">
@@ -12748,13 +12520,13 @@
       </p:sp>
       <p:sp>
         <p:nvSpPr>
-          <p:cNvPr id="6" name="TextBox 5"/>
-          <p:cNvSpPr txBox="1"/>
-          <p:nvPr/>
-        </p:nvSpPr>
-        <p:spPr>
-          <a:xfrm>
-            <a:off x="3535591" y="946404"/>
+          <p:cNvPr id="7" name="TextBox 6"/>
+          <p:cNvSpPr txBox="1"/>
+          <p:nvPr/>
+        </p:nvSpPr>
+        <p:spPr>
+          <a:xfrm>
+            <a:off x="3657508" y="1289304"/>
             <a:ext cx="4145176" cy="301752"/>
           </a:xfrm>
           <a:prstGeom prst="rect">
@@ -12783,13 +12555,13 @@
       </p:sp>
       <p:sp>
         <p:nvSpPr>
-          <p:cNvPr id="7" name="Rectangle 6"/>
+          <p:cNvPr id="8" name="Rectangle 7"/>
           <p:cNvSpPr/>
           <p:nvPr/>
         </p:nvSpPr>
         <p:spPr>
           <a:xfrm>
-            <a:off x="7680767" y="891540"/>
+            <a:off x="7802684" y="1234440"/>
             <a:ext cx="4145176" cy="377190"/>
           </a:xfrm>
           <a:prstGeom prst="rect">
@@ -12829,13 +12601,13 @@
       </p:sp>
       <p:sp>
         <p:nvSpPr>
-          <p:cNvPr id="8" name="TextBox 7"/>
-          <p:cNvSpPr txBox="1"/>
-          <p:nvPr/>
-        </p:nvSpPr>
-        <p:spPr>
-          <a:xfrm>
-            <a:off x="7680767" y="946404"/>
+          <p:cNvPr id="9" name="TextBox 8"/>
+          <p:cNvSpPr txBox="1"/>
+          <p:nvPr/>
+        </p:nvSpPr>
+        <p:spPr>
+          <a:xfrm>
+            <a:off x="7802684" y="1289304"/>
             <a:ext cx="4145176" cy="301752"/>
           </a:xfrm>
           <a:prstGeom prst="rect">
@@ -12864,13 +12636,13 @@
       </p:sp>
       <p:sp>
         <p:nvSpPr>
-          <p:cNvPr id="9" name="Rectangle 8"/>
+          <p:cNvPr id="10" name="Rectangle 9"/>
           <p:cNvSpPr/>
           <p:nvPr/>
         </p:nvSpPr>
         <p:spPr>
           <a:xfrm>
-            <a:off x="365750" y="1268730"/>
+            <a:off x="487667" y="1611630"/>
             <a:ext cx="3169840" cy="534924"/>
           </a:xfrm>
           <a:prstGeom prst="rect">
@@ -12910,13 +12682,13 @@
       </p:sp>
       <p:sp>
         <p:nvSpPr>
-          <p:cNvPr id="10" name="TextBox 9"/>
-          <p:cNvSpPr txBox="1"/>
-          <p:nvPr/>
-        </p:nvSpPr>
-        <p:spPr>
-          <a:xfrm>
-            <a:off x="365750" y="1296161"/>
+          <p:cNvPr id="11" name="TextBox 10"/>
+          <p:cNvSpPr txBox="1"/>
+          <p:nvPr/>
+        </p:nvSpPr>
+        <p:spPr>
+          <a:xfrm>
+            <a:off x="487667" y="1639062"/>
             <a:ext cx="3169840" cy="480060"/>
           </a:xfrm>
           <a:prstGeom prst="rect">
@@ -12932,7 +12704,7 @@
           <a:p>
             <a:pPr algn="l"/>
             <a:r>
-              <a:rPr sz="750" b="0">
+              <a:rPr sz="800" b="0">
                 <a:solidFill>
                   <a:srgbClr val="1A1A1A"/>
                 </a:solidFill>
@@ -12945,13 +12717,13 @@
       </p:sp>
       <p:sp>
         <p:nvSpPr>
-          <p:cNvPr id="11" name="Rectangle 10"/>
+          <p:cNvPr id="12" name="Rectangle 11"/>
           <p:cNvSpPr/>
           <p:nvPr/>
         </p:nvSpPr>
         <p:spPr>
           <a:xfrm>
-            <a:off x="3535591" y="1268730"/>
+            <a:off x="3657508" y="1611630"/>
             <a:ext cx="4145176" cy="534924"/>
           </a:xfrm>
           <a:prstGeom prst="rect">
@@ -12991,13 +12763,13 @@
       </p:sp>
       <p:sp>
         <p:nvSpPr>
-          <p:cNvPr id="12" name="TextBox 11"/>
-          <p:cNvSpPr txBox="1"/>
-          <p:nvPr/>
-        </p:nvSpPr>
-        <p:spPr>
-          <a:xfrm>
-            <a:off x="3535591" y="1296161"/>
+          <p:cNvPr id="13" name="TextBox 12"/>
+          <p:cNvSpPr txBox="1"/>
+          <p:nvPr/>
+        </p:nvSpPr>
+        <p:spPr>
+          <a:xfrm>
+            <a:off x="3657508" y="1639062"/>
             <a:ext cx="4145176" cy="480060"/>
           </a:xfrm>
           <a:prstGeom prst="rect">
@@ -13013,7 +12785,7 @@
           <a:p>
             <a:pPr algn="l"/>
             <a:r>
-              <a:rPr sz="750" b="0">
+              <a:rPr sz="800" b="0">
                 <a:solidFill>
                   <a:srgbClr val="1A1A1A"/>
                 </a:solidFill>
@@ -13026,13 +12798,13 @@
       </p:sp>
       <p:sp>
         <p:nvSpPr>
-          <p:cNvPr id="13" name="Rectangle 12"/>
+          <p:cNvPr id="14" name="Rectangle 13"/>
           <p:cNvSpPr/>
           <p:nvPr/>
         </p:nvSpPr>
         <p:spPr>
           <a:xfrm>
-            <a:off x="7680767" y="1268730"/>
+            <a:off x="7802684" y="1611630"/>
             <a:ext cx="4145176" cy="534924"/>
           </a:xfrm>
           <a:prstGeom prst="rect">
@@ -13072,13 +12844,13 @@
       </p:sp>
       <p:sp>
         <p:nvSpPr>
-          <p:cNvPr id="14" name="TextBox 13"/>
-          <p:cNvSpPr txBox="1"/>
-          <p:nvPr/>
-        </p:nvSpPr>
-        <p:spPr>
-          <a:xfrm>
-            <a:off x="7680767" y="1296161"/>
+          <p:cNvPr id="15" name="TextBox 14"/>
+          <p:cNvSpPr txBox="1"/>
+          <p:nvPr/>
+        </p:nvSpPr>
+        <p:spPr>
+          <a:xfrm>
+            <a:off x="7802684" y="1639062"/>
             <a:ext cx="4145176" cy="480060"/>
           </a:xfrm>
           <a:prstGeom prst="rect">
@@ -13094,7 +12866,7 @@
           <a:p>
             <a:pPr algn="l"/>
             <a:r>
-              <a:rPr sz="750" b="0">
+              <a:rPr sz="800" b="0">
                 <a:solidFill>
                   <a:srgbClr val="1A1A1A"/>
                 </a:solidFill>
@@ -13107,13 +12879,13 @@
       </p:sp>
       <p:sp>
         <p:nvSpPr>
-          <p:cNvPr id="15" name="Rectangle 14"/>
+          <p:cNvPr id="16" name="Rectangle 15"/>
           <p:cNvSpPr/>
           <p:nvPr/>
         </p:nvSpPr>
         <p:spPr>
           <a:xfrm>
-            <a:off x="365750" y="1803654"/>
+            <a:off x="487667" y="2146554"/>
             <a:ext cx="3169840" cy="534924"/>
           </a:xfrm>
           <a:prstGeom prst="rect">
@@ -13153,13 +12925,13 @@
       </p:sp>
       <p:sp>
         <p:nvSpPr>
-          <p:cNvPr id="16" name="TextBox 15"/>
-          <p:cNvSpPr txBox="1"/>
-          <p:nvPr/>
-        </p:nvSpPr>
-        <p:spPr>
-          <a:xfrm>
-            <a:off x="365750" y="1831086"/>
+          <p:cNvPr id="17" name="TextBox 16"/>
+          <p:cNvSpPr txBox="1"/>
+          <p:nvPr/>
+        </p:nvSpPr>
+        <p:spPr>
+          <a:xfrm>
+            <a:off x="487667" y="2173986"/>
             <a:ext cx="3169840" cy="480060"/>
           </a:xfrm>
           <a:prstGeom prst="rect">
@@ -13175,7 +12947,7 @@
           <a:p>
             <a:pPr algn="l"/>
             <a:r>
-              <a:rPr sz="750" b="0">
+              <a:rPr sz="800" b="0">
                 <a:solidFill>
                   <a:srgbClr val="1A1A1A"/>
                 </a:solidFill>
@@ -13188,13 +12960,13 @@
       </p:sp>
       <p:sp>
         <p:nvSpPr>
-          <p:cNvPr id="17" name="Rectangle 16"/>
+          <p:cNvPr id="18" name="Rectangle 17"/>
           <p:cNvSpPr/>
           <p:nvPr/>
         </p:nvSpPr>
         <p:spPr>
           <a:xfrm>
-            <a:off x="3535591" y="1803654"/>
+            <a:off x="3657508" y="2146554"/>
             <a:ext cx="4145176" cy="534924"/>
           </a:xfrm>
           <a:prstGeom prst="rect">
@@ -13234,13 +13006,13 @@
       </p:sp>
       <p:sp>
         <p:nvSpPr>
-          <p:cNvPr id="18" name="TextBox 17"/>
-          <p:cNvSpPr txBox="1"/>
-          <p:nvPr/>
-        </p:nvSpPr>
-        <p:spPr>
-          <a:xfrm>
-            <a:off x="3535591" y="1831086"/>
+          <p:cNvPr id="19" name="TextBox 18"/>
+          <p:cNvSpPr txBox="1"/>
+          <p:nvPr/>
+        </p:nvSpPr>
+        <p:spPr>
+          <a:xfrm>
+            <a:off x="3657508" y="2173986"/>
             <a:ext cx="4145176" cy="480060"/>
           </a:xfrm>
           <a:prstGeom prst="rect">
@@ -13256,7 +13028,7 @@
           <a:p>
             <a:pPr algn="l"/>
             <a:r>
-              <a:rPr sz="750" b="0">
+              <a:rPr sz="800" b="0">
                 <a:solidFill>
                   <a:srgbClr val="1A1A1A"/>
                 </a:solidFill>
@@ -13269,13 +13041,13 @@
       </p:sp>
       <p:sp>
         <p:nvSpPr>
-          <p:cNvPr id="19" name="Rectangle 18"/>
+          <p:cNvPr id="20" name="Rectangle 19"/>
           <p:cNvSpPr/>
           <p:nvPr/>
         </p:nvSpPr>
         <p:spPr>
           <a:xfrm>
-            <a:off x="7680767" y="1803654"/>
+            <a:off x="7802684" y="2146554"/>
             <a:ext cx="4145176" cy="534924"/>
           </a:xfrm>
           <a:prstGeom prst="rect">
@@ -13315,13 +13087,13 @@
       </p:sp>
       <p:sp>
         <p:nvSpPr>
-          <p:cNvPr id="20" name="TextBox 19"/>
-          <p:cNvSpPr txBox="1"/>
-          <p:nvPr/>
-        </p:nvSpPr>
-        <p:spPr>
-          <a:xfrm>
-            <a:off x="7680767" y="1831086"/>
+          <p:cNvPr id="21" name="TextBox 20"/>
+          <p:cNvSpPr txBox="1"/>
+          <p:nvPr/>
+        </p:nvSpPr>
+        <p:spPr>
+          <a:xfrm>
+            <a:off x="7802684" y="2173986"/>
             <a:ext cx="4145176" cy="480060"/>
           </a:xfrm>
           <a:prstGeom prst="rect">
@@ -13337,7 +13109,7 @@
           <a:p>
             <a:pPr algn="l"/>
             <a:r>
-              <a:rPr sz="750" b="0">
+              <a:rPr sz="800" b="0">
                 <a:solidFill>
                   <a:srgbClr val="1A1A1A"/>
                 </a:solidFill>
@@ -13350,7 +13122,7 @@
       </p:sp>
       <p:sp>
         <p:nvSpPr>
-          <p:cNvPr id="21" name="TextBox 20"/>
+          <p:cNvPr id="22" name="TextBox 21"/>
           <p:cNvSpPr txBox="1"/>
           <p:nvPr/>
         </p:nvSpPr>
@@ -13385,7 +13157,7 @@
       </p:sp>
       <p:sp>
         <p:nvSpPr>
-          <p:cNvPr id="22" name="TextBox 21"/>
+          <p:cNvPr id="23" name="TextBox 22"/>
           <p:cNvSpPr txBox="1"/>
           <p:nvPr/>
         </p:nvSpPr>
@@ -13444,42 +13216,112 @@
         </p:nvSpPr>
         <p:spPr>
           <a:xfrm>
-            <a:off x="365750" y="274320"/>
-            <a:ext cx="10972525" cy="480060"/>
-          </a:xfrm>
-          <a:prstGeom prst="rect">
-            <a:avLst/>
-          </a:prstGeom>
-          <a:noFill/>
-        </p:spPr>
-        <p:txBody>
-          <a:bodyPr wrap="square" lIns="36000" rIns="36000" tIns="18000" bIns="18000">
-            <a:spAutoFit/>
-          </a:bodyPr>
-          <a:lstStyle/>
-          <a:p>
-            <a:pPr algn="l"/>
-            <a:r>
-              <a:rPr sz="1700" b="1">
+            <a:off x="487667" y="137160"/>
+            <a:ext cx="7315017" cy="274320"/>
+          </a:xfrm>
+          <a:prstGeom prst="rect">
+            <a:avLst/>
+          </a:prstGeom>
+          <a:noFill/>
+        </p:spPr>
+        <p:txBody>
+          <a:bodyPr wrap="square" lIns="36000" rIns="36000" tIns="18000" bIns="18000">
+            <a:spAutoFit/>
+          </a:bodyPr>
+          <a:lstStyle/>
+          <a:p>
+            <a:pPr algn="l"/>
+            <a:r>
+              <a:rPr sz="900" b="0">
+                <a:solidFill>
+                  <a:srgbClr val="767676"/>
+                </a:solidFill>
+                <a:latin typeface="Pretendard"/>
+              </a:rPr>
+              <a:t>UX전략보고서</a:t>
+            </a:r>
+          </a:p>
+        </p:txBody>
+      </p:sp>
+      <p:sp>
+        <p:nvSpPr>
+          <p:cNvPr id="3" name="TextBox 2"/>
+          <p:cNvSpPr txBox="1"/>
+          <p:nvPr/>
+        </p:nvSpPr>
+        <p:spPr>
+          <a:xfrm>
+            <a:off x="487667" y="548640"/>
+            <a:ext cx="11216359" cy="548640"/>
+          </a:xfrm>
+          <a:prstGeom prst="rect">
+            <a:avLst/>
+          </a:prstGeom>
+          <a:noFill/>
+        </p:spPr>
+        <p:txBody>
+          <a:bodyPr wrap="square" lIns="36000" rIns="36000" tIns="18000" bIns="18000">
+            <a:spAutoFit/>
+          </a:bodyPr>
+          <a:lstStyle/>
+          <a:p>
+            <a:pPr algn="l"/>
+            <a:r>
+              <a:rPr sz="2400" b="1">
                 <a:solidFill>
                   <a:srgbClr val="1A1A1A"/>
                 </a:solidFill>
                 <a:latin typeface="Pretendard"/>
               </a:rPr>
-              <a:t>4. 개선방향·컨셉 — 문제 → 방향 → 기대효과</a:t>
-            </a:r>
-          </a:p>
-        </p:txBody>
-      </p:sp>
-      <p:sp>
-        <p:nvSpPr>
-          <p:cNvPr id="3" name="Rectangle 2"/>
+              <a:t>개선방향·컨셉</a:t>
+            </a:r>
+          </a:p>
+        </p:txBody>
+      </p:sp>
+      <p:sp>
+        <p:nvSpPr>
+          <p:cNvPr id="4" name="TextBox 3"/>
+          <p:cNvSpPr txBox="1"/>
+          <p:nvPr/>
+        </p:nvSpPr>
+        <p:spPr>
+          <a:xfrm>
+            <a:off x="487667" y="1097280"/>
+            <a:ext cx="11216359" cy="377190"/>
+          </a:xfrm>
+          <a:prstGeom prst="rect">
+            <a:avLst/>
+          </a:prstGeom>
+          <a:noFill/>
+        </p:spPr>
+        <p:txBody>
+          <a:bodyPr wrap="square" lIns="36000" rIns="36000" tIns="18000" bIns="18000">
+            <a:spAutoFit/>
+          </a:bodyPr>
+          <a:lstStyle/>
+          <a:p>
+            <a:pPr algn="l"/>
+            <a:r>
+              <a:rPr sz="1200" b="0">
+                <a:solidFill>
+                  <a:srgbClr val="767676"/>
+                </a:solidFill>
+                <a:latin typeface="Pretendard"/>
+              </a:rPr>
+              <a:t>문제 → 방향 → 기대효과</a:t>
+            </a:r>
+          </a:p>
+        </p:txBody>
+      </p:sp>
+      <p:sp>
+        <p:nvSpPr>
+          <p:cNvPr id="5" name="Rectangle 4"/>
           <p:cNvSpPr/>
           <p:nvPr/>
         </p:nvSpPr>
         <p:spPr>
           <a:xfrm>
-            <a:off x="365750" y="891540"/>
+            <a:off x="487667" y="1577340"/>
             <a:ext cx="3169840" cy="377190"/>
           </a:xfrm>
           <a:prstGeom prst="rect">
@@ -13519,13 +13361,13 @@
       </p:sp>
       <p:sp>
         <p:nvSpPr>
-          <p:cNvPr id="4" name="TextBox 3"/>
-          <p:cNvSpPr txBox="1"/>
-          <p:nvPr/>
-        </p:nvSpPr>
-        <p:spPr>
-          <a:xfrm>
-            <a:off x="365750" y="946404"/>
+          <p:cNvPr id="6" name="TextBox 5"/>
+          <p:cNvSpPr txBox="1"/>
+          <p:nvPr/>
+        </p:nvSpPr>
+        <p:spPr>
+          <a:xfrm>
+            <a:off x="487667" y="1632204"/>
             <a:ext cx="3169840" cy="301752"/>
           </a:xfrm>
           <a:prstGeom prst="rect">
@@ -13554,13 +13396,13 @@
       </p:sp>
       <p:sp>
         <p:nvSpPr>
-          <p:cNvPr id="5" name="Rectangle 4"/>
+          <p:cNvPr id="7" name="Rectangle 6"/>
           <p:cNvSpPr/>
           <p:nvPr/>
         </p:nvSpPr>
         <p:spPr>
           <a:xfrm>
-            <a:off x="3535591" y="891540"/>
+            <a:off x="3657508" y="1577340"/>
             <a:ext cx="8290352" cy="377190"/>
           </a:xfrm>
           <a:prstGeom prst="rect">
@@ -13600,13 +13442,13 @@
       </p:sp>
       <p:sp>
         <p:nvSpPr>
-          <p:cNvPr id="6" name="TextBox 5"/>
-          <p:cNvSpPr txBox="1"/>
-          <p:nvPr/>
-        </p:nvSpPr>
-        <p:spPr>
-          <a:xfrm>
-            <a:off x="3535591" y="946404"/>
+          <p:cNvPr id="8" name="TextBox 7"/>
+          <p:cNvSpPr txBox="1"/>
+          <p:nvPr/>
+        </p:nvSpPr>
+        <p:spPr>
+          <a:xfrm>
+            <a:off x="3657508" y="1632204"/>
             <a:ext cx="8290352" cy="301752"/>
           </a:xfrm>
           <a:prstGeom prst="rect">
@@ -13635,13 +13477,13 @@
       </p:sp>
       <p:sp>
         <p:nvSpPr>
-          <p:cNvPr id="7" name="Rectangle 6"/>
+          <p:cNvPr id="9" name="Rectangle 8"/>
           <p:cNvSpPr/>
           <p:nvPr/>
         </p:nvSpPr>
         <p:spPr>
           <a:xfrm>
-            <a:off x="365750" y="1268730"/>
+            <a:off x="487667" y="1954530"/>
             <a:ext cx="3169840" cy="534924"/>
           </a:xfrm>
           <a:prstGeom prst="rect">
@@ -13681,13 +13523,13 @@
       </p:sp>
       <p:sp>
         <p:nvSpPr>
-          <p:cNvPr id="8" name="TextBox 7"/>
-          <p:cNvSpPr txBox="1"/>
-          <p:nvPr/>
-        </p:nvSpPr>
-        <p:spPr>
-          <a:xfrm>
-            <a:off x="365750" y="1296161"/>
+          <p:cNvPr id="10" name="TextBox 9"/>
+          <p:cNvSpPr txBox="1"/>
+          <p:nvPr/>
+        </p:nvSpPr>
+        <p:spPr>
+          <a:xfrm>
+            <a:off x="487667" y="1981962"/>
             <a:ext cx="3169840" cy="480060"/>
           </a:xfrm>
           <a:prstGeom prst="rect">
@@ -13703,7 +13545,7 @@
           <a:p>
             <a:pPr algn="l"/>
             <a:r>
-              <a:rPr sz="750" b="0">
+              <a:rPr sz="800" b="0">
                 <a:solidFill>
                   <a:srgbClr val="1A1A1A"/>
                 </a:solidFill>
@@ -13716,13 +13558,13 @@
       </p:sp>
       <p:sp>
         <p:nvSpPr>
-          <p:cNvPr id="9" name="Rectangle 8"/>
+          <p:cNvPr id="11" name="Rectangle 10"/>
           <p:cNvSpPr/>
           <p:nvPr/>
         </p:nvSpPr>
         <p:spPr>
           <a:xfrm>
-            <a:off x="3535591" y="1268730"/>
+            <a:off x="3657508" y="1954530"/>
             <a:ext cx="8290352" cy="534924"/>
           </a:xfrm>
           <a:prstGeom prst="rect">
@@ -13762,13 +13604,13 @@
       </p:sp>
       <p:sp>
         <p:nvSpPr>
-          <p:cNvPr id="10" name="TextBox 9"/>
-          <p:cNvSpPr txBox="1"/>
-          <p:nvPr/>
-        </p:nvSpPr>
-        <p:spPr>
-          <a:xfrm>
-            <a:off x="3535591" y="1296161"/>
+          <p:cNvPr id="12" name="TextBox 11"/>
+          <p:cNvSpPr txBox="1"/>
+          <p:nvPr/>
+        </p:nvSpPr>
+        <p:spPr>
+          <a:xfrm>
+            <a:off x="3657508" y="1981962"/>
             <a:ext cx="8290352" cy="480060"/>
           </a:xfrm>
           <a:prstGeom prst="rect">
@@ -13784,7 +13626,7 @@
           <a:p>
             <a:pPr algn="l"/>
             <a:r>
-              <a:rPr sz="750" b="0">
+              <a:rPr sz="800" b="0">
                 <a:solidFill>
                   <a:srgbClr val="1A1A1A"/>
                 </a:solidFill>
@@ -13797,13 +13639,13 @@
       </p:sp>
       <p:sp>
         <p:nvSpPr>
-          <p:cNvPr id="11" name="Rectangle 10"/>
+          <p:cNvPr id="13" name="Rectangle 12"/>
           <p:cNvSpPr/>
           <p:nvPr/>
         </p:nvSpPr>
         <p:spPr>
           <a:xfrm>
-            <a:off x="365750" y="1803654"/>
+            <a:off x="487667" y="2489453"/>
             <a:ext cx="3169840" cy="699516"/>
           </a:xfrm>
           <a:prstGeom prst="rect">
@@ -13843,13 +13685,13 @@
       </p:sp>
       <p:sp>
         <p:nvSpPr>
-          <p:cNvPr id="12" name="TextBox 11"/>
-          <p:cNvSpPr txBox="1"/>
-          <p:nvPr/>
-        </p:nvSpPr>
-        <p:spPr>
-          <a:xfrm>
-            <a:off x="365750" y="1831086"/>
+          <p:cNvPr id="14" name="TextBox 13"/>
+          <p:cNvSpPr txBox="1"/>
+          <p:nvPr/>
+        </p:nvSpPr>
+        <p:spPr>
+          <a:xfrm>
+            <a:off x="487667" y="2516885"/>
             <a:ext cx="3169840" cy="644651"/>
           </a:xfrm>
           <a:prstGeom prst="rect">
@@ -13865,7 +13707,7 @@
           <a:p>
             <a:pPr algn="l"/>
             <a:r>
-              <a:rPr sz="750" b="0">
+              <a:rPr sz="800" b="0">
                 <a:solidFill>
                   <a:srgbClr val="1A1A1A"/>
                 </a:solidFill>
@@ -13878,13 +13720,13 @@
       </p:sp>
       <p:sp>
         <p:nvSpPr>
-          <p:cNvPr id="13" name="Rectangle 12"/>
+          <p:cNvPr id="15" name="Rectangle 14"/>
           <p:cNvSpPr/>
           <p:nvPr/>
         </p:nvSpPr>
         <p:spPr>
           <a:xfrm>
-            <a:off x="3535591" y="1803654"/>
+            <a:off x="3657508" y="2489453"/>
             <a:ext cx="8290352" cy="699516"/>
           </a:xfrm>
           <a:prstGeom prst="rect">
@@ -13924,13 +13766,13 @@
       </p:sp>
       <p:sp>
         <p:nvSpPr>
-          <p:cNvPr id="14" name="TextBox 13"/>
-          <p:cNvSpPr txBox="1"/>
-          <p:nvPr/>
-        </p:nvSpPr>
-        <p:spPr>
-          <a:xfrm>
-            <a:off x="3535591" y="1831086"/>
+          <p:cNvPr id="16" name="TextBox 15"/>
+          <p:cNvSpPr txBox="1"/>
+          <p:nvPr/>
+        </p:nvSpPr>
+        <p:spPr>
+          <a:xfrm>
+            <a:off x="3657508" y="2516885"/>
             <a:ext cx="8290352" cy="644651"/>
           </a:xfrm>
           <a:prstGeom prst="rect">
@@ -13946,7 +13788,7 @@
           <a:p>
             <a:pPr algn="l"/>
             <a:r>
-              <a:rPr sz="750" b="0">
+              <a:rPr sz="800" b="0">
                 <a:solidFill>
                   <a:srgbClr val="1A1A1A"/>
                 </a:solidFill>
@@ -13959,13 +13801,13 @@
       </p:sp>
       <p:sp>
         <p:nvSpPr>
-          <p:cNvPr id="15" name="Rectangle 14"/>
+          <p:cNvPr id="17" name="Rectangle 16"/>
           <p:cNvSpPr/>
           <p:nvPr/>
         </p:nvSpPr>
         <p:spPr>
           <a:xfrm>
-            <a:off x="365750" y="2503170"/>
+            <a:off x="487667" y="3188970"/>
             <a:ext cx="3169840" cy="699516"/>
           </a:xfrm>
           <a:prstGeom prst="rect">
@@ -14005,13 +13847,13 @@
       </p:sp>
       <p:sp>
         <p:nvSpPr>
-          <p:cNvPr id="16" name="TextBox 15"/>
-          <p:cNvSpPr txBox="1"/>
-          <p:nvPr/>
-        </p:nvSpPr>
-        <p:spPr>
-          <a:xfrm>
-            <a:off x="365750" y="2530602"/>
+          <p:cNvPr id="18" name="TextBox 17"/>
+          <p:cNvSpPr txBox="1"/>
+          <p:nvPr/>
+        </p:nvSpPr>
+        <p:spPr>
+          <a:xfrm>
+            <a:off x="487667" y="3216402"/>
             <a:ext cx="3169840" cy="644651"/>
           </a:xfrm>
           <a:prstGeom prst="rect">
@@ -14027,7 +13869,7 @@
           <a:p>
             <a:pPr algn="l"/>
             <a:r>
-              <a:rPr sz="750" b="0">
+              <a:rPr sz="800" b="0">
                 <a:solidFill>
                   <a:srgbClr val="1A1A1A"/>
                 </a:solidFill>
@@ -14040,13 +13882,13 @@
       </p:sp>
       <p:sp>
         <p:nvSpPr>
-          <p:cNvPr id="17" name="Rectangle 16"/>
+          <p:cNvPr id="19" name="Rectangle 18"/>
           <p:cNvSpPr/>
           <p:nvPr/>
         </p:nvSpPr>
         <p:spPr>
           <a:xfrm>
-            <a:off x="3535591" y="2503170"/>
+            <a:off x="3657508" y="3188970"/>
             <a:ext cx="8290352" cy="699516"/>
           </a:xfrm>
           <a:prstGeom prst="rect">
@@ -14086,13 +13928,13 @@
       </p:sp>
       <p:sp>
         <p:nvSpPr>
-          <p:cNvPr id="18" name="TextBox 17"/>
-          <p:cNvSpPr txBox="1"/>
-          <p:nvPr/>
-        </p:nvSpPr>
-        <p:spPr>
-          <a:xfrm>
-            <a:off x="3535591" y="2530602"/>
+          <p:cNvPr id="20" name="TextBox 19"/>
+          <p:cNvSpPr txBox="1"/>
+          <p:nvPr/>
+        </p:nvSpPr>
+        <p:spPr>
+          <a:xfrm>
+            <a:off x="3657508" y="3216402"/>
             <a:ext cx="8290352" cy="644651"/>
           </a:xfrm>
           <a:prstGeom prst="rect">
@@ -14108,7 +13950,7 @@
           <a:p>
             <a:pPr algn="l"/>
             <a:r>
-              <a:rPr sz="750" b="0">
+              <a:rPr sz="800" b="0">
                 <a:solidFill>
                   <a:srgbClr val="1A1A1A"/>
                 </a:solidFill>
@@ -14121,13 +13963,13 @@
       </p:sp>
       <p:sp>
         <p:nvSpPr>
-          <p:cNvPr id="19" name="Rectangle 18"/>
+          <p:cNvPr id="21" name="Rectangle 20"/>
           <p:cNvSpPr/>
           <p:nvPr/>
         </p:nvSpPr>
         <p:spPr>
           <a:xfrm>
-            <a:off x="365750" y="3202686"/>
+            <a:off x="487667" y="3888486"/>
             <a:ext cx="3169840" cy="411480"/>
           </a:xfrm>
           <a:prstGeom prst="rect">
@@ -14167,13 +14009,13 @@
       </p:sp>
       <p:sp>
         <p:nvSpPr>
-          <p:cNvPr id="20" name="TextBox 19"/>
-          <p:cNvSpPr txBox="1"/>
-          <p:nvPr/>
-        </p:nvSpPr>
-        <p:spPr>
-          <a:xfrm>
-            <a:off x="365750" y="3230118"/>
+          <p:cNvPr id="22" name="TextBox 21"/>
+          <p:cNvSpPr txBox="1"/>
+          <p:nvPr/>
+        </p:nvSpPr>
+        <p:spPr>
+          <a:xfrm>
+            <a:off x="487667" y="3915918"/>
             <a:ext cx="3169840" cy="356616"/>
           </a:xfrm>
           <a:prstGeom prst="rect">
@@ -14189,7 +14031,7 @@
           <a:p>
             <a:pPr algn="l"/>
             <a:r>
-              <a:rPr sz="750" b="0">
+              <a:rPr sz="800" b="0">
                 <a:solidFill>
                   <a:srgbClr val="1A1A1A"/>
                 </a:solidFill>
@@ -14202,13 +14044,13 @@
       </p:sp>
       <p:sp>
         <p:nvSpPr>
-          <p:cNvPr id="21" name="Rectangle 20"/>
+          <p:cNvPr id="23" name="Rectangle 22"/>
           <p:cNvSpPr/>
           <p:nvPr/>
         </p:nvSpPr>
         <p:spPr>
           <a:xfrm>
-            <a:off x="3535591" y="3202686"/>
+            <a:off x="3657508" y="3888486"/>
             <a:ext cx="8290352" cy="411480"/>
           </a:xfrm>
           <a:prstGeom prst="rect">
@@ -14248,13 +14090,13 @@
       </p:sp>
       <p:sp>
         <p:nvSpPr>
-          <p:cNvPr id="22" name="TextBox 21"/>
-          <p:cNvSpPr txBox="1"/>
-          <p:nvPr/>
-        </p:nvSpPr>
-        <p:spPr>
-          <a:xfrm>
-            <a:off x="3535591" y="3230118"/>
+          <p:cNvPr id="24" name="TextBox 23"/>
+          <p:cNvSpPr txBox="1"/>
+          <p:nvPr/>
+        </p:nvSpPr>
+        <p:spPr>
+          <a:xfrm>
+            <a:off x="3657508" y="3915918"/>
             <a:ext cx="8290352" cy="356616"/>
           </a:xfrm>
           <a:prstGeom prst="rect">
@@ -14270,7 +14112,7 @@
           <a:p>
             <a:pPr algn="l"/>
             <a:r>
-              <a:rPr sz="750" b="0">
+              <a:rPr sz="800" b="0">
                 <a:solidFill>
                   <a:srgbClr val="1A1A1A"/>
                 </a:solidFill>
@@ -14283,13 +14125,13 @@
       </p:sp>
       <p:sp>
         <p:nvSpPr>
-          <p:cNvPr id="23" name="Rectangle 22"/>
+          <p:cNvPr id="25" name="Rectangle 24"/>
           <p:cNvSpPr/>
           <p:nvPr/>
         </p:nvSpPr>
         <p:spPr>
           <a:xfrm>
-            <a:off x="365750" y="3614166"/>
+            <a:off x="487667" y="4299966"/>
             <a:ext cx="3169840" cy="411480"/>
           </a:xfrm>
           <a:prstGeom prst="rect">
@@ -14329,13 +14171,13 @@
       </p:sp>
       <p:sp>
         <p:nvSpPr>
-          <p:cNvPr id="24" name="TextBox 23"/>
-          <p:cNvSpPr txBox="1"/>
-          <p:nvPr/>
-        </p:nvSpPr>
-        <p:spPr>
-          <a:xfrm>
-            <a:off x="365750" y="3641598"/>
+          <p:cNvPr id="26" name="TextBox 25"/>
+          <p:cNvSpPr txBox="1"/>
+          <p:nvPr/>
+        </p:nvSpPr>
+        <p:spPr>
+          <a:xfrm>
+            <a:off x="487667" y="4327398"/>
             <a:ext cx="3169840" cy="356616"/>
           </a:xfrm>
           <a:prstGeom prst="rect">
@@ -14351,7 +14193,7 @@
           <a:p>
             <a:pPr algn="l"/>
             <a:r>
-              <a:rPr sz="750" b="0">
+              <a:rPr sz="800" b="0">
                 <a:solidFill>
                   <a:srgbClr val="1A1A1A"/>
                 </a:solidFill>
@@ -14364,13 +14206,13 @@
       </p:sp>
       <p:sp>
         <p:nvSpPr>
-          <p:cNvPr id="25" name="Rectangle 24"/>
+          <p:cNvPr id="27" name="Rectangle 26"/>
           <p:cNvSpPr/>
           <p:nvPr/>
         </p:nvSpPr>
         <p:spPr>
           <a:xfrm>
-            <a:off x="3535591" y="3614166"/>
+            <a:off x="3657508" y="4299966"/>
             <a:ext cx="8290352" cy="411480"/>
           </a:xfrm>
           <a:prstGeom prst="rect">
@@ -14410,13 +14252,13 @@
       </p:sp>
       <p:sp>
         <p:nvSpPr>
-          <p:cNvPr id="26" name="TextBox 25"/>
-          <p:cNvSpPr txBox="1"/>
-          <p:nvPr/>
-        </p:nvSpPr>
-        <p:spPr>
-          <a:xfrm>
-            <a:off x="3535591" y="3641598"/>
+          <p:cNvPr id="28" name="TextBox 27"/>
+          <p:cNvSpPr txBox="1"/>
+          <p:nvPr/>
+        </p:nvSpPr>
+        <p:spPr>
+          <a:xfrm>
+            <a:off x="3657508" y="4327398"/>
             <a:ext cx="8290352" cy="356616"/>
           </a:xfrm>
           <a:prstGeom prst="rect">
@@ -14432,7 +14274,7 @@
           <a:p>
             <a:pPr algn="l"/>
             <a:r>
-              <a:rPr sz="750" b="0">
+              <a:rPr sz="800" b="0">
                 <a:solidFill>
                   <a:srgbClr val="1A1A1A"/>
                 </a:solidFill>
@@ -14445,13 +14287,13 @@
       </p:sp>
       <p:sp>
         <p:nvSpPr>
-          <p:cNvPr id="27" name="Rectangle 26"/>
+          <p:cNvPr id="29" name="Rectangle 28"/>
           <p:cNvSpPr/>
           <p:nvPr/>
         </p:nvSpPr>
         <p:spPr>
           <a:xfrm>
-            <a:off x="365750" y="4025646"/>
+            <a:off x="487667" y="4711446"/>
             <a:ext cx="3169840" cy="534924"/>
           </a:xfrm>
           <a:prstGeom prst="rect">
@@ -14491,13 +14333,13 @@
       </p:sp>
       <p:sp>
         <p:nvSpPr>
-          <p:cNvPr id="28" name="TextBox 27"/>
-          <p:cNvSpPr txBox="1"/>
-          <p:nvPr/>
-        </p:nvSpPr>
-        <p:spPr>
-          <a:xfrm>
-            <a:off x="365750" y="4053078"/>
+          <p:cNvPr id="30" name="TextBox 29"/>
+          <p:cNvSpPr txBox="1"/>
+          <p:nvPr/>
+        </p:nvSpPr>
+        <p:spPr>
+          <a:xfrm>
+            <a:off x="487667" y="4738878"/>
             <a:ext cx="3169840" cy="480060"/>
           </a:xfrm>
           <a:prstGeom prst="rect">
@@ -14513,7 +14355,7 @@
           <a:p>
             <a:pPr algn="l"/>
             <a:r>
-              <a:rPr sz="750" b="0">
+              <a:rPr sz="800" b="0">
                 <a:solidFill>
                   <a:srgbClr val="1A1A1A"/>
                 </a:solidFill>
@@ -14526,13 +14368,13 @@
       </p:sp>
       <p:sp>
         <p:nvSpPr>
-          <p:cNvPr id="29" name="Rectangle 28"/>
+          <p:cNvPr id="31" name="Rectangle 30"/>
           <p:cNvSpPr/>
           <p:nvPr/>
         </p:nvSpPr>
         <p:spPr>
           <a:xfrm>
-            <a:off x="3535591" y="4025646"/>
+            <a:off x="3657508" y="4711446"/>
             <a:ext cx="8290352" cy="534924"/>
           </a:xfrm>
           <a:prstGeom prst="rect">
@@ -14572,13 +14414,13 @@
       </p:sp>
       <p:sp>
         <p:nvSpPr>
-          <p:cNvPr id="30" name="TextBox 29"/>
-          <p:cNvSpPr txBox="1"/>
-          <p:nvPr/>
-        </p:nvSpPr>
-        <p:spPr>
-          <a:xfrm>
-            <a:off x="3535591" y="4053078"/>
+          <p:cNvPr id="32" name="TextBox 31"/>
+          <p:cNvSpPr txBox="1"/>
+          <p:nvPr/>
+        </p:nvSpPr>
+        <p:spPr>
+          <a:xfrm>
+            <a:off x="3657508" y="4738878"/>
             <a:ext cx="8290352" cy="480060"/>
           </a:xfrm>
           <a:prstGeom prst="rect">
@@ -14594,7 +14436,7 @@
           <a:p>
             <a:pPr algn="l"/>
             <a:r>
-              <a:rPr sz="750" b="0">
+              <a:rPr sz="800" b="0">
                 <a:solidFill>
                   <a:srgbClr val="1A1A1A"/>
                 </a:solidFill>
@@ -14607,13 +14449,13 @@
       </p:sp>
       <p:sp>
         <p:nvSpPr>
-          <p:cNvPr id="31" name="Rectangle 30"/>
+          <p:cNvPr id="33" name="Rectangle 32"/>
           <p:cNvSpPr/>
           <p:nvPr/>
         </p:nvSpPr>
         <p:spPr>
           <a:xfrm>
-            <a:off x="365750" y="4560570"/>
+            <a:off x="487667" y="5246370"/>
             <a:ext cx="3169840" cy="534924"/>
           </a:xfrm>
           <a:prstGeom prst="rect">
@@ -14653,13 +14495,13 @@
       </p:sp>
       <p:sp>
         <p:nvSpPr>
-          <p:cNvPr id="32" name="TextBox 31"/>
-          <p:cNvSpPr txBox="1"/>
-          <p:nvPr/>
-        </p:nvSpPr>
-        <p:spPr>
-          <a:xfrm>
-            <a:off x="365750" y="4588002"/>
+          <p:cNvPr id="34" name="TextBox 33"/>
+          <p:cNvSpPr txBox="1"/>
+          <p:nvPr/>
+        </p:nvSpPr>
+        <p:spPr>
+          <a:xfrm>
+            <a:off x="487667" y="5273802"/>
             <a:ext cx="3169840" cy="480060"/>
           </a:xfrm>
           <a:prstGeom prst="rect">
@@ -14675,7 +14517,7 @@
           <a:p>
             <a:pPr algn="l"/>
             <a:r>
-              <a:rPr sz="750" b="0">
+              <a:rPr sz="800" b="0">
                 <a:solidFill>
                   <a:srgbClr val="1A1A1A"/>
                 </a:solidFill>
@@ -14688,13 +14530,13 @@
       </p:sp>
       <p:sp>
         <p:nvSpPr>
-          <p:cNvPr id="33" name="Rectangle 32"/>
+          <p:cNvPr id="35" name="Rectangle 34"/>
           <p:cNvSpPr/>
           <p:nvPr/>
         </p:nvSpPr>
         <p:spPr>
           <a:xfrm>
-            <a:off x="3535591" y="4560570"/>
+            <a:off x="3657508" y="5246370"/>
             <a:ext cx="8290352" cy="534924"/>
           </a:xfrm>
           <a:prstGeom prst="rect">
@@ -14734,13 +14576,13 @@
       </p:sp>
       <p:sp>
         <p:nvSpPr>
-          <p:cNvPr id="34" name="TextBox 33"/>
-          <p:cNvSpPr txBox="1"/>
-          <p:nvPr/>
-        </p:nvSpPr>
-        <p:spPr>
-          <a:xfrm>
-            <a:off x="3535591" y="4588002"/>
+          <p:cNvPr id="36" name="TextBox 35"/>
+          <p:cNvSpPr txBox="1"/>
+          <p:nvPr/>
+        </p:nvSpPr>
+        <p:spPr>
+          <a:xfrm>
+            <a:off x="3657508" y="5273802"/>
             <a:ext cx="8290352" cy="480060"/>
           </a:xfrm>
           <a:prstGeom prst="rect">
@@ -14756,7 +14598,7 @@
           <a:p>
             <a:pPr algn="l"/>
             <a:r>
-              <a:rPr sz="750" b="0">
+              <a:rPr sz="800" b="0">
                 <a:solidFill>
                   <a:srgbClr val="1A1A1A"/>
                 </a:solidFill>
@@ -14769,366 +14611,42 @@
       </p:sp>
       <p:sp>
         <p:nvSpPr>
-          <p:cNvPr id="35" name="Rectangle 34"/>
-          <p:cNvSpPr/>
-          <p:nvPr/>
-        </p:nvSpPr>
-        <p:spPr>
-          <a:xfrm>
-            <a:off x="365750" y="5095494"/>
-            <a:ext cx="3169840" cy="534924"/>
-          </a:xfrm>
-          <a:prstGeom prst="rect">
-            <a:avLst/>
-          </a:prstGeom>
-          <a:solidFill>
-            <a:srgbClr val="FFFFFF"/>
-          </a:solidFill>
-          <a:ln w="9525">
-            <a:solidFill>
-              <a:srgbClr val="D8D8D8"/>
-            </a:solidFill>
-          </a:ln>
-          <a:effectLst/>
-        </p:spPr>
-        <p:style>
-          <a:lnRef idx="1">
-            <a:schemeClr val="accent1"/>
-          </a:lnRef>
-          <a:fillRef idx="3">
-            <a:schemeClr val="accent1"/>
-          </a:fillRef>
-          <a:effectRef idx="2">
-            <a:schemeClr val="accent1"/>
-          </a:effectRef>
-          <a:fontRef idx="minor">
-            <a:schemeClr val="lt1"/>
-          </a:fontRef>
-        </p:style>
-        <p:txBody>
-          <a:bodyPr rtlCol="0" anchor="ctr"/>
-          <a:lstStyle/>
-          <a:p>
-            <a:pPr algn="ctr"/>
-          </a:p>
-        </p:txBody>
-      </p:sp>
-      <p:sp>
-        <p:nvSpPr>
-          <p:cNvPr id="36" name="TextBox 35"/>
-          <p:cNvSpPr txBox="1"/>
-          <p:nvPr/>
-        </p:nvSpPr>
-        <p:spPr>
-          <a:xfrm>
-            <a:off x="365750" y="5122926"/>
-            <a:ext cx="3169840" cy="480060"/>
-          </a:xfrm>
-          <a:prstGeom prst="rect">
-            <a:avLst/>
-          </a:prstGeom>
-          <a:noFill/>
-        </p:spPr>
-        <p:txBody>
-          <a:bodyPr wrap="square" lIns="36000" rIns="36000" tIns="18000" bIns="18000">
-            <a:spAutoFit/>
-          </a:bodyPr>
-          <a:lstStyle/>
-          <a:p>
-            <a:pPr algn="l"/>
-            <a:r>
-              <a:rPr sz="750" b="0">
-                <a:solidFill>
-                  <a:srgbClr val="1A1A1A"/>
-                </a:solidFill>
-                <a:latin typeface="Pretendard"/>
-              </a:rPr>
-              <a:t>유의</a:t>
-            </a:r>
-          </a:p>
-        </p:txBody>
-      </p:sp>
-      <p:sp>
-        <p:nvSpPr>
-          <p:cNvPr id="37" name="Rectangle 36"/>
-          <p:cNvSpPr/>
-          <p:nvPr/>
-        </p:nvSpPr>
-        <p:spPr>
-          <a:xfrm>
-            <a:off x="3535591" y="5095494"/>
-            <a:ext cx="8290352" cy="534924"/>
-          </a:xfrm>
-          <a:prstGeom prst="rect">
-            <a:avLst/>
-          </a:prstGeom>
-          <a:solidFill>
-            <a:srgbClr val="FFFFFF"/>
-          </a:solidFill>
-          <a:ln w="9525">
-            <a:solidFill>
-              <a:srgbClr val="D8D8D8"/>
-            </a:solidFill>
-          </a:ln>
-          <a:effectLst/>
-        </p:spPr>
-        <p:style>
-          <a:lnRef idx="1">
-            <a:schemeClr val="accent1"/>
-          </a:lnRef>
-          <a:fillRef idx="3">
-            <a:schemeClr val="accent1"/>
-          </a:fillRef>
-          <a:effectRef idx="2">
-            <a:schemeClr val="accent1"/>
-          </a:effectRef>
-          <a:fontRef idx="minor">
-            <a:schemeClr val="lt1"/>
-          </a:fontRef>
-        </p:style>
-        <p:txBody>
-          <a:bodyPr rtlCol="0" anchor="ctr"/>
-          <a:lstStyle/>
-          <a:p>
-            <a:pPr algn="ctr"/>
+          <p:cNvPr id="37" name="TextBox 36"/>
+          <p:cNvSpPr txBox="1"/>
+          <p:nvPr/>
+        </p:nvSpPr>
+        <p:spPr>
+          <a:xfrm>
+            <a:off x="487667" y="5849874"/>
+            <a:ext cx="11216359" cy="274320"/>
+          </a:xfrm>
+          <a:prstGeom prst="rect">
+            <a:avLst/>
+          </a:prstGeom>
+          <a:noFill/>
+        </p:spPr>
+        <p:txBody>
+          <a:bodyPr wrap="square" lIns="36000" rIns="36000" tIns="18000" bIns="18000">
+            <a:spAutoFit/>
+          </a:bodyPr>
+          <a:lstStyle/>
+          <a:p>
+            <a:pPr algn="l"/>
+            <a:r>
+              <a:rPr sz="800" b="0">
+                <a:solidFill>
+                  <a:srgbClr val="767676"/>
+                </a:solidFill>
+                <a:latin typeface="Pretendard"/>
+              </a:rPr>
+              <a:t>※ 이하 9행은 원장·문서 참조</a:t>
+            </a:r>
           </a:p>
         </p:txBody>
       </p:sp>
       <p:sp>
         <p:nvSpPr>
           <p:cNvPr id="38" name="TextBox 37"/>
-          <p:cNvSpPr txBox="1"/>
-          <p:nvPr/>
-        </p:nvSpPr>
-        <p:spPr>
-          <a:xfrm>
-            <a:off x="3535591" y="5122926"/>
-            <a:ext cx="8290352" cy="480060"/>
-          </a:xfrm>
-          <a:prstGeom prst="rect">
-            <a:avLst/>
-          </a:prstGeom>
-          <a:noFill/>
-        </p:spPr>
-        <p:txBody>
-          <a:bodyPr wrap="square" lIns="36000" rIns="36000" tIns="18000" bIns="18000">
-            <a:spAutoFit/>
-          </a:bodyPr>
-          <a:lstStyle/>
-          <a:p>
-            <a:pPr algn="l"/>
-            <a:r>
-              <a:rPr sz="750" b="0">
-                <a:solidFill>
-                  <a:srgbClr val="1A1A1A"/>
-                </a:solidFill>
-                <a:latin typeface="Pretendard"/>
-              </a:rPr>
-              <a:t>구조는 통일하되 점포별 특성은 모듈로 표현한다. 플래그십(더현대 서울)의 개성을 닫지 않는다</a:t>
-            </a:r>
-          </a:p>
-        </p:txBody>
-      </p:sp>
-      <p:sp>
-        <p:nvSpPr>
-          <p:cNvPr id="39" name="Rectangle 38"/>
-          <p:cNvSpPr/>
-          <p:nvPr/>
-        </p:nvSpPr>
-        <p:spPr>
-          <a:xfrm>
-            <a:off x="365750" y="5630418"/>
-            <a:ext cx="3169840" cy="411480"/>
-          </a:xfrm>
-          <a:prstGeom prst="rect">
-            <a:avLst/>
-          </a:prstGeom>
-          <a:solidFill>
-            <a:srgbClr val="FFFFFF"/>
-          </a:solidFill>
-          <a:ln w="9525">
-            <a:solidFill>
-              <a:srgbClr val="D8D8D8"/>
-            </a:solidFill>
-          </a:ln>
-          <a:effectLst/>
-        </p:spPr>
-        <p:style>
-          <a:lnRef idx="1">
-            <a:schemeClr val="accent1"/>
-          </a:lnRef>
-          <a:fillRef idx="3">
-            <a:schemeClr val="accent1"/>
-          </a:fillRef>
-          <a:effectRef idx="2">
-            <a:schemeClr val="accent1"/>
-          </a:effectRef>
-          <a:fontRef idx="minor">
-            <a:schemeClr val="lt1"/>
-          </a:fontRef>
-        </p:style>
-        <p:txBody>
-          <a:bodyPr rtlCol="0" anchor="ctr"/>
-          <a:lstStyle/>
-          <a:p>
-            <a:pPr algn="ctr"/>
-          </a:p>
-        </p:txBody>
-      </p:sp>
-      <p:sp>
-        <p:nvSpPr>
-          <p:cNvPr id="40" name="TextBox 39"/>
-          <p:cNvSpPr txBox="1"/>
-          <p:nvPr/>
-        </p:nvSpPr>
-        <p:spPr>
-          <a:xfrm>
-            <a:off x="365750" y="5657850"/>
-            <a:ext cx="3169840" cy="356616"/>
-          </a:xfrm>
-          <a:prstGeom prst="rect">
-            <a:avLst/>
-          </a:prstGeom>
-          <a:noFill/>
-        </p:spPr>
-        <p:txBody>
-          <a:bodyPr wrap="square" lIns="36000" rIns="36000" tIns="18000" bIns="18000">
-            <a:spAutoFit/>
-          </a:bodyPr>
-          <a:lstStyle/>
-          <a:p>
-            <a:pPr algn="l"/>
-            <a:r>
-              <a:rPr sz="750" b="0">
-                <a:solidFill>
-                  <a:srgbClr val="1A1A1A"/>
-                </a:solidFill>
-                <a:latin typeface="Pretendard"/>
-              </a:rPr>
-              <a:t/>
-            </a:r>
-          </a:p>
-        </p:txBody>
-      </p:sp>
-      <p:sp>
-        <p:nvSpPr>
-          <p:cNvPr id="41" name="Rectangle 40"/>
-          <p:cNvSpPr/>
-          <p:nvPr/>
-        </p:nvSpPr>
-        <p:spPr>
-          <a:xfrm>
-            <a:off x="3535591" y="5630418"/>
-            <a:ext cx="8290352" cy="411480"/>
-          </a:xfrm>
-          <a:prstGeom prst="rect">
-            <a:avLst/>
-          </a:prstGeom>
-          <a:solidFill>
-            <a:srgbClr val="FFFFFF"/>
-          </a:solidFill>
-          <a:ln w="9525">
-            <a:solidFill>
-              <a:srgbClr val="D8D8D8"/>
-            </a:solidFill>
-          </a:ln>
-          <a:effectLst/>
-        </p:spPr>
-        <p:style>
-          <a:lnRef idx="1">
-            <a:schemeClr val="accent1"/>
-          </a:lnRef>
-          <a:fillRef idx="3">
-            <a:schemeClr val="accent1"/>
-          </a:fillRef>
-          <a:effectRef idx="2">
-            <a:schemeClr val="accent1"/>
-          </a:effectRef>
-          <a:fontRef idx="minor">
-            <a:schemeClr val="lt1"/>
-          </a:fontRef>
-        </p:style>
-        <p:txBody>
-          <a:bodyPr rtlCol="0" anchor="ctr"/>
-          <a:lstStyle/>
-          <a:p>
-            <a:pPr algn="ctr"/>
-          </a:p>
-        </p:txBody>
-      </p:sp>
-      <p:sp>
-        <p:nvSpPr>
-          <p:cNvPr id="42" name="TextBox 41"/>
-          <p:cNvSpPr txBox="1"/>
-          <p:nvPr/>
-        </p:nvSpPr>
-        <p:spPr>
-          <a:xfrm>
-            <a:off x="3535591" y="5657850"/>
-            <a:ext cx="8290352" cy="356616"/>
-          </a:xfrm>
-          <a:prstGeom prst="rect">
-            <a:avLst/>
-          </a:prstGeom>
-          <a:noFill/>
-        </p:spPr>
-        <p:txBody>
-          <a:bodyPr wrap="square" lIns="36000" rIns="36000" tIns="18000" bIns="18000">
-            <a:spAutoFit/>
-          </a:bodyPr>
-          <a:lstStyle/>
-          <a:p>
-            <a:pPr algn="l"/>
-            <a:r>
-              <a:rPr sz="750" b="0">
-                <a:solidFill>
-                  <a:srgbClr val="1A1A1A"/>
-                </a:solidFill>
-                <a:latin typeface="Pretendard"/>
-              </a:rPr>
-              <a:t>내용</a:t>
-            </a:r>
-          </a:p>
-        </p:txBody>
-      </p:sp>
-      <p:sp>
-        <p:nvSpPr>
-          <p:cNvPr id="43" name="TextBox 42"/>
-          <p:cNvSpPr txBox="1"/>
-          <p:nvPr/>
-        </p:nvSpPr>
-        <p:spPr>
-          <a:xfrm>
-            <a:off x="365750" y="6110478"/>
-            <a:ext cx="10972525" cy="274320"/>
-          </a:xfrm>
-          <a:prstGeom prst="rect">
-            <a:avLst/>
-          </a:prstGeom>
-          <a:noFill/>
-        </p:spPr>
-        <p:txBody>
-          <a:bodyPr wrap="square" lIns="36000" rIns="36000" tIns="18000" bIns="18000">
-            <a:spAutoFit/>
-          </a:bodyPr>
-          <a:lstStyle/>
-          <a:p>
-            <a:pPr algn="l"/>
-            <a:r>
-              <a:rPr sz="800" b="0">
-                <a:solidFill>
-                  <a:srgbClr val="767676"/>
-                </a:solidFill>
-                <a:latin typeface="Pretendard"/>
-              </a:rPr>
-              <a:t>※ 이하 7행은 원장·문서 참조</a:t>
-            </a:r>
-          </a:p>
-        </p:txBody>
-      </p:sp>
-      <p:sp>
-        <p:nvSpPr>
-          <p:cNvPr id="44" name="TextBox 43"/>
           <p:cNvSpPr txBox="1"/>
           <p:nvPr/>
         </p:nvSpPr>
@@ -15163,7 +14681,7 @@
       </p:sp>
       <p:sp>
         <p:nvSpPr>
-          <p:cNvPr id="45" name="TextBox 44"/>
+          <p:cNvPr id="39" name="TextBox 38"/>
           <p:cNvSpPr txBox="1"/>
           <p:nvPr/>
         </p:nvSpPr>
@@ -15222,42 +14740,112 @@
         </p:nvSpPr>
         <p:spPr>
           <a:xfrm>
-            <a:off x="365750" y="274320"/>
-            <a:ext cx="10972525" cy="480060"/>
-          </a:xfrm>
-          <a:prstGeom prst="rect">
-            <a:avLst/>
-          </a:prstGeom>
-          <a:noFill/>
-        </p:spPr>
-        <p:txBody>
-          <a:bodyPr wrap="square" lIns="36000" rIns="36000" tIns="18000" bIns="18000">
-            <a:spAutoFit/>
-          </a:bodyPr>
-          <a:lstStyle/>
-          <a:p>
-            <a:pPr algn="l"/>
-            <a:r>
-              <a:rPr sz="1700" b="1">
+            <a:off x="487667" y="137160"/>
+            <a:ext cx="7315017" cy="274320"/>
+          </a:xfrm>
+          <a:prstGeom prst="rect">
+            <a:avLst/>
+          </a:prstGeom>
+          <a:noFill/>
+        </p:spPr>
+        <p:txBody>
+          <a:bodyPr wrap="square" lIns="36000" rIns="36000" tIns="18000" bIns="18000">
+            <a:spAutoFit/>
+          </a:bodyPr>
+          <a:lstStyle/>
+          <a:p>
+            <a:pPr algn="l"/>
+            <a:r>
+              <a:rPr sz="900" b="0">
+                <a:solidFill>
+                  <a:srgbClr val="767676"/>
+                </a:solidFill>
+                <a:latin typeface="Pretendard"/>
+              </a:rPr>
+              <a:t>UX전략보고서</a:t>
+            </a:r>
+          </a:p>
+        </p:txBody>
+      </p:sp>
+      <p:sp>
+        <p:nvSpPr>
+          <p:cNvPr id="3" name="TextBox 2"/>
+          <p:cNvSpPr txBox="1"/>
+          <p:nvPr/>
+        </p:nvSpPr>
+        <p:spPr>
+          <a:xfrm>
+            <a:off x="487667" y="548640"/>
+            <a:ext cx="11216359" cy="548640"/>
+          </a:xfrm>
+          <a:prstGeom prst="rect">
+            <a:avLst/>
+          </a:prstGeom>
+          <a:noFill/>
+        </p:spPr>
+        <p:txBody>
+          <a:bodyPr wrap="square" lIns="36000" rIns="36000" tIns="18000" bIns="18000">
+            <a:spAutoFit/>
+          </a:bodyPr>
+          <a:lstStyle/>
+          <a:p>
+            <a:pPr algn="l"/>
+            <a:r>
+              <a:rPr sz="2400" b="1">
                 <a:solidFill>
                   <a:srgbClr val="1A1A1A"/>
                 </a:solidFill>
                 <a:latin typeface="Pretendard"/>
               </a:rPr>
-              <a:t>5. 해결대안 사례 — 제시하지 않음</a:t>
-            </a:r>
-          </a:p>
-        </p:txBody>
-      </p:sp>
-      <p:sp>
-        <p:nvSpPr>
-          <p:cNvPr id="3" name="Rectangle 2"/>
+              <a:t>해결대안 사례</a:t>
+            </a:r>
+          </a:p>
+        </p:txBody>
+      </p:sp>
+      <p:sp>
+        <p:nvSpPr>
+          <p:cNvPr id="4" name="TextBox 3"/>
+          <p:cNvSpPr txBox="1"/>
+          <p:nvPr/>
+        </p:nvSpPr>
+        <p:spPr>
+          <a:xfrm>
+            <a:off x="487667" y="1097280"/>
+            <a:ext cx="11216359" cy="377190"/>
+          </a:xfrm>
+          <a:prstGeom prst="rect">
+            <a:avLst/>
+          </a:prstGeom>
+          <a:noFill/>
+        </p:spPr>
+        <p:txBody>
+          <a:bodyPr wrap="square" lIns="36000" rIns="36000" tIns="18000" bIns="18000">
+            <a:spAutoFit/>
+          </a:bodyPr>
+          <a:lstStyle/>
+          <a:p>
+            <a:pPr algn="l"/>
+            <a:r>
+              <a:rPr sz="1200" b="0">
+                <a:solidFill>
+                  <a:srgbClr val="767676"/>
+                </a:solidFill>
+                <a:latin typeface="Pretendard"/>
+              </a:rPr>
+              <a:t>제시하지 않음</a:t>
+            </a:r>
+          </a:p>
+        </p:txBody>
+      </p:sp>
+      <p:sp>
+        <p:nvSpPr>
+          <p:cNvPr id="5" name="Rectangle 4"/>
           <p:cNvSpPr/>
           <p:nvPr/>
         </p:nvSpPr>
         <p:spPr>
           <a:xfrm>
-            <a:off x="365750" y="891540"/>
+            <a:off x="487667" y="1577340"/>
             <a:ext cx="3169840" cy="377190"/>
           </a:xfrm>
           <a:prstGeom prst="rect">
@@ -15297,13 +14885,13 @@
       </p:sp>
       <p:sp>
         <p:nvSpPr>
-          <p:cNvPr id="4" name="TextBox 3"/>
-          <p:cNvSpPr txBox="1"/>
-          <p:nvPr/>
-        </p:nvSpPr>
-        <p:spPr>
-          <a:xfrm>
-            <a:off x="365750" y="946404"/>
+          <p:cNvPr id="6" name="TextBox 5"/>
+          <p:cNvSpPr txBox="1"/>
+          <p:nvPr/>
+        </p:nvSpPr>
+        <p:spPr>
+          <a:xfrm>
+            <a:off x="487667" y="1632204"/>
             <a:ext cx="3169840" cy="301752"/>
           </a:xfrm>
           <a:prstGeom prst="rect">
@@ -15332,13 +14920,13 @@
       </p:sp>
       <p:sp>
         <p:nvSpPr>
-          <p:cNvPr id="5" name="Rectangle 4"/>
+          <p:cNvPr id="7" name="Rectangle 6"/>
           <p:cNvSpPr/>
           <p:nvPr/>
         </p:nvSpPr>
         <p:spPr>
           <a:xfrm>
-            <a:off x="3535591" y="891540"/>
+            <a:off x="3657508" y="1577340"/>
             <a:ext cx="8290352" cy="377190"/>
           </a:xfrm>
           <a:prstGeom prst="rect">
@@ -15378,13 +14966,13 @@
       </p:sp>
       <p:sp>
         <p:nvSpPr>
-          <p:cNvPr id="6" name="TextBox 5"/>
-          <p:cNvSpPr txBox="1"/>
-          <p:nvPr/>
-        </p:nvSpPr>
-        <p:spPr>
-          <a:xfrm>
-            <a:off x="3535591" y="946404"/>
+          <p:cNvPr id="8" name="TextBox 7"/>
+          <p:cNvSpPr txBox="1"/>
+          <p:nvPr/>
+        </p:nvSpPr>
+        <p:spPr>
+          <a:xfrm>
+            <a:off x="3657508" y="1632204"/>
             <a:ext cx="8290352" cy="301752"/>
           </a:xfrm>
           <a:prstGeom prst="rect">
@@ -15413,13 +15001,13 @@
       </p:sp>
       <p:sp>
         <p:nvSpPr>
-          <p:cNvPr id="7" name="Rectangle 6"/>
+          <p:cNvPr id="9" name="Rectangle 8"/>
           <p:cNvSpPr/>
           <p:nvPr/>
         </p:nvSpPr>
         <p:spPr>
           <a:xfrm>
-            <a:off x="365750" y="1268730"/>
+            <a:off x="487667" y="1954530"/>
             <a:ext cx="3169840" cy="411480"/>
           </a:xfrm>
           <a:prstGeom prst="rect">
@@ -15459,13 +15047,13 @@
       </p:sp>
       <p:sp>
         <p:nvSpPr>
-          <p:cNvPr id="8" name="TextBox 7"/>
-          <p:cNvSpPr txBox="1"/>
-          <p:nvPr/>
-        </p:nvSpPr>
-        <p:spPr>
-          <a:xfrm>
-            <a:off x="365750" y="1296161"/>
+          <p:cNvPr id="10" name="TextBox 9"/>
+          <p:cNvSpPr txBox="1"/>
+          <p:nvPr/>
+        </p:nvSpPr>
+        <p:spPr>
+          <a:xfrm>
+            <a:off x="487667" y="1981962"/>
             <a:ext cx="3169840" cy="356616"/>
           </a:xfrm>
           <a:prstGeom prst="rect">
@@ -15481,7 +15069,7 @@
           <a:p>
             <a:pPr algn="l"/>
             <a:r>
-              <a:rPr sz="750" b="0">
+              <a:rPr sz="800" b="0">
                 <a:solidFill>
                   <a:srgbClr val="1A1A1A"/>
                 </a:solidFill>
@@ -15494,13 +15082,13 @@
       </p:sp>
       <p:sp>
         <p:nvSpPr>
-          <p:cNvPr id="9" name="Rectangle 8"/>
+          <p:cNvPr id="11" name="Rectangle 10"/>
           <p:cNvSpPr/>
           <p:nvPr/>
         </p:nvSpPr>
         <p:spPr>
           <a:xfrm>
-            <a:off x="3535591" y="1268730"/>
+            <a:off x="3657508" y="1954530"/>
             <a:ext cx="8290352" cy="411480"/>
           </a:xfrm>
           <a:prstGeom prst="rect">
@@ -15540,13 +15128,13 @@
       </p:sp>
       <p:sp>
         <p:nvSpPr>
-          <p:cNvPr id="10" name="TextBox 9"/>
-          <p:cNvSpPr txBox="1"/>
-          <p:nvPr/>
-        </p:nvSpPr>
-        <p:spPr>
-          <a:xfrm>
-            <a:off x="3535591" y="1296161"/>
+          <p:cNvPr id="12" name="TextBox 11"/>
+          <p:cNvSpPr txBox="1"/>
+          <p:nvPr/>
+        </p:nvSpPr>
+        <p:spPr>
+          <a:xfrm>
+            <a:off x="3657508" y="1981962"/>
             <a:ext cx="8290352" cy="356616"/>
           </a:xfrm>
           <a:prstGeom prst="rect">
@@ -15562,7 +15150,7 @@
           <a:p>
             <a:pPr algn="l"/>
             <a:r>
-              <a:rPr sz="750" b="0">
+              <a:rPr sz="800" b="0">
                 <a:solidFill>
                   <a:srgbClr val="1A1A1A"/>
                 </a:solidFill>
@@ -15575,13 +15163,13 @@
       </p:sp>
       <p:sp>
         <p:nvSpPr>
-          <p:cNvPr id="11" name="Rectangle 10"/>
+          <p:cNvPr id="13" name="Rectangle 12"/>
           <p:cNvSpPr/>
           <p:nvPr/>
         </p:nvSpPr>
         <p:spPr>
           <a:xfrm>
-            <a:off x="365750" y="1680210"/>
+            <a:off x="487667" y="2366010"/>
             <a:ext cx="3169840" cy="534924"/>
           </a:xfrm>
           <a:prstGeom prst="rect">
@@ -15621,13 +15209,13 @@
       </p:sp>
       <p:sp>
         <p:nvSpPr>
-          <p:cNvPr id="12" name="TextBox 11"/>
-          <p:cNvSpPr txBox="1"/>
-          <p:nvPr/>
-        </p:nvSpPr>
-        <p:spPr>
-          <a:xfrm>
-            <a:off x="365750" y="1707642"/>
+          <p:cNvPr id="14" name="TextBox 13"/>
+          <p:cNvSpPr txBox="1"/>
+          <p:nvPr/>
+        </p:nvSpPr>
+        <p:spPr>
+          <a:xfrm>
+            <a:off x="487667" y="2393442"/>
             <a:ext cx="3169840" cy="480060"/>
           </a:xfrm>
           <a:prstGeom prst="rect">
@@ -15643,7 +15231,7 @@
           <a:p>
             <a:pPr algn="l"/>
             <a:r>
-              <a:rPr sz="750" b="0">
+              <a:rPr sz="800" b="0">
                 <a:solidFill>
                   <a:srgbClr val="1A1A1A"/>
                 </a:solidFill>
@@ -15656,13 +15244,13 @@
       </p:sp>
       <p:sp>
         <p:nvSpPr>
-          <p:cNvPr id="13" name="Rectangle 12"/>
+          <p:cNvPr id="15" name="Rectangle 14"/>
           <p:cNvSpPr/>
           <p:nvPr/>
         </p:nvSpPr>
         <p:spPr>
           <a:xfrm>
-            <a:off x="3535591" y="1680210"/>
+            <a:off x="3657508" y="2366010"/>
             <a:ext cx="8290352" cy="534924"/>
           </a:xfrm>
           <a:prstGeom prst="rect">
@@ -15702,13 +15290,13 @@
       </p:sp>
       <p:sp>
         <p:nvSpPr>
-          <p:cNvPr id="14" name="TextBox 13"/>
-          <p:cNvSpPr txBox="1"/>
-          <p:nvPr/>
-        </p:nvSpPr>
-        <p:spPr>
-          <a:xfrm>
-            <a:off x="3535591" y="1707642"/>
+          <p:cNvPr id="16" name="TextBox 15"/>
+          <p:cNvSpPr txBox="1"/>
+          <p:nvPr/>
+        </p:nvSpPr>
+        <p:spPr>
+          <a:xfrm>
+            <a:off x="3657508" y="2393442"/>
             <a:ext cx="8290352" cy="480060"/>
           </a:xfrm>
           <a:prstGeom prst="rect">
@@ -15724,7 +15312,7 @@
           <a:p>
             <a:pPr algn="l"/>
             <a:r>
-              <a:rPr sz="750" b="0">
+              <a:rPr sz="800" b="0">
                 <a:solidFill>
                   <a:srgbClr val="1A1A1A"/>
                 </a:solidFill>
@@ -15737,7 +15325,7 @@
       </p:sp>
       <p:sp>
         <p:nvSpPr>
-          <p:cNvPr id="15" name="TextBox 14"/>
+          <p:cNvPr id="17" name="TextBox 16"/>
           <p:cNvSpPr txBox="1"/>
           <p:nvPr/>
         </p:nvSpPr>
@@ -15772,7 +15360,7 @@
       </p:sp>
       <p:sp>
         <p:nvSpPr>
-          <p:cNvPr id="16" name="TextBox 15"/>
+          <p:cNvPr id="18" name="TextBox 17"/>
           <p:cNvSpPr txBox="1"/>
           <p:nvPr/>
         </p:nvSpPr>
@@ -15831,42 +15419,77 @@
         </p:nvSpPr>
         <p:spPr>
           <a:xfrm>
-            <a:off x="365750" y="274320"/>
-            <a:ext cx="10972525" cy="480060"/>
-          </a:xfrm>
-          <a:prstGeom prst="rect">
-            <a:avLst/>
-          </a:prstGeom>
-          <a:noFill/>
-        </p:spPr>
-        <p:txBody>
-          <a:bodyPr wrap="square" lIns="36000" rIns="36000" tIns="18000" bIns="18000">
-            <a:spAutoFit/>
-          </a:bodyPr>
-          <a:lstStyle/>
-          <a:p>
-            <a:pPr algn="l"/>
-            <a:r>
-              <a:rPr sz="1700" b="1">
+            <a:off x="487667" y="137160"/>
+            <a:ext cx="7315017" cy="274320"/>
+          </a:xfrm>
+          <a:prstGeom prst="rect">
+            <a:avLst/>
+          </a:prstGeom>
+          <a:noFill/>
+        </p:spPr>
+        <p:txBody>
+          <a:bodyPr wrap="square" lIns="36000" rIns="36000" tIns="18000" bIns="18000">
+            <a:spAutoFit/>
+          </a:bodyPr>
+          <a:lstStyle/>
+          <a:p>
+            <a:pPr algn="l"/>
+            <a:r>
+              <a:rPr sz="900" b="0">
+                <a:solidFill>
+                  <a:srgbClr val="767676"/>
+                </a:solidFill>
+                <a:latin typeface="Pretendard"/>
+              </a:rPr>
+              <a:t>UX전략보고서</a:t>
+            </a:r>
+          </a:p>
+        </p:txBody>
+      </p:sp>
+      <p:sp>
+        <p:nvSpPr>
+          <p:cNvPr id="3" name="TextBox 2"/>
+          <p:cNvSpPr txBox="1"/>
+          <p:nvPr/>
+        </p:nvSpPr>
+        <p:spPr>
+          <a:xfrm>
+            <a:off x="487667" y="548640"/>
+            <a:ext cx="11216359" cy="548640"/>
+          </a:xfrm>
+          <a:prstGeom prst="rect">
+            <a:avLst/>
+          </a:prstGeom>
+          <a:noFill/>
+        </p:spPr>
+        <p:txBody>
+          <a:bodyPr wrap="square" lIns="36000" rIns="36000" tIns="18000" bIns="18000">
+            <a:spAutoFit/>
+          </a:bodyPr>
+          <a:lstStyle/>
+          <a:p>
+            <a:pPr algn="l"/>
+            <a:r>
+              <a:rPr sz="2400" b="1">
                 <a:solidFill>
                   <a:srgbClr val="1A1A1A"/>
                 </a:solidFill>
                 <a:latin typeface="Pretendard"/>
               </a:rPr>
-              <a:t>6. 비즈니스 가치·기대효과</a:t>
-            </a:r>
-          </a:p>
-        </p:txBody>
-      </p:sp>
-      <p:sp>
-        <p:nvSpPr>
-          <p:cNvPr id="3" name="Rectangle 2"/>
+              <a:t>비즈니스 가치·기대효과</a:t>
+            </a:r>
+          </a:p>
+        </p:txBody>
+      </p:sp>
+      <p:sp>
+        <p:nvSpPr>
+          <p:cNvPr id="4" name="Rectangle 3"/>
           <p:cNvSpPr/>
           <p:nvPr/>
         </p:nvSpPr>
         <p:spPr>
           <a:xfrm>
-            <a:off x="365750" y="891540"/>
+            <a:off x="487667" y="1234440"/>
             <a:ext cx="2804089" cy="377190"/>
           </a:xfrm>
           <a:prstGeom prst="rect">
@@ -15906,13 +15529,13 @@
       </p:sp>
       <p:sp>
         <p:nvSpPr>
-          <p:cNvPr id="4" name="TextBox 3"/>
-          <p:cNvSpPr txBox="1"/>
-          <p:nvPr/>
-        </p:nvSpPr>
-        <p:spPr>
-          <a:xfrm>
-            <a:off x="365750" y="946404"/>
+          <p:cNvPr id="5" name="TextBox 4"/>
+          <p:cNvSpPr txBox="1"/>
+          <p:nvPr/>
+        </p:nvSpPr>
+        <p:spPr>
+          <a:xfrm>
+            <a:off x="487667" y="1289304"/>
             <a:ext cx="2804089" cy="301752"/>
           </a:xfrm>
           <a:prstGeom prst="rect">
@@ -15941,13 +15564,13 @@
       </p:sp>
       <p:sp>
         <p:nvSpPr>
-          <p:cNvPr id="5" name="Rectangle 4"/>
+          <p:cNvPr id="6" name="Rectangle 5"/>
           <p:cNvSpPr/>
           <p:nvPr/>
         </p:nvSpPr>
         <p:spPr>
           <a:xfrm>
-            <a:off x="3169840" y="891540"/>
+            <a:off x="3291757" y="1234440"/>
             <a:ext cx="2804089" cy="377190"/>
           </a:xfrm>
           <a:prstGeom prst="rect">
@@ -15987,13 +15610,13 @@
       </p:sp>
       <p:sp>
         <p:nvSpPr>
-          <p:cNvPr id="6" name="TextBox 5"/>
-          <p:cNvSpPr txBox="1"/>
-          <p:nvPr/>
-        </p:nvSpPr>
-        <p:spPr>
-          <a:xfrm>
-            <a:off x="3169840" y="946404"/>
+          <p:cNvPr id="7" name="TextBox 6"/>
+          <p:cNvSpPr txBox="1"/>
+          <p:nvPr/>
+        </p:nvSpPr>
+        <p:spPr>
+          <a:xfrm>
+            <a:off x="3291757" y="1289304"/>
             <a:ext cx="2804089" cy="301752"/>
           </a:xfrm>
           <a:prstGeom prst="rect">
@@ -16022,13 +15645,13 @@
       </p:sp>
       <p:sp>
         <p:nvSpPr>
-          <p:cNvPr id="7" name="Rectangle 6"/>
+          <p:cNvPr id="8" name="Rectangle 7"/>
           <p:cNvSpPr/>
           <p:nvPr/>
         </p:nvSpPr>
         <p:spPr>
           <a:xfrm>
-            <a:off x="5973930" y="891540"/>
+            <a:off x="6095847" y="1234440"/>
             <a:ext cx="2804089" cy="377190"/>
           </a:xfrm>
           <a:prstGeom prst="rect">
@@ -16068,13 +15691,13 @@
       </p:sp>
       <p:sp>
         <p:nvSpPr>
-          <p:cNvPr id="8" name="TextBox 7"/>
-          <p:cNvSpPr txBox="1"/>
-          <p:nvPr/>
-        </p:nvSpPr>
-        <p:spPr>
-          <a:xfrm>
-            <a:off x="5973930" y="946404"/>
+          <p:cNvPr id="9" name="TextBox 8"/>
+          <p:cNvSpPr txBox="1"/>
+          <p:nvPr/>
+        </p:nvSpPr>
+        <p:spPr>
+          <a:xfrm>
+            <a:off x="6095847" y="1289304"/>
             <a:ext cx="2804089" cy="301752"/>
           </a:xfrm>
           <a:prstGeom prst="rect">
@@ -16103,13 +15726,13 @@
       </p:sp>
       <p:sp>
         <p:nvSpPr>
-          <p:cNvPr id="9" name="Rectangle 8"/>
+          <p:cNvPr id="10" name="Rectangle 9"/>
           <p:cNvSpPr/>
           <p:nvPr/>
         </p:nvSpPr>
         <p:spPr>
           <a:xfrm>
-            <a:off x="8778020" y="891540"/>
+            <a:off x="8899937" y="1234440"/>
             <a:ext cx="2804089" cy="377190"/>
           </a:xfrm>
           <a:prstGeom prst="rect">
@@ -16149,13 +15772,13 @@
       </p:sp>
       <p:sp>
         <p:nvSpPr>
-          <p:cNvPr id="10" name="TextBox 9"/>
-          <p:cNvSpPr txBox="1"/>
-          <p:nvPr/>
-        </p:nvSpPr>
-        <p:spPr>
-          <a:xfrm>
-            <a:off x="8778020" y="946404"/>
+          <p:cNvPr id="11" name="TextBox 10"/>
+          <p:cNvSpPr txBox="1"/>
+          <p:nvPr/>
+        </p:nvSpPr>
+        <p:spPr>
+          <a:xfrm>
+            <a:off x="8899937" y="1289304"/>
             <a:ext cx="2804089" cy="301752"/>
           </a:xfrm>
           <a:prstGeom prst="rect">
@@ -16184,13 +15807,13 @@
       </p:sp>
       <p:sp>
         <p:nvSpPr>
-          <p:cNvPr id="11" name="Rectangle 10"/>
+          <p:cNvPr id="12" name="Rectangle 11"/>
           <p:cNvSpPr/>
           <p:nvPr/>
         </p:nvSpPr>
         <p:spPr>
           <a:xfrm>
-            <a:off x="365750" y="1268730"/>
+            <a:off x="487667" y="1611630"/>
             <a:ext cx="2804089" cy="534924"/>
           </a:xfrm>
           <a:prstGeom prst="rect">
@@ -16230,13 +15853,13 @@
       </p:sp>
       <p:sp>
         <p:nvSpPr>
-          <p:cNvPr id="12" name="TextBox 11"/>
-          <p:cNvSpPr txBox="1"/>
-          <p:nvPr/>
-        </p:nvSpPr>
-        <p:spPr>
-          <a:xfrm>
-            <a:off x="365750" y="1296161"/>
+          <p:cNvPr id="13" name="TextBox 12"/>
+          <p:cNvSpPr txBox="1"/>
+          <p:nvPr/>
+        </p:nvSpPr>
+        <p:spPr>
+          <a:xfrm>
+            <a:off x="487667" y="1639062"/>
             <a:ext cx="2804089" cy="480060"/>
           </a:xfrm>
           <a:prstGeom prst="rect">
@@ -16252,7 +15875,7 @@
           <a:p>
             <a:pPr algn="l"/>
             <a:r>
-              <a:rPr sz="750" b="0">
+              <a:rPr sz="800" b="0">
                 <a:solidFill>
                   <a:srgbClr val="1A1A1A"/>
                 </a:solidFill>
@@ -16265,13 +15888,13 @@
       </p:sp>
       <p:sp>
         <p:nvSpPr>
-          <p:cNvPr id="13" name="Rectangle 12"/>
+          <p:cNvPr id="14" name="Rectangle 13"/>
           <p:cNvSpPr/>
           <p:nvPr/>
         </p:nvSpPr>
         <p:spPr>
           <a:xfrm>
-            <a:off x="3169840" y="1268730"/>
+            <a:off x="3291757" y="1611630"/>
             <a:ext cx="2804089" cy="534924"/>
           </a:xfrm>
           <a:prstGeom prst="rect">
@@ -16311,13 +15934,13 @@
       </p:sp>
       <p:sp>
         <p:nvSpPr>
-          <p:cNvPr id="14" name="TextBox 13"/>
-          <p:cNvSpPr txBox="1"/>
-          <p:nvPr/>
-        </p:nvSpPr>
-        <p:spPr>
-          <a:xfrm>
-            <a:off x="3169840" y="1296161"/>
+          <p:cNvPr id="15" name="TextBox 14"/>
+          <p:cNvSpPr txBox="1"/>
+          <p:nvPr/>
+        </p:nvSpPr>
+        <p:spPr>
+          <a:xfrm>
+            <a:off x="3291757" y="1639062"/>
             <a:ext cx="2804089" cy="480060"/>
           </a:xfrm>
           <a:prstGeom prst="rect">
@@ -16333,7 +15956,7 @@
           <a:p>
             <a:pPr algn="l"/>
             <a:r>
-              <a:rPr sz="750" b="0">
+              <a:rPr sz="800" b="0">
                 <a:solidFill>
                   <a:srgbClr val="1A1A1A"/>
                 </a:solidFill>
@@ -16346,13 +15969,13 @@
       </p:sp>
       <p:sp>
         <p:nvSpPr>
-          <p:cNvPr id="15" name="Rectangle 14"/>
+          <p:cNvPr id="16" name="Rectangle 15"/>
           <p:cNvSpPr/>
           <p:nvPr/>
         </p:nvSpPr>
         <p:spPr>
           <a:xfrm>
-            <a:off x="5973930" y="1268730"/>
+            <a:off x="6095847" y="1611630"/>
             <a:ext cx="2804089" cy="534924"/>
           </a:xfrm>
           <a:prstGeom prst="rect">
@@ -16392,13 +16015,13 @@
       </p:sp>
       <p:sp>
         <p:nvSpPr>
-          <p:cNvPr id="16" name="TextBox 15"/>
-          <p:cNvSpPr txBox="1"/>
-          <p:nvPr/>
-        </p:nvSpPr>
-        <p:spPr>
-          <a:xfrm>
-            <a:off x="5973930" y="1296161"/>
+          <p:cNvPr id="17" name="TextBox 16"/>
+          <p:cNvSpPr txBox="1"/>
+          <p:nvPr/>
+        </p:nvSpPr>
+        <p:spPr>
+          <a:xfrm>
+            <a:off x="6095847" y="1639062"/>
             <a:ext cx="2804089" cy="480060"/>
           </a:xfrm>
           <a:prstGeom prst="rect">
@@ -16414,7 +16037,7 @@
           <a:p>
             <a:pPr algn="l"/>
             <a:r>
-              <a:rPr sz="750" b="0">
+              <a:rPr sz="800" b="0">
                 <a:solidFill>
                   <a:srgbClr val="1A1A1A"/>
                 </a:solidFill>
@@ -16427,13 +16050,13 @@
       </p:sp>
       <p:sp>
         <p:nvSpPr>
-          <p:cNvPr id="17" name="Rectangle 16"/>
+          <p:cNvPr id="18" name="Rectangle 17"/>
           <p:cNvSpPr/>
           <p:nvPr/>
         </p:nvSpPr>
         <p:spPr>
           <a:xfrm>
-            <a:off x="8778020" y="1268730"/>
+            <a:off x="8899937" y="1611630"/>
             <a:ext cx="2804089" cy="534924"/>
           </a:xfrm>
           <a:prstGeom prst="rect">
@@ -16473,13 +16096,13 @@
       </p:sp>
       <p:sp>
         <p:nvSpPr>
-          <p:cNvPr id="18" name="TextBox 17"/>
-          <p:cNvSpPr txBox="1"/>
-          <p:nvPr/>
-        </p:nvSpPr>
-        <p:spPr>
-          <a:xfrm>
-            <a:off x="8778020" y="1296161"/>
+          <p:cNvPr id="19" name="TextBox 18"/>
+          <p:cNvSpPr txBox="1"/>
+          <p:nvPr/>
+        </p:nvSpPr>
+        <p:spPr>
+          <a:xfrm>
+            <a:off x="8899937" y="1639062"/>
             <a:ext cx="2804089" cy="480060"/>
           </a:xfrm>
           <a:prstGeom prst="rect">
@@ -16495,7 +16118,7 @@
           <a:p>
             <a:pPr algn="l"/>
             <a:r>
-              <a:rPr sz="750" b="0">
+              <a:rPr sz="800" b="0">
                 <a:solidFill>
                   <a:srgbClr val="1A1A1A"/>
                 </a:solidFill>
@@ -16508,13 +16131,13 @@
       </p:sp>
       <p:sp>
         <p:nvSpPr>
-          <p:cNvPr id="19" name="Rectangle 18"/>
+          <p:cNvPr id="20" name="Rectangle 19"/>
           <p:cNvSpPr/>
           <p:nvPr/>
         </p:nvSpPr>
         <p:spPr>
           <a:xfrm>
-            <a:off x="365750" y="1803654"/>
+            <a:off x="487667" y="2146554"/>
             <a:ext cx="2804089" cy="534924"/>
           </a:xfrm>
           <a:prstGeom prst="rect">
@@ -16554,13 +16177,13 @@
       </p:sp>
       <p:sp>
         <p:nvSpPr>
-          <p:cNvPr id="20" name="TextBox 19"/>
-          <p:cNvSpPr txBox="1"/>
-          <p:nvPr/>
-        </p:nvSpPr>
-        <p:spPr>
-          <a:xfrm>
-            <a:off x="365750" y="1831086"/>
+          <p:cNvPr id="21" name="TextBox 20"/>
+          <p:cNvSpPr txBox="1"/>
+          <p:nvPr/>
+        </p:nvSpPr>
+        <p:spPr>
+          <a:xfrm>
+            <a:off x="487667" y="2173986"/>
             <a:ext cx="2804089" cy="480060"/>
           </a:xfrm>
           <a:prstGeom prst="rect">
@@ -16576,7 +16199,7 @@
           <a:p>
             <a:pPr algn="l"/>
             <a:r>
-              <a:rPr sz="750" b="0">
+              <a:rPr sz="800" b="0">
                 <a:solidFill>
                   <a:srgbClr val="1A1A1A"/>
                 </a:solidFill>
@@ -16589,13 +16212,13 @@
       </p:sp>
       <p:sp>
         <p:nvSpPr>
-          <p:cNvPr id="21" name="Rectangle 20"/>
+          <p:cNvPr id="22" name="Rectangle 21"/>
           <p:cNvSpPr/>
           <p:nvPr/>
         </p:nvSpPr>
         <p:spPr>
           <a:xfrm>
-            <a:off x="3169840" y="1803654"/>
+            <a:off x="3291757" y="2146554"/>
             <a:ext cx="2804089" cy="534924"/>
           </a:xfrm>
           <a:prstGeom prst="rect">
@@ -16635,13 +16258,13 @@
       </p:sp>
       <p:sp>
         <p:nvSpPr>
-          <p:cNvPr id="22" name="TextBox 21"/>
-          <p:cNvSpPr txBox="1"/>
-          <p:nvPr/>
-        </p:nvSpPr>
-        <p:spPr>
-          <a:xfrm>
-            <a:off x="3169840" y="1831086"/>
+          <p:cNvPr id="23" name="TextBox 22"/>
+          <p:cNvSpPr txBox="1"/>
+          <p:nvPr/>
+        </p:nvSpPr>
+        <p:spPr>
+          <a:xfrm>
+            <a:off x="3291757" y="2173986"/>
             <a:ext cx="2804089" cy="480060"/>
           </a:xfrm>
           <a:prstGeom prst="rect">
@@ -16657,7 +16280,7 @@
           <a:p>
             <a:pPr algn="l"/>
             <a:r>
-              <a:rPr sz="750" b="0">
+              <a:rPr sz="800" b="0">
                 <a:solidFill>
                   <a:srgbClr val="1A1A1A"/>
                 </a:solidFill>
@@ -16670,13 +16293,13 @@
       </p:sp>
       <p:sp>
         <p:nvSpPr>
-          <p:cNvPr id="23" name="Rectangle 22"/>
+          <p:cNvPr id="24" name="Rectangle 23"/>
           <p:cNvSpPr/>
           <p:nvPr/>
         </p:nvSpPr>
         <p:spPr>
           <a:xfrm>
-            <a:off x="5973930" y="1803654"/>
+            <a:off x="6095847" y="2146554"/>
             <a:ext cx="2804089" cy="534924"/>
           </a:xfrm>
           <a:prstGeom prst="rect">
@@ -16716,13 +16339,13 @@
       </p:sp>
       <p:sp>
         <p:nvSpPr>
-          <p:cNvPr id="24" name="TextBox 23"/>
-          <p:cNvSpPr txBox="1"/>
-          <p:nvPr/>
-        </p:nvSpPr>
-        <p:spPr>
-          <a:xfrm>
-            <a:off x="5973930" y="1831086"/>
+          <p:cNvPr id="25" name="TextBox 24"/>
+          <p:cNvSpPr txBox="1"/>
+          <p:nvPr/>
+        </p:nvSpPr>
+        <p:spPr>
+          <a:xfrm>
+            <a:off x="6095847" y="2173986"/>
             <a:ext cx="2804089" cy="480060"/>
           </a:xfrm>
           <a:prstGeom prst="rect">
@@ -16738,7 +16361,7 @@
           <a:p>
             <a:pPr algn="l"/>
             <a:r>
-              <a:rPr sz="750" b="0">
+              <a:rPr sz="800" b="0">
                 <a:solidFill>
                   <a:srgbClr val="1A1A1A"/>
                 </a:solidFill>
@@ -16751,13 +16374,13 @@
       </p:sp>
       <p:sp>
         <p:nvSpPr>
-          <p:cNvPr id="25" name="Rectangle 24"/>
+          <p:cNvPr id="26" name="Rectangle 25"/>
           <p:cNvSpPr/>
           <p:nvPr/>
         </p:nvSpPr>
         <p:spPr>
           <a:xfrm>
-            <a:off x="8778020" y="1803654"/>
+            <a:off x="8899937" y="2146554"/>
             <a:ext cx="2804089" cy="534924"/>
           </a:xfrm>
           <a:prstGeom prst="rect">
@@ -16797,13 +16420,13 @@
       </p:sp>
       <p:sp>
         <p:nvSpPr>
-          <p:cNvPr id="26" name="TextBox 25"/>
-          <p:cNvSpPr txBox="1"/>
-          <p:nvPr/>
-        </p:nvSpPr>
-        <p:spPr>
-          <a:xfrm>
-            <a:off x="8778020" y="1831086"/>
+          <p:cNvPr id="27" name="TextBox 26"/>
+          <p:cNvSpPr txBox="1"/>
+          <p:nvPr/>
+        </p:nvSpPr>
+        <p:spPr>
+          <a:xfrm>
+            <a:off x="8899937" y="2173986"/>
             <a:ext cx="2804089" cy="480060"/>
           </a:xfrm>
           <a:prstGeom prst="rect">
@@ -16819,7 +16442,7 @@
           <a:p>
             <a:pPr algn="l"/>
             <a:r>
-              <a:rPr sz="750" b="0">
+              <a:rPr sz="800" b="0">
                 <a:solidFill>
                   <a:srgbClr val="1A1A1A"/>
                 </a:solidFill>
@@ -16832,13 +16455,13 @@
       </p:sp>
       <p:sp>
         <p:nvSpPr>
-          <p:cNvPr id="27" name="Rectangle 26"/>
+          <p:cNvPr id="28" name="Rectangle 27"/>
           <p:cNvSpPr/>
           <p:nvPr/>
         </p:nvSpPr>
         <p:spPr>
           <a:xfrm>
-            <a:off x="365750" y="2338578"/>
+            <a:off x="487667" y="2681478"/>
             <a:ext cx="2804089" cy="534924"/>
           </a:xfrm>
           <a:prstGeom prst="rect">
@@ -16878,13 +16501,13 @@
       </p:sp>
       <p:sp>
         <p:nvSpPr>
-          <p:cNvPr id="28" name="TextBox 27"/>
-          <p:cNvSpPr txBox="1"/>
-          <p:nvPr/>
-        </p:nvSpPr>
-        <p:spPr>
-          <a:xfrm>
-            <a:off x="365750" y="2366010"/>
+          <p:cNvPr id="29" name="TextBox 28"/>
+          <p:cNvSpPr txBox="1"/>
+          <p:nvPr/>
+        </p:nvSpPr>
+        <p:spPr>
+          <a:xfrm>
+            <a:off x="487667" y="2708910"/>
             <a:ext cx="2804089" cy="480060"/>
           </a:xfrm>
           <a:prstGeom prst="rect">
@@ -16900,7 +16523,7 @@
           <a:p>
             <a:pPr algn="l"/>
             <a:r>
-              <a:rPr sz="750" b="0">
+              <a:rPr sz="800" b="0">
                 <a:solidFill>
                   <a:srgbClr val="1A1A1A"/>
                 </a:solidFill>
@@ -16913,13 +16536,13 @@
       </p:sp>
       <p:sp>
         <p:nvSpPr>
-          <p:cNvPr id="29" name="Rectangle 28"/>
+          <p:cNvPr id="30" name="Rectangle 29"/>
           <p:cNvSpPr/>
           <p:nvPr/>
         </p:nvSpPr>
         <p:spPr>
           <a:xfrm>
-            <a:off x="3169840" y="2338578"/>
+            <a:off x="3291757" y="2681478"/>
             <a:ext cx="2804089" cy="534924"/>
           </a:xfrm>
           <a:prstGeom prst="rect">
@@ -16959,13 +16582,13 @@
       </p:sp>
       <p:sp>
         <p:nvSpPr>
-          <p:cNvPr id="30" name="TextBox 29"/>
-          <p:cNvSpPr txBox="1"/>
-          <p:nvPr/>
-        </p:nvSpPr>
-        <p:spPr>
-          <a:xfrm>
-            <a:off x="3169840" y="2366010"/>
+          <p:cNvPr id="31" name="TextBox 30"/>
+          <p:cNvSpPr txBox="1"/>
+          <p:nvPr/>
+        </p:nvSpPr>
+        <p:spPr>
+          <a:xfrm>
+            <a:off x="3291757" y="2708910"/>
             <a:ext cx="2804089" cy="480060"/>
           </a:xfrm>
           <a:prstGeom prst="rect">
@@ -16981,7 +16604,7 @@
           <a:p>
             <a:pPr algn="l"/>
             <a:r>
-              <a:rPr sz="750" b="0">
+              <a:rPr sz="800" b="0">
                 <a:solidFill>
                   <a:srgbClr val="1A1A1A"/>
                 </a:solidFill>
@@ -16994,13 +16617,13 @@
       </p:sp>
       <p:sp>
         <p:nvSpPr>
-          <p:cNvPr id="31" name="Rectangle 30"/>
+          <p:cNvPr id="32" name="Rectangle 31"/>
           <p:cNvSpPr/>
           <p:nvPr/>
         </p:nvSpPr>
         <p:spPr>
           <a:xfrm>
-            <a:off x="5973930" y="2338578"/>
+            <a:off x="6095847" y="2681478"/>
             <a:ext cx="2804089" cy="534924"/>
           </a:xfrm>
           <a:prstGeom prst="rect">
@@ -17040,13 +16663,13 @@
       </p:sp>
       <p:sp>
         <p:nvSpPr>
-          <p:cNvPr id="32" name="TextBox 31"/>
-          <p:cNvSpPr txBox="1"/>
-          <p:nvPr/>
-        </p:nvSpPr>
-        <p:spPr>
-          <a:xfrm>
-            <a:off x="5973930" y="2366010"/>
+          <p:cNvPr id="33" name="TextBox 32"/>
+          <p:cNvSpPr txBox="1"/>
+          <p:nvPr/>
+        </p:nvSpPr>
+        <p:spPr>
+          <a:xfrm>
+            <a:off x="6095847" y="2708910"/>
             <a:ext cx="2804089" cy="480060"/>
           </a:xfrm>
           <a:prstGeom prst="rect">
@@ -17062,7 +16685,7 @@
           <a:p>
             <a:pPr algn="l"/>
             <a:r>
-              <a:rPr sz="750" b="0">
+              <a:rPr sz="800" b="0">
                 <a:solidFill>
                   <a:srgbClr val="1A1A1A"/>
                 </a:solidFill>
@@ -17075,13 +16698,13 @@
       </p:sp>
       <p:sp>
         <p:nvSpPr>
-          <p:cNvPr id="33" name="Rectangle 32"/>
+          <p:cNvPr id="34" name="Rectangle 33"/>
           <p:cNvSpPr/>
           <p:nvPr/>
         </p:nvSpPr>
         <p:spPr>
           <a:xfrm>
-            <a:off x="8778020" y="2338578"/>
+            <a:off x="8899937" y="2681478"/>
             <a:ext cx="2804089" cy="534924"/>
           </a:xfrm>
           <a:prstGeom prst="rect">
@@ -17121,13 +16744,13 @@
       </p:sp>
       <p:sp>
         <p:nvSpPr>
-          <p:cNvPr id="34" name="TextBox 33"/>
-          <p:cNvSpPr txBox="1"/>
-          <p:nvPr/>
-        </p:nvSpPr>
-        <p:spPr>
-          <a:xfrm>
-            <a:off x="8778020" y="2366010"/>
+          <p:cNvPr id="35" name="TextBox 34"/>
+          <p:cNvSpPr txBox="1"/>
+          <p:nvPr/>
+        </p:nvSpPr>
+        <p:spPr>
+          <a:xfrm>
+            <a:off x="8899937" y="2708910"/>
             <a:ext cx="2804089" cy="480060"/>
           </a:xfrm>
           <a:prstGeom prst="rect">
@@ -17143,7 +16766,7 @@
           <a:p>
             <a:pPr algn="l"/>
             <a:r>
-              <a:rPr sz="750" b="0">
+              <a:rPr sz="800" b="0">
                 <a:solidFill>
                   <a:srgbClr val="1A1A1A"/>
                 </a:solidFill>
@@ -17156,13 +16779,13 @@
       </p:sp>
       <p:sp>
         <p:nvSpPr>
-          <p:cNvPr id="35" name="Rectangle 34"/>
+          <p:cNvPr id="36" name="Rectangle 35"/>
           <p:cNvSpPr/>
           <p:nvPr/>
         </p:nvSpPr>
         <p:spPr>
           <a:xfrm>
-            <a:off x="365750" y="2873502"/>
+            <a:off x="487667" y="3216402"/>
             <a:ext cx="2804089" cy="411480"/>
           </a:xfrm>
           <a:prstGeom prst="rect">
@@ -17202,13 +16825,13 @@
       </p:sp>
       <p:sp>
         <p:nvSpPr>
-          <p:cNvPr id="36" name="TextBox 35"/>
-          <p:cNvSpPr txBox="1"/>
-          <p:nvPr/>
-        </p:nvSpPr>
-        <p:spPr>
-          <a:xfrm>
-            <a:off x="365750" y="2900934"/>
+          <p:cNvPr id="37" name="TextBox 36"/>
+          <p:cNvSpPr txBox="1"/>
+          <p:nvPr/>
+        </p:nvSpPr>
+        <p:spPr>
+          <a:xfrm>
+            <a:off x="487667" y="3243834"/>
             <a:ext cx="2804089" cy="356616"/>
           </a:xfrm>
           <a:prstGeom prst="rect">
@@ -17224,7 +16847,7 @@
           <a:p>
             <a:pPr algn="l"/>
             <a:r>
-              <a:rPr sz="750" b="0">
+              <a:rPr sz="800" b="0">
                 <a:solidFill>
                   <a:srgbClr val="1A1A1A"/>
                 </a:solidFill>
@@ -17237,13 +16860,13 @@
       </p:sp>
       <p:sp>
         <p:nvSpPr>
-          <p:cNvPr id="37" name="Rectangle 36"/>
+          <p:cNvPr id="38" name="Rectangle 37"/>
           <p:cNvSpPr/>
           <p:nvPr/>
         </p:nvSpPr>
         <p:spPr>
           <a:xfrm>
-            <a:off x="3169840" y="2873502"/>
+            <a:off x="3291757" y="3216402"/>
             <a:ext cx="2804089" cy="411480"/>
           </a:xfrm>
           <a:prstGeom prst="rect">
@@ -17283,13 +16906,13 @@
       </p:sp>
       <p:sp>
         <p:nvSpPr>
-          <p:cNvPr id="38" name="TextBox 37"/>
-          <p:cNvSpPr txBox="1"/>
-          <p:nvPr/>
-        </p:nvSpPr>
-        <p:spPr>
-          <a:xfrm>
-            <a:off x="3169840" y="2900934"/>
+          <p:cNvPr id="39" name="TextBox 38"/>
+          <p:cNvSpPr txBox="1"/>
+          <p:nvPr/>
+        </p:nvSpPr>
+        <p:spPr>
+          <a:xfrm>
+            <a:off x="3291757" y="3243834"/>
             <a:ext cx="2804089" cy="356616"/>
           </a:xfrm>
           <a:prstGeom prst="rect">
@@ -17305,7 +16928,7 @@
           <a:p>
             <a:pPr algn="l"/>
             <a:r>
-              <a:rPr sz="750" b="0">
+              <a:rPr sz="800" b="0">
                 <a:solidFill>
                   <a:srgbClr val="1A1A1A"/>
                 </a:solidFill>
@@ -17318,13 +16941,13 @@
       </p:sp>
       <p:sp>
         <p:nvSpPr>
-          <p:cNvPr id="39" name="Rectangle 38"/>
+          <p:cNvPr id="40" name="Rectangle 39"/>
           <p:cNvSpPr/>
           <p:nvPr/>
         </p:nvSpPr>
         <p:spPr>
           <a:xfrm>
-            <a:off x="5973930" y="2873502"/>
+            <a:off x="6095847" y="3216402"/>
             <a:ext cx="2804089" cy="411480"/>
           </a:xfrm>
           <a:prstGeom prst="rect">
@@ -17364,13 +16987,13 @@
       </p:sp>
       <p:sp>
         <p:nvSpPr>
-          <p:cNvPr id="40" name="TextBox 39"/>
-          <p:cNvSpPr txBox="1"/>
-          <p:nvPr/>
-        </p:nvSpPr>
-        <p:spPr>
-          <a:xfrm>
-            <a:off x="5973930" y="2900934"/>
+          <p:cNvPr id="41" name="TextBox 40"/>
+          <p:cNvSpPr txBox="1"/>
+          <p:nvPr/>
+        </p:nvSpPr>
+        <p:spPr>
+          <a:xfrm>
+            <a:off x="6095847" y="3243834"/>
             <a:ext cx="2804089" cy="356616"/>
           </a:xfrm>
           <a:prstGeom prst="rect">
@@ -17386,7 +17009,7 @@
           <a:p>
             <a:pPr algn="l"/>
             <a:r>
-              <a:rPr sz="750" b="0">
+              <a:rPr sz="800" b="0">
                 <a:solidFill>
                   <a:srgbClr val="1A1A1A"/>
                 </a:solidFill>
@@ -17399,13 +17022,13 @@
       </p:sp>
       <p:sp>
         <p:nvSpPr>
-          <p:cNvPr id="41" name="Rectangle 40"/>
+          <p:cNvPr id="42" name="Rectangle 41"/>
           <p:cNvSpPr/>
           <p:nvPr/>
         </p:nvSpPr>
         <p:spPr>
           <a:xfrm>
-            <a:off x="8778020" y="2873502"/>
+            <a:off x="8899937" y="3216402"/>
             <a:ext cx="2804089" cy="411480"/>
           </a:xfrm>
           <a:prstGeom prst="rect">
@@ -17445,13 +17068,13 @@
       </p:sp>
       <p:sp>
         <p:nvSpPr>
-          <p:cNvPr id="42" name="TextBox 41"/>
-          <p:cNvSpPr txBox="1"/>
-          <p:nvPr/>
-        </p:nvSpPr>
-        <p:spPr>
-          <a:xfrm>
-            <a:off x="8778020" y="2900934"/>
+          <p:cNvPr id="43" name="TextBox 42"/>
+          <p:cNvSpPr txBox="1"/>
+          <p:nvPr/>
+        </p:nvSpPr>
+        <p:spPr>
+          <a:xfrm>
+            <a:off x="8899937" y="3243834"/>
             <a:ext cx="2804089" cy="356616"/>
           </a:xfrm>
           <a:prstGeom prst="rect">
@@ -17467,7 +17090,7 @@
           <a:p>
             <a:pPr algn="l"/>
             <a:r>
-              <a:rPr sz="750" b="0">
+              <a:rPr sz="800" b="0">
                 <a:solidFill>
                   <a:srgbClr val="1A1A1A"/>
                 </a:solidFill>
@@ -17480,13 +17103,13 @@
       </p:sp>
       <p:sp>
         <p:nvSpPr>
-          <p:cNvPr id="43" name="Rectangle 42"/>
+          <p:cNvPr id="44" name="Rectangle 43"/>
           <p:cNvSpPr/>
           <p:nvPr/>
         </p:nvSpPr>
         <p:spPr>
           <a:xfrm>
-            <a:off x="365750" y="3284982"/>
+            <a:off x="487667" y="3627882"/>
             <a:ext cx="2804089" cy="534924"/>
           </a:xfrm>
           <a:prstGeom prst="rect">
@@ -17526,13 +17149,13 @@
       </p:sp>
       <p:sp>
         <p:nvSpPr>
-          <p:cNvPr id="44" name="TextBox 43"/>
-          <p:cNvSpPr txBox="1"/>
-          <p:nvPr/>
-        </p:nvSpPr>
-        <p:spPr>
-          <a:xfrm>
-            <a:off x="365750" y="3312414"/>
+          <p:cNvPr id="45" name="TextBox 44"/>
+          <p:cNvSpPr txBox="1"/>
+          <p:nvPr/>
+        </p:nvSpPr>
+        <p:spPr>
+          <a:xfrm>
+            <a:off x="487667" y="3655314"/>
             <a:ext cx="2804089" cy="480060"/>
           </a:xfrm>
           <a:prstGeom prst="rect">
@@ -17548,7 +17171,7 @@
           <a:p>
             <a:pPr algn="l"/>
             <a:r>
-              <a:rPr sz="750" b="0">
+              <a:rPr sz="800" b="0">
                 <a:solidFill>
                   <a:srgbClr val="1A1A1A"/>
                 </a:solidFill>
@@ -17561,13 +17184,13 @@
       </p:sp>
       <p:sp>
         <p:nvSpPr>
-          <p:cNvPr id="45" name="Rectangle 44"/>
+          <p:cNvPr id="46" name="Rectangle 45"/>
           <p:cNvSpPr/>
           <p:nvPr/>
         </p:nvSpPr>
         <p:spPr>
           <a:xfrm>
-            <a:off x="3169840" y="3284982"/>
+            <a:off x="3291757" y="3627882"/>
             <a:ext cx="2804089" cy="534924"/>
           </a:xfrm>
           <a:prstGeom prst="rect">
@@ -17607,13 +17230,13 @@
       </p:sp>
       <p:sp>
         <p:nvSpPr>
-          <p:cNvPr id="46" name="TextBox 45"/>
-          <p:cNvSpPr txBox="1"/>
-          <p:nvPr/>
-        </p:nvSpPr>
-        <p:spPr>
-          <a:xfrm>
-            <a:off x="3169840" y="3312414"/>
+          <p:cNvPr id="47" name="TextBox 46"/>
+          <p:cNvSpPr txBox="1"/>
+          <p:nvPr/>
+        </p:nvSpPr>
+        <p:spPr>
+          <a:xfrm>
+            <a:off x="3291757" y="3655314"/>
             <a:ext cx="2804089" cy="480060"/>
           </a:xfrm>
           <a:prstGeom prst="rect">
@@ -17629,7 +17252,7 @@
           <a:p>
             <a:pPr algn="l"/>
             <a:r>
-              <a:rPr sz="750" b="0">
+              <a:rPr sz="800" b="0">
                 <a:solidFill>
                   <a:srgbClr val="1A1A1A"/>
                 </a:solidFill>
@@ -17642,13 +17265,13 @@
       </p:sp>
       <p:sp>
         <p:nvSpPr>
-          <p:cNvPr id="47" name="Rectangle 46"/>
+          <p:cNvPr id="48" name="Rectangle 47"/>
           <p:cNvSpPr/>
           <p:nvPr/>
         </p:nvSpPr>
         <p:spPr>
           <a:xfrm>
-            <a:off x="5973930" y="3284982"/>
+            <a:off x="6095847" y="3627882"/>
             <a:ext cx="2804089" cy="534924"/>
           </a:xfrm>
           <a:prstGeom prst="rect">
@@ -17688,13 +17311,13 @@
       </p:sp>
       <p:sp>
         <p:nvSpPr>
-          <p:cNvPr id="48" name="TextBox 47"/>
-          <p:cNvSpPr txBox="1"/>
-          <p:nvPr/>
-        </p:nvSpPr>
-        <p:spPr>
-          <a:xfrm>
-            <a:off x="5973930" y="3312414"/>
+          <p:cNvPr id="49" name="TextBox 48"/>
+          <p:cNvSpPr txBox="1"/>
+          <p:nvPr/>
+        </p:nvSpPr>
+        <p:spPr>
+          <a:xfrm>
+            <a:off x="6095847" y="3655314"/>
             <a:ext cx="2804089" cy="480060"/>
           </a:xfrm>
           <a:prstGeom prst="rect">
@@ -17710,7 +17333,7 @@
           <a:p>
             <a:pPr algn="l"/>
             <a:r>
-              <a:rPr sz="750" b="0">
+              <a:rPr sz="800" b="0">
                 <a:solidFill>
                   <a:srgbClr val="1A1A1A"/>
                 </a:solidFill>
@@ -17723,13 +17346,13 @@
       </p:sp>
       <p:sp>
         <p:nvSpPr>
-          <p:cNvPr id="49" name="Rectangle 48"/>
+          <p:cNvPr id="50" name="Rectangle 49"/>
           <p:cNvSpPr/>
           <p:nvPr/>
         </p:nvSpPr>
         <p:spPr>
           <a:xfrm>
-            <a:off x="8778020" y="3284982"/>
+            <a:off x="8899937" y="3627882"/>
             <a:ext cx="2804089" cy="534924"/>
           </a:xfrm>
           <a:prstGeom prst="rect">
@@ -17769,13 +17392,13 @@
       </p:sp>
       <p:sp>
         <p:nvSpPr>
-          <p:cNvPr id="50" name="TextBox 49"/>
-          <p:cNvSpPr txBox="1"/>
-          <p:nvPr/>
-        </p:nvSpPr>
-        <p:spPr>
-          <a:xfrm>
-            <a:off x="8778020" y="3312414"/>
+          <p:cNvPr id="51" name="TextBox 50"/>
+          <p:cNvSpPr txBox="1"/>
+          <p:nvPr/>
+        </p:nvSpPr>
+        <p:spPr>
+          <a:xfrm>
+            <a:off x="8899937" y="3655314"/>
             <a:ext cx="2804089" cy="480060"/>
           </a:xfrm>
           <a:prstGeom prst="rect">
@@ -17791,7 +17414,7 @@
           <a:p>
             <a:pPr algn="l"/>
             <a:r>
-              <a:rPr sz="750" b="0">
+              <a:rPr sz="800" b="0">
                 <a:solidFill>
                   <a:srgbClr val="1A1A1A"/>
                 </a:solidFill>
@@ -17804,7 +17427,7 @@
       </p:sp>
       <p:sp>
         <p:nvSpPr>
-          <p:cNvPr id="51" name="TextBox 50"/>
+          <p:cNvPr id="52" name="TextBox 51"/>
           <p:cNvSpPr txBox="1"/>
           <p:nvPr/>
         </p:nvSpPr>
@@ -17839,7 +17462,7 @@
       </p:sp>
       <p:sp>
         <p:nvSpPr>
-          <p:cNvPr id="52" name="TextBox 51"/>
+          <p:cNvPr id="53" name="TextBox 52"/>
           <p:cNvSpPr txBox="1"/>
           <p:nvPr/>
         </p:nvSpPr>
@@ -17898,42 +17521,77 @@
         </p:nvSpPr>
         <p:spPr>
           <a:xfrm>
-            <a:off x="365750" y="274320"/>
-            <a:ext cx="10972525" cy="480060"/>
-          </a:xfrm>
-          <a:prstGeom prst="rect">
-            <a:avLst/>
-          </a:prstGeom>
-          <a:noFill/>
-        </p:spPr>
-        <p:txBody>
-          <a:bodyPr wrap="square" lIns="36000" rIns="36000" tIns="18000" bIns="18000">
-            <a:spAutoFit/>
-          </a:bodyPr>
-          <a:lstStyle/>
-          <a:p>
-            <a:pPr algn="l"/>
-            <a:r>
-              <a:rPr sz="1700" b="1">
+            <a:off x="487667" y="137160"/>
+            <a:ext cx="7315017" cy="274320"/>
+          </a:xfrm>
+          <a:prstGeom prst="rect">
+            <a:avLst/>
+          </a:prstGeom>
+          <a:noFill/>
+        </p:spPr>
+        <p:txBody>
+          <a:bodyPr wrap="square" lIns="36000" rIns="36000" tIns="18000" bIns="18000">
+            <a:spAutoFit/>
+          </a:bodyPr>
+          <a:lstStyle/>
+          <a:p>
+            <a:pPr algn="l"/>
+            <a:r>
+              <a:rPr sz="900" b="0">
+                <a:solidFill>
+                  <a:srgbClr val="767676"/>
+                </a:solidFill>
+                <a:latin typeface="Pretendard"/>
+              </a:rPr>
+              <a:t>UX전략보고서</a:t>
+            </a:r>
+          </a:p>
+        </p:txBody>
+      </p:sp>
+      <p:sp>
+        <p:nvSpPr>
+          <p:cNvPr id="3" name="TextBox 2"/>
+          <p:cNvSpPr txBox="1"/>
+          <p:nvPr/>
+        </p:nvSpPr>
+        <p:spPr>
+          <a:xfrm>
+            <a:off x="487667" y="548640"/>
+            <a:ext cx="11216359" cy="548640"/>
+          </a:xfrm>
+          <a:prstGeom prst="rect">
+            <a:avLst/>
+          </a:prstGeom>
+          <a:noFill/>
+        </p:spPr>
+        <p:txBody>
+          <a:bodyPr wrap="square" lIns="36000" rIns="36000" tIns="18000" bIns="18000">
+            <a:spAutoFit/>
+          </a:bodyPr>
+          <a:lstStyle/>
+          <a:p>
+            <a:pPr algn="l"/>
+            <a:r>
+              <a:rPr sz="2400" b="1">
                 <a:solidFill>
                   <a:srgbClr val="1A1A1A"/>
                 </a:solidFill>
                 <a:latin typeface="Pretendard"/>
               </a:rPr>
-              <a:t>7. 이해관계자 우려·대응</a:t>
-            </a:r>
-          </a:p>
-        </p:txBody>
-      </p:sp>
-      <p:sp>
-        <p:nvSpPr>
-          <p:cNvPr id="3" name="Rectangle 2"/>
+              <a:t>이해관계자 우려·대응</a:t>
+            </a:r>
+          </a:p>
+        </p:txBody>
+      </p:sp>
+      <p:sp>
+        <p:nvSpPr>
+          <p:cNvPr id="4" name="Rectangle 3"/>
           <p:cNvSpPr/>
           <p:nvPr/>
         </p:nvSpPr>
         <p:spPr>
           <a:xfrm>
-            <a:off x="365750" y="891540"/>
+            <a:off x="487667" y="1234440"/>
             <a:ext cx="3169840" cy="377190"/>
           </a:xfrm>
           <a:prstGeom prst="rect">
@@ -17973,13 +17631,13 @@
       </p:sp>
       <p:sp>
         <p:nvSpPr>
-          <p:cNvPr id="4" name="TextBox 3"/>
-          <p:cNvSpPr txBox="1"/>
-          <p:nvPr/>
-        </p:nvSpPr>
-        <p:spPr>
-          <a:xfrm>
-            <a:off x="365750" y="946404"/>
+          <p:cNvPr id="5" name="TextBox 4"/>
+          <p:cNvSpPr txBox="1"/>
+          <p:nvPr/>
+        </p:nvSpPr>
+        <p:spPr>
+          <a:xfrm>
+            <a:off x="487667" y="1289304"/>
             <a:ext cx="3169840" cy="301752"/>
           </a:xfrm>
           <a:prstGeom prst="rect">
@@ -18008,13 +17666,13 @@
       </p:sp>
       <p:sp>
         <p:nvSpPr>
-          <p:cNvPr id="5" name="Rectangle 4"/>
+          <p:cNvPr id="6" name="Rectangle 5"/>
           <p:cNvSpPr/>
           <p:nvPr/>
         </p:nvSpPr>
         <p:spPr>
           <a:xfrm>
-            <a:off x="3535591" y="891540"/>
+            <a:off x="3657508" y="1234440"/>
             <a:ext cx="4145176" cy="377190"/>
           </a:xfrm>
           <a:prstGeom prst="rect">
@@ -18054,13 +17712,13 @@
       </p:sp>
       <p:sp>
         <p:nvSpPr>
-          <p:cNvPr id="6" name="TextBox 5"/>
-          <p:cNvSpPr txBox="1"/>
-          <p:nvPr/>
-        </p:nvSpPr>
-        <p:spPr>
-          <a:xfrm>
-            <a:off x="3535591" y="946404"/>
+          <p:cNvPr id="7" name="TextBox 6"/>
+          <p:cNvSpPr txBox="1"/>
+          <p:nvPr/>
+        </p:nvSpPr>
+        <p:spPr>
+          <a:xfrm>
+            <a:off x="3657508" y="1289304"/>
             <a:ext cx="4145176" cy="301752"/>
           </a:xfrm>
           <a:prstGeom prst="rect">
@@ -18089,13 +17747,13 @@
       </p:sp>
       <p:sp>
         <p:nvSpPr>
-          <p:cNvPr id="7" name="Rectangle 6"/>
+          <p:cNvPr id="8" name="Rectangle 7"/>
           <p:cNvSpPr/>
           <p:nvPr/>
         </p:nvSpPr>
         <p:spPr>
           <a:xfrm>
-            <a:off x="7680767" y="891540"/>
+            <a:off x="7802684" y="1234440"/>
             <a:ext cx="4145176" cy="377190"/>
           </a:xfrm>
           <a:prstGeom prst="rect">
@@ -18135,13 +17793,13 @@
       </p:sp>
       <p:sp>
         <p:nvSpPr>
-          <p:cNvPr id="8" name="TextBox 7"/>
-          <p:cNvSpPr txBox="1"/>
-          <p:nvPr/>
-        </p:nvSpPr>
-        <p:spPr>
-          <a:xfrm>
-            <a:off x="7680767" y="946404"/>
+          <p:cNvPr id="9" name="TextBox 8"/>
+          <p:cNvSpPr txBox="1"/>
+          <p:nvPr/>
+        </p:nvSpPr>
+        <p:spPr>
+          <a:xfrm>
+            <a:off x="7802684" y="1289304"/>
             <a:ext cx="4145176" cy="301752"/>
           </a:xfrm>
           <a:prstGeom prst="rect">
@@ -18170,13 +17828,13 @@
       </p:sp>
       <p:sp>
         <p:nvSpPr>
-          <p:cNvPr id="9" name="Rectangle 8"/>
+          <p:cNvPr id="10" name="Rectangle 9"/>
           <p:cNvSpPr/>
           <p:nvPr/>
         </p:nvSpPr>
         <p:spPr>
           <a:xfrm>
-            <a:off x="365750" y="1268730"/>
+            <a:off x="487667" y="1611630"/>
             <a:ext cx="3169840" cy="534924"/>
           </a:xfrm>
           <a:prstGeom prst="rect">
@@ -18216,13 +17874,13 @@
       </p:sp>
       <p:sp>
         <p:nvSpPr>
-          <p:cNvPr id="10" name="TextBox 9"/>
-          <p:cNvSpPr txBox="1"/>
-          <p:nvPr/>
-        </p:nvSpPr>
-        <p:spPr>
-          <a:xfrm>
-            <a:off x="365750" y="1296161"/>
+          <p:cNvPr id="11" name="TextBox 10"/>
+          <p:cNvSpPr txBox="1"/>
+          <p:nvPr/>
+        </p:nvSpPr>
+        <p:spPr>
+          <a:xfrm>
+            <a:off x="487667" y="1639062"/>
             <a:ext cx="3169840" cy="480060"/>
           </a:xfrm>
           <a:prstGeom prst="rect">
@@ -18238,7 +17896,7 @@
           <a:p>
             <a:pPr algn="l"/>
             <a:r>
-              <a:rPr sz="750" b="0">
+              <a:rPr sz="800" b="0">
                 <a:solidFill>
                   <a:srgbClr val="1A1A1A"/>
                 </a:solidFill>
@@ -18251,13 +17909,13 @@
       </p:sp>
       <p:sp>
         <p:nvSpPr>
-          <p:cNvPr id="11" name="Rectangle 10"/>
+          <p:cNvPr id="12" name="Rectangle 11"/>
           <p:cNvSpPr/>
           <p:nvPr/>
         </p:nvSpPr>
         <p:spPr>
           <a:xfrm>
-            <a:off x="3535591" y="1268730"/>
+            <a:off x="3657508" y="1611630"/>
             <a:ext cx="4145176" cy="534924"/>
           </a:xfrm>
           <a:prstGeom prst="rect">
@@ -18297,13 +17955,13 @@
       </p:sp>
       <p:sp>
         <p:nvSpPr>
-          <p:cNvPr id="12" name="TextBox 11"/>
-          <p:cNvSpPr txBox="1"/>
-          <p:nvPr/>
-        </p:nvSpPr>
-        <p:spPr>
-          <a:xfrm>
-            <a:off x="3535591" y="1296161"/>
+          <p:cNvPr id="13" name="TextBox 12"/>
+          <p:cNvSpPr txBox="1"/>
+          <p:nvPr/>
+        </p:nvSpPr>
+        <p:spPr>
+          <a:xfrm>
+            <a:off x="3657508" y="1639062"/>
             <a:ext cx="4145176" cy="480060"/>
           </a:xfrm>
           <a:prstGeom prst="rect">
@@ -18319,7 +17977,7 @@
           <a:p>
             <a:pPr algn="l"/>
             <a:r>
-              <a:rPr sz="750" b="0">
+              <a:rPr sz="800" b="0">
                 <a:solidFill>
                   <a:srgbClr val="1A1A1A"/>
                 </a:solidFill>
@@ -18332,13 +17990,13 @@
       </p:sp>
       <p:sp>
         <p:nvSpPr>
-          <p:cNvPr id="13" name="Rectangle 12"/>
+          <p:cNvPr id="14" name="Rectangle 13"/>
           <p:cNvSpPr/>
           <p:nvPr/>
         </p:nvSpPr>
         <p:spPr>
           <a:xfrm>
-            <a:off x="7680767" y="1268730"/>
+            <a:off x="7802684" y="1611630"/>
             <a:ext cx="4145176" cy="534924"/>
           </a:xfrm>
           <a:prstGeom prst="rect">
@@ -18378,13 +18036,13 @@
       </p:sp>
       <p:sp>
         <p:nvSpPr>
-          <p:cNvPr id="14" name="TextBox 13"/>
-          <p:cNvSpPr txBox="1"/>
-          <p:nvPr/>
-        </p:nvSpPr>
-        <p:spPr>
-          <a:xfrm>
-            <a:off x="7680767" y="1296161"/>
+          <p:cNvPr id="15" name="TextBox 14"/>
+          <p:cNvSpPr txBox="1"/>
+          <p:nvPr/>
+        </p:nvSpPr>
+        <p:spPr>
+          <a:xfrm>
+            <a:off x="7802684" y="1639062"/>
             <a:ext cx="4145176" cy="480060"/>
           </a:xfrm>
           <a:prstGeom prst="rect">
@@ -18400,7 +18058,7 @@
           <a:p>
             <a:pPr algn="l"/>
             <a:r>
-              <a:rPr sz="750" b="0">
+              <a:rPr sz="800" b="0">
                 <a:solidFill>
                   <a:srgbClr val="1A1A1A"/>
                 </a:solidFill>
@@ -18413,13 +18071,13 @@
       </p:sp>
       <p:sp>
         <p:nvSpPr>
-          <p:cNvPr id="15" name="Rectangle 14"/>
+          <p:cNvPr id="16" name="Rectangle 15"/>
           <p:cNvSpPr/>
           <p:nvPr/>
         </p:nvSpPr>
         <p:spPr>
           <a:xfrm>
-            <a:off x="365750" y="1803654"/>
+            <a:off x="487667" y="2146554"/>
             <a:ext cx="3169840" cy="699516"/>
           </a:xfrm>
           <a:prstGeom prst="rect">
@@ -18459,13 +18117,13 @@
       </p:sp>
       <p:sp>
         <p:nvSpPr>
-          <p:cNvPr id="16" name="TextBox 15"/>
-          <p:cNvSpPr txBox="1"/>
-          <p:nvPr/>
-        </p:nvSpPr>
-        <p:spPr>
-          <a:xfrm>
-            <a:off x="365750" y="1831086"/>
+          <p:cNvPr id="17" name="TextBox 16"/>
+          <p:cNvSpPr txBox="1"/>
+          <p:nvPr/>
+        </p:nvSpPr>
+        <p:spPr>
+          <a:xfrm>
+            <a:off x="487667" y="2173986"/>
             <a:ext cx="3169840" cy="644651"/>
           </a:xfrm>
           <a:prstGeom prst="rect">
@@ -18481,7 +18139,7 @@
           <a:p>
             <a:pPr algn="l"/>
             <a:r>
-              <a:rPr sz="750" b="0">
+              <a:rPr sz="800" b="0">
                 <a:solidFill>
                   <a:srgbClr val="1A1A1A"/>
                 </a:solidFill>
@@ -18494,13 +18152,13 @@
       </p:sp>
       <p:sp>
         <p:nvSpPr>
-          <p:cNvPr id="17" name="Rectangle 16"/>
+          <p:cNvPr id="18" name="Rectangle 17"/>
           <p:cNvSpPr/>
           <p:nvPr/>
         </p:nvSpPr>
         <p:spPr>
           <a:xfrm>
-            <a:off x="3535591" y="1803654"/>
+            <a:off x="3657508" y="2146554"/>
             <a:ext cx="4145176" cy="699516"/>
           </a:xfrm>
           <a:prstGeom prst="rect">
@@ -18540,13 +18198,13 @@
       </p:sp>
       <p:sp>
         <p:nvSpPr>
-          <p:cNvPr id="18" name="TextBox 17"/>
-          <p:cNvSpPr txBox="1"/>
-          <p:nvPr/>
-        </p:nvSpPr>
-        <p:spPr>
-          <a:xfrm>
-            <a:off x="3535591" y="1831086"/>
+          <p:cNvPr id="19" name="TextBox 18"/>
+          <p:cNvSpPr txBox="1"/>
+          <p:nvPr/>
+        </p:nvSpPr>
+        <p:spPr>
+          <a:xfrm>
+            <a:off x="3657508" y="2173986"/>
             <a:ext cx="4145176" cy="644651"/>
           </a:xfrm>
           <a:prstGeom prst="rect">
@@ -18562,7 +18220,7 @@
           <a:p>
             <a:pPr algn="l"/>
             <a:r>
-              <a:rPr sz="750" b="0">
+              <a:rPr sz="800" b="0">
                 <a:solidFill>
                   <a:srgbClr val="1A1A1A"/>
                 </a:solidFill>
@@ -18575,13 +18233,13 @@
       </p:sp>
       <p:sp>
         <p:nvSpPr>
-          <p:cNvPr id="19" name="Rectangle 18"/>
+          <p:cNvPr id="20" name="Rectangle 19"/>
           <p:cNvSpPr/>
           <p:nvPr/>
         </p:nvSpPr>
         <p:spPr>
           <a:xfrm>
-            <a:off x="7680767" y="1803654"/>
+            <a:off x="7802684" y="2146554"/>
             <a:ext cx="4145176" cy="699516"/>
           </a:xfrm>
           <a:prstGeom prst="rect">
@@ -18621,13 +18279,13 @@
       </p:sp>
       <p:sp>
         <p:nvSpPr>
-          <p:cNvPr id="20" name="TextBox 19"/>
-          <p:cNvSpPr txBox="1"/>
-          <p:nvPr/>
-        </p:nvSpPr>
-        <p:spPr>
-          <a:xfrm>
-            <a:off x="7680767" y="1831086"/>
+          <p:cNvPr id="21" name="TextBox 20"/>
+          <p:cNvSpPr txBox="1"/>
+          <p:nvPr/>
+        </p:nvSpPr>
+        <p:spPr>
+          <a:xfrm>
+            <a:off x="7802684" y="2173986"/>
             <a:ext cx="4145176" cy="644651"/>
           </a:xfrm>
           <a:prstGeom prst="rect">
@@ -18643,7 +18301,7 @@
           <a:p>
             <a:pPr algn="l"/>
             <a:r>
-              <a:rPr sz="750" b="0">
+              <a:rPr sz="800" b="0">
                 <a:solidFill>
                   <a:srgbClr val="1A1A1A"/>
                 </a:solidFill>
@@ -18656,13 +18314,13 @@
       </p:sp>
       <p:sp>
         <p:nvSpPr>
-          <p:cNvPr id="21" name="Rectangle 20"/>
+          <p:cNvPr id="22" name="Rectangle 21"/>
           <p:cNvSpPr/>
           <p:nvPr/>
         </p:nvSpPr>
         <p:spPr>
           <a:xfrm>
-            <a:off x="365750" y="2503170"/>
+            <a:off x="487667" y="2846070"/>
             <a:ext cx="3169840" cy="699516"/>
           </a:xfrm>
           <a:prstGeom prst="rect">
@@ -18702,13 +18360,13 @@
       </p:sp>
       <p:sp>
         <p:nvSpPr>
-          <p:cNvPr id="22" name="TextBox 21"/>
-          <p:cNvSpPr txBox="1"/>
-          <p:nvPr/>
-        </p:nvSpPr>
-        <p:spPr>
-          <a:xfrm>
-            <a:off x="365750" y="2530602"/>
+          <p:cNvPr id="23" name="TextBox 22"/>
+          <p:cNvSpPr txBox="1"/>
+          <p:nvPr/>
+        </p:nvSpPr>
+        <p:spPr>
+          <a:xfrm>
+            <a:off x="487667" y="2873502"/>
             <a:ext cx="3169840" cy="644651"/>
           </a:xfrm>
           <a:prstGeom prst="rect">
@@ -18724,7 +18382,7 @@
           <a:p>
             <a:pPr algn="l"/>
             <a:r>
-              <a:rPr sz="750" b="0">
+              <a:rPr sz="800" b="0">
                 <a:solidFill>
                   <a:srgbClr val="1A1A1A"/>
                 </a:solidFill>
@@ -18737,13 +18395,13 @@
       </p:sp>
       <p:sp>
         <p:nvSpPr>
-          <p:cNvPr id="23" name="Rectangle 22"/>
+          <p:cNvPr id="24" name="Rectangle 23"/>
           <p:cNvSpPr/>
           <p:nvPr/>
         </p:nvSpPr>
         <p:spPr>
           <a:xfrm>
-            <a:off x="3535591" y="2503170"/>
+            <a:off x="3657508" y="2846070"/>
             <a:ext cx="4145176" cy="699516"/>
           </a:xfrm>
           <a:prstGeom prst="rect">
@@ -18783,13 +18441,13 @@
       </p:sp>
       <p:sp>
         <p:nvSpPr>
-          <p:cNvPr id="24" name="TextBox 23"/>
-          <p:cNvSpPr txBox="1"/>
-          <p:nvPr/>
-        </p:nvSpPr>
-        <p:spPr>
-          <a:xfrm>
-            <a:off x="3535591" y="2530602"/>
+          <p:cNvPr id="25" name="TextBox 24"/>
+          <p:cNvSpPr txBox="1"/>
+          <p:nvPr/>
+        </p:nvSpPr>
+        <p:spPr>
+          <a:xfrm>
+            <a:off x="3657508" y="2873502"/>
             <a:ext cx="4145176" cy="644651"/>
           </a:xfrm>
           <a:prstGeom prst="rect">
@@ -18805,7 +18463,7 @@
           <a:p>
             <a:pPr algn="l"/>
             <a:r>
-              <a:rPr sz="750" b="0">
+              <a:rPr sz="800" b="0">
                 <a:solidFill>
                   <a:srgbClr val="1A1A1A"/>
                 </a:solidFill>
@@ -18818,13 +18476,13 @@
       </p:sp>
       <p:sp>
         <p:nvSpPr>
-          <p:cNvPr id="25" name="Rectangle 24"/>
+          <p:cNvPr id="26" name="Rectangle 25"/>
           <p:cNvSpPr/>
           <p:nvPr/>
         </p:nvSpPr>
         <p:spPr>
           <a:xfrm>
-            <a:off x="7680767" y="2503170"/>
+            <a:off x="7802684" y="2846070"/>
             <a:ext cx="4145176" cy="699516"/>
           </a:xfrm>
           <a:prstGeom prst="rect">
@@ -18864,13 +18522,13 @@
       </p:sp>
       <p:sp>
         <p:nvSpPr>
-          <p:cNvPr id="26" name="TextBox 25"/>
-          <p:cNvSpPr txBox="1"/>
-          <p:nvPr/>
-        </p:nvSpPr>
-        <p:spPr>
-          <a:xfrm>
-            <a:off x="7680767" y="2530602"/>
+          <p:cNvPr id="27" name="TextBox 26"/>
+          <p:cNvSpPr txBox="1"/>
+          <p:nvPr/>
+        </p:nvSpPr>
+        <p:spPr>
+          <a:xfrm>
+            <a:off x="7802684" y="2873502"/>
             <a:ext cx="4145176" cy="644651"/>
           </a:xfrm>
           <a:prstGeom prst="rect">
@@ -18886,7 +18544,7 @@
           <a:p>
             <a:pPr algn="l"/>
             <a:r>
-              <a:rPr sz="750" b="0">
+              <a:rPr sz="800" b="0">
                 <a:solidFill>
                   <a:srgbClr val="1A1A1A"/>
                 </a:solidFill>
@@ -18899,13 +18557,13 @@
       </p:sp>
       <p:sp>
         <p:nvSpPr>
-          <p:cNvPr id="27" name="Rectangle 26"/>
+          <p:cNvPr id="28" name="Rectangle 27"/>
           <p:cNvSpPr/>
           <p:nvPr/>
         </p:nvSpPr>
         <p:spPr>
           <a:xfrm>
-            <a:off x="365750" y="3202686"/>
+            <a:off x="487667" y="3545586"/>
             <a:ext cx="3169840" cy="534924"/>
           </a:xfrm>
           <a:prstGeom prst="rect">
@@ -18945,13 +18603,13 @@
       </p:sp>
       <p:sp>
         <p:nvSpPr>
-          <p:cNvPr id="28" name="TextBox 27"/>
-          <p:cNvSpPr txBox="1"/>
-          <p:nvPr/>
-        </p:nvSpPr>
-        <p:spPr>
-          <a:xfrm>
-            <a:off x="365750" y="3230118"/>
+          <p:cNvPr id="29" name="TextBox 28"/>
+          <p:cNvSpPr txBox="1"/>
+          <p:nvPr/>
+        </p:nvSpPr>
+        <p:spPr>
+          <a:xfrm>
+            <a:off x="487667" y="3573018"/>
             <a:ext cx="3169840" cy="480060"/>
           </a:xfrm>
           <a:prstGeom prst="rect">
@@ -18967,7 +18625,7 @@
           <a:p>
             <a:pPr algn="l"/>
             <a:r>
-              <a:rPr sz="750" b="0">
+              <a:rPr sz="800" b="0">
                 <a:solidFill>
                   <a:srgbClr val="1A1A1A"/>
                 </a:solidFill>
@@ -18980,13 +18638,13 @@
       </p:sp>
       <p:sp>
         <p:nvSpPr>
-          <p:cNvPr id="29" name="Rectangle 28"/>
+          <p:cNvPr id="30" name="Rectangle 29"/>
           <p:cNvSpPr/>
           <p:nvPr/>
         </p:nvSpPr>
         <p:spPr>
           <a:xfrm>
-            <a:off x="3535591" y="3202686"/>
+            <a:off x="3657508" y="3545586"/>
             <a:ext cx="4145176" cy="534924"/>
           </a:xfrm>
           <a:prstGeom prst="rect">
@@ -19026,13 +18684,13 @@
       </p:sp>
       <p:sp>
         <p:nvSpPr>
-          <p:cNvPr id="30" name="TextBox 29"/>
-          <p:cNvSpPr txBox="1"/>
-          <p:nvPr/>
-        </p:nvSpPr>
-        <p:spPr>
-          <a:xfrm>
-            <a:off x="3535591" y="3230118"/>
+          <p:cNvPr id="31" name="TextBox 30"/>
+          <p:cNvSpPr txBox="1"/>
+          <p:nvPr/>
+        </p:nvSpPr>
+        <p:spPr>
+          <a:xfrm>
+            <a:off x="3657508" y="3573018"/>
             <a:ext cx="4145176" cy="480060"/>
           </a:xfrm>
           <a:prstGeom prst="rect">
@@ -19048,7 +18706,7 @@
           <a:p>
             <a:pPr algn="l"/>
             <a:r>
-              <a:rPr sz="750" b="0">
+              <a:rPr sz="800" b="0">
                 <a:solidFill>
                   <a:srgbClr val="1A1A1A"/>
                 </a:solidFill>
@@ -19061,13 +18719,13 @@
       </p:sp>
       <p:sp>
         <p:nvSpPr>
-          <p:cNvPr id="31" name="Rectangle 30"/>
+          <p:cNvPr id="32" name="Rectangle 31"/>
           <p:cNvSpPr/>
           <p:nvPr/>
         </p:nvSpPr>
         <p:spPr>
           <a:xfrm>
-            <a:off x="7680767" y="3202686"/>
+            <a:off x="7802684" y="3545586"/>
             <a:ext cx="4145176" cy="534924"/>
           </a:xfrm>
           <a:prstGeom prst="rect">
@@ -19107,13 +18765,13 @@
       </p:sp>
       <p:sp>
         <p:nvSpPr>
-          <p:cNvPr id="32" name="TextBox 31"/>
-          <p:cNvSpPr txBox="1"/>
-          <p:nvPr/>
-        </p:nvSpPr>
-        <p:spPr>
-          <a:xfrm>
-            <a:off x="7680767" y="3230118"/>
+          <p:cNvPr id="33" name="TextBox 32"/>
+          <p:cNvSpPr txBox="1"/>
+          <p:nvPr/>
+        </p:nvSpPr>
+        <p:spPr>
+          <a:xfrm>
+            <a:off x="7802684" y="3573018"/>
             <a:ext cx="4145176" cy="480060"/>
           </a:xfrm>
           <a:prstGeom prst="rect">
@@ -19129,7 +18787,7 @@
           <a:p>
             <a:pPr algn="l"/>
             <a:r>
-              <a:rPr sz="750" b="0">
+              <a:rPr sz="800" b="0">
                 <a:solidFill>
                   <a:srgbClr val="1A1A1A"/>
                 </a:solidFill>
@@ -19142,13 +18800,13 @@
       </p:sp>
       <p:sp>
         <p:nvSpPr>
-          <p:cNvPr id="33" name="Rectangle 32"/>
+          <p:cNvPr id="34" name="Rectangle 33"/>
           <p:cNvSpPr/>
           <p:nvPr/>
         </p:nvSpPr>
         <p:spPr>
           <a:xfrm>
-            <a:off x="365750" y="3737610"/>
+            <a:off x="487667" y="4080510"/>
             <a:ext cx="3169840" cy="411480"/>
           </a:xfrm>
           <a:prstGeom prst="rect">
@@ -19188,13 +18846,13 @@
       </p:sp>
       <p:sp>
         <p:nvSpPr>
-          <p:cNvPr id="34" name="TextBox 33"/>
-          <p:cNvSpPr txBox="1"/>
-          <p:nvPr/>
-        </p:nvSpPr>
-        <p:spPr>
-          <a:xfrm>
-            <a:off x="365750" y="3765042"/>
+          <p:cNvPr id="35" name="TextBox 34"/>
+          <p:cNvSpPr txBox="1"/>
+          <p:nvPr/>
+        </p:nvSpPr>
+        <p:spPr>
+          <a:xfrm>
+            <a:off x="487667" y="4107942"/>
             <a:ext cx="3169840" cy="356616"/>
           </a:xfrm>
           <a:prstGeom prst="rect">
@@ -19210,7 +18868,7 @@
           <a:p>
             <a:pPr algn="l"/>
             <a:r>
-              <a:rPr sz="750" b="0">
+              <a:rPr sz="800" b="0">
                 <a:solidFill>
                   <a:srgbClr val="1A1A1A"/>
                 </a:solidFill>
@@ -19223,13 +18881,13 @@
       </p:sp>
       <p:sp>
         <p:nvSpPr>
-          <p:cNvPr id="35" name="Rectangle 34"/>
+          <p:cNvPr id="36" name="Rectangle 35"/>
           <p:cNvSpPr/>
           <p:nvPr/>
         </p:nvSpPr>
         <p:spPr>
           <a:xfrm>
-            <a:off x="3535591" y="3737610"/>
+            <a:off x="3657508" y="4080510"/>
             <a:ext cx="4145176" cy="411480"/>
           </a:xfrm>
           <a:prstGeom prst="rect">
@@ -19269,13 +18927,13 @@
       </p:sp>
       <p:sp>
         <p:nvSpPr>
-          <p:cNvPr id="36" name="TextBox 35"/>
-          <p:cNvSpPr txBox="1"/>
-          <p:nvPr/>
-        </p:nvSpPr>
-        <p:spPr>
-          <a:xfrm>
-            <a:off x="3535591" y="3765042"/>
+          <p:cNvPr id="37" name="TextBox 36"/>
+          <p:cNvSpPr txBox="1"/>
+          <p:nvPr/>
+        </p:nvSpPr>
+        <p:spPr>
+          <a:xfrm>
+            <a:off x="3657508" y="4107942"/>
             <a:ext cx="4145176" cy="356616"/>
           </a:xfrm>
           <a:prstGeom prst="rect">
@@ -19291,7 +18949,7 @@
           <a:p>
             <a:pPr algn="l"/>
             <a:r>
-              <a:rPr sz="750" b="0">
+              <a:rPr sz="800" b="0">
                 <a:solidFill>
                   <a:srgbClr val="1A1A1A"/>
                 </a:solidFill>
@@ -19304,13 +18962,13 @@
       </p:sp>
       <p:sp>
         <p:nvSpPr>
-          <p:cNvPr id="37" name="Rectangle 36"/>
+          <p:cNvPr id="38" name="Rectangle 37"/>
           <p:cNvSpPr/>
           <p:nvPr/>
         </p:nvSpPr>
         <p:spPr>
           <a:xfrm>
-            <a:off x="7680767" y="3737610"/>
+            <a:off x="7802684" y="4080510"/>
             <a:ext cx="4145176" cy="411480"/>
           </a:xfrm>
           <a:prstGeom prst="rect">
@@ -19350,13 +19008,13 @@
       </p:sp>
       <p:sp>
         <p:nvSpPr>
-          <p:cNvPr id="38" name="TextBox 37"/>
-          <p:cNvSpPr txBox="1"/>
-          <p:nvPr/>
-        </p:nvSpPr>
-        <p:spPr>
-          <a:xfrm>
-            <a:off x="7680767" y="3765042"/>
+          <p:cNvPr id="39" name="TextBox 38"/>
+          <p:cNvSpPr txBox="1"/>
+          <p:nvPr/>
+        </p:nvSpPr>
+        <p:spPr>
+          <a:xfrm>
+            <a:off x="7802684" y="4107942"/>
             <a:ext cx="4145176" cy="356616"/>
           </a:xfrm>
           <a:prstGeom prst="rect">
@@ -19372,7 +19030,7 @@
           <a:p>
             <a:pPr algn="l"/>
             <a:r>
-              <a:rPr sz="750" b="0">
+              <a:rPr sz="800" b="0">
                 <a:solidFill>
                   <a:srgbClr val="1A1A1A"/>
                 </a:solidFill>
@@ -19385,7 +19043,7 @@
       </p:sp>
       <p:sp>
         <p:nvSpPr>
-          <p:cNvPr id="39" name="TextBox 38"/>
+          <p:cNvPr id="40" name="TextBox 39"/>
           <p:cNvSpPr txBox="1"/>
           <p:nvPr/>
         </p:nvSpPr>
@@ -19420,7 +19078,7 @@
       </p:sp>
       <p:sp>
         <p:nvSpPr>
-          <p:cNvPr id="40" name="TextBox 39"/>
+          <p:cNvPr id="41" name="TextBox 40"/>
           <p:cNvSpPr txBox="1"/>
           <p:nvPr/>
         </p:nvSpPr>
